--- a/Lesson 3 - Reviewing Java Implementation of OO Principles - Part 1/Homework - Lesson 3 - Reviewing Java Implementation of OO Principles - Part 1/SolarSystemUML.pptx
+++ b/Lesson 3 - Reviewing Java Implementation of OO Principles - Part 1/Homework - Lesson 3 - Reviewing Java Implementation of OO Principles - Part 1/SolarSystemUML.pptx
@@ -13,8 +13,8 @@
 </file>
 
 <file path=ppt/slideLayouts/slideLayout1.xml><?xml version="1.0" encoding="utf-8"?>
-<p:sldLayout xmlns:a="http://schemas.openxmlformats.org/drawingml/2006/main" xmlns:p="http://schemas.openxmlformats.org/presentationml/2006/main" xmlns:r="http://schemas.openxmlformats.org/officeDocument/2006/relationships" xmlns:p14="http://schemas.microsoft.com/office/powerpoint/2010/main" xmlns:p15="http://schemas.microsoft.com/office/powerpoint/2012/main" xmlns:mc="http://schemas.openxmlformats.org/markup-compatibility/2006" type="titleOnly" preserve="1">
-  <p:cSld name="Title Only">
+<p:sldLayout xmlns:a="http://schemas.openxmlformats.org/drawingml/2006/main" xmlns:p="http://schemas.openxmlformats.org/presentationml/2006/main" xmlns:r="http://schemas.openxmlformats.org/officeDocument/2006/relationships" xmlns:p14="http://schemas.microsoft.com/office/powerpoint/2010/main" xmlns:p15="http://schemas.microsoft.com/office/powerpoint/2012/main" xmlns:mc="http://schemas.openxmlformats.org/markup-compatibility/2006" type="title" preserve="1">
+  <p:cSld name="Title Slide">
     <p:bg>
       <p:bgPr>
         <a:solidFill>
@@ -48,8 +48,8 @@
         </p:nvSpPr>
         <p:spPr>
           <a:xfrm>
-            <a:off x="457200" y="274680"/>
-            <a:ext cx="8227440" cy="1140840"/>
+            <a:off x="685800" y="2130480"/>
+            <a:ext cx="7768080" cy="1465560"/>
           </a:xfrm>
           <a:prstGeom prst="rect">
             <a:avLst/>
@@ -127,7 +127,7 @@
         <p:spPr>
           <a:xfrm>
             <a:off x="457200" y="6356520"/>
-            <a:ext cx="2131560" cy="362880"/>
+            <a:ext cx="2129400" cy="360720"/>
           </a:xfrm>
           <a:prstGeom prst="rect">
             <a:avLst/>
@@ -183,7 +183,7 @@
                 <a:uFillTx/>
                 <a:latin typeface="Calibri"/>
               </a:rPr>
-              <a:t> </a:t>
+              <a:t>&lt;date/time&gt;</a:t>
             </a:r>
             <a:endParaRPr lang="en-US" sz="1200" b="0" u="none" strike="noStrike">
               <a:solidFill>
@@ -209,7 +209,7 @@
         <p:spPr>
           <a:xfrm>
             <a:off x="3124080" y="6356520"/>
-            <a:ext cx="2893320" cy="362880"/>
+            <a:ext cx="2891160" cy="360720"/>
           </a:xfrm>
           <a:prstGeom prst="rect">
             <a:avLst/>
@@ -261,7 +261,7 @@
                 <a:uFillTx/>
                 <a:latin typeface="Times New Roman"/>
               </a:rPr>
-              <a:t> </a:t>
+              <a:t>&lt;footer&gt;</a:t>
             </a:r>
             <a:endParaRPr lang="en-US" sz="1400" b="0" u="none" strike="noStrike">
               <a:solidFill>
@@ -287,7 +287,7 @@
         <p:spPr>
           <a:xfrm>
             <a:off x="6553080" y="6356520"/>
-            <a:ext cx="2131560" cy="362880"/>
+            <a:ext cx="2129400" cy="360720"/>
           </a:xfrm>
           <a:prstGeom prst="rect">
             <a:avLst/>
@@ -332,7 +332,7 @@
                 <a:tab pos="0" algn="l"/>
               </a:tabLst>
             </a:pPr>
-            <a:fld id="{E9EA0491-FB3F-4A2C-A664-E7487A05E711}" type="slidenum">
+            <a:fld id="{0968FADA-627B-4CA7-9B03-FCC259D5D131}" type="slidenum">
               <a:rPr lang="en-US" sz="1200" b="0" u="none" strike="noStrike">
                 <a:solidFill>
                   <a:schemeClr val="dk1">
@@ -343,7 +343,7 @@
                 <a:uFillTx/>
                 <a:latin typeface="Calibri"/>
               </a:rPr>
-              <a:t>1</a:t>
+              <a:t>&lt;number&gt;</a:t>
             </a:fld>
             <a:endParaRPr lang="en-US" sz="1200" b="0" u="none" strike="noStrike">
               <a:solidFill>
@@ -365,8 +365,8 @@
 </file>
 
 <file path=ppt/slideLayouts/slideLayout10.xml><?xml version="1.0" encoding="utf-8"?>
-<p:sldLayout xmlns:a="http://schemas.openxmlformats.org/drawingml/2006/main" xmlns:p="http://schemas.openxmlformats.org/presentationml/2006/main" xmlns:r="http://schemas.openxmlformats.org/officeDocument/2006/relationships" xmlns:p14="http://schemas.microsoft.com/office/powerpoint/2010/main" xmlns:p15="http://schemas.microsoft.com/office/powerpoint/2012/main" xmlns:mc="http://schemas.openxmlformats.org/markup-compatibility/2006" type="twoObj" preserve="1">
-  <p:cSld name="Two Content">
+<p:sldLayout xmlns:a="http://schemas.openxmlformats.org/drawingml/2006/main" xmlns:p="http://schemas.openxmlformats.org/presentationml/2006/main" xmlns:r="http://schemas.openxmlformats.org/officeDocument/2006/relationships" xmlns:p14="http://schemas.microsoft.com/office/powerpoint/2010/main" xmlns:p15="http://schemas.microsoft.com/office/powerpoint/2012/main" xmlns:mc="http://schemas.openxmlformats.org/markup-compatibility/2006" type="blank" preserve="1">
+  <p:cSld name="Content with Caption">
     <p:bg>
       <p:bgPr>
         <a:solidFill>
@@ -390,7 +390,7 @@
       </p:grpSpPr>
       <p:sp>
         <p:nvSpPr>
-          <p:cNvPr id="45" name="PlaceHolder 1"/>
+          <p:cNvPr id="47" name="PlaceHolder 1"/>
           <p:cNvSpPr>
             <a:spLocks noGrp="1"/>
           </p:cNvSpPr>
@@ -400,8 +400,8 @@
         </p:nvSpPr>
         <p:spPr>
           <a:xfrm>
-            <a:off x="457200" y="274680"/>
-            <a:ext cx="8227440" cy="1140840"/>
+            <a:off x="457200" y="272880"/>
+            <a:ext cx="3003840" cy="1157760"/>
           </a:xfrm>
           <a:prstGeom prst="rect">
             <a:avLst/>
@@ -412,19 +412,19 @@
           </a:ln>
         </p:spPr>
         <p:txBody>
-          <a:bodyPr lIns="91440" tIns="45720" rIns="91440" bIns="45720" anchor="ctr">
+          <a:bodyPr lIns="91440" tIns="45720" rIns="91440" bIns="45720" anchor="b">
             <a:noAutofit/>
           </a:bodyPr>
           <a:lstStyle>
-            <a:lvl1pPr indent="0" algn="ctr" defTabSz="457200">
-              <a:lnSpc>
-                <a:spcPct val="100000"/>
-              </a:lnSpc>
-              <a:buNone/>
-              <a:tabLst>
-                <a:tab pos="0" algn="l"/>
-              </a:tabLst>
-              <a:defRPr lang="en-US" sz="4400" b="0" u="none" strike="noStrike">
+            <a:lvl1pPr indent="0" algn="l" defTabSz="457200">
+              <a:lnSpc>
+                <a:spcPct val="100000"/>
+              </a:lnSpc>
+              <a:buNone/>
+              <a:tabLst>
+                <a:tab pos="0" algn="l"/>
+              </a:tabLst>
+              <a:defRPr lang="en-US" sz="2000" b="1" u="none" strike="noStrike">
                 <a:solidFill>
                   <a:schemeClr val="dk1"/>
                 </a:solidFill>
@@ -435,17 +435,17 @@
             </a:lvl1pPr>
           </a:lstStyle>
           <a:p>
-            <a:pPr indent="0" algn="ctr" defTabSz="457200">
-              <a:lnSpc>
-                <a:spcPct val="100000"/>
-              </a:lnSpc>
-              <a:buNone/>
-              <a:tabLst>
-                <a:tab pos="0" algn="l"/>
-              </a:tabLst>
-            </a:pPr>
-            <a:r>
-              <a:rPr lang="en-US" sz="4400" b="0" u="none" strike="noStrike">
+            <a:pPr indent="0" algn="l" defTabSz="457200">
+              <a:lnSpc>
+                <a:spcPct val="100000"/>
+              </a:lnSpc>
+              <a:buNone/>
+              <a:tabLst>
+                <a:tab pos="0" algn="l"/>
+              </a:tabLst>
+            </a:pPr>
+            <a:r>
+              <a:rPr lang="en-US" sz="2000" b="1" u="none" strike="noStrike">
                 <a:solidFill>
                   <a:schemeClr val="dk1"/>
                 </a:solidFill>
@@ -455,7 +455,7 @@
               </a:rPr>
               <a:t>Click to edit Master title style</a:t>
             </a:r>
-            <a:endParaRPr lang="en-US" sz="4400" b="0" u="none" strike="noStrike">
+            <a:endParaRPr lang="en-US" sz="2000" b="1" u="none" strike="noStrike">
               <a:solidFill>
                 <a:schemeClr val="dk1"/>
               </a:solidFill>
@@ -468,7 +468,7 @@
       </p:sp>
       <p:sp>
         <p:nvSpPr>
-          <p:cNvPr id="46" name="PlaceHolder 2"/>
+          <p:cNvPr id="48" name="PlaceHolder 2"/>
           <p:cNvSpPr>
             <a:spLocks noGrp="1"/>
           </p:cNvSpPr>
@@ -478,8 +478,8 @@
         </p:nvSpPr>
         <p:spPr>
           <a:xfrm>
-            <a:off x="457200" y="1600200"/>
-            <a:ext cx="4036320" cy="4523760"/>
+            <a:off x="3575160" y="272880"/>
+            <a:ext cx="5107320" cy="5848920"/>
           </a:xfrm>
           <a:prstGeom prst="rect">
             <a:avLst/>
@@ -499,13 +499,34 @@
                 <a:spcPct val="100000"/>
               </a:lnSpc>
               <a:spcBef>
+                <a:spcPts val="641"/>
+              </a:spcBef>
+              <a:buClr>
+                <a:srgbClr val="000000"/>
+              </a:buClr>
+              <a:buFont typeface="Arial"/>
+              <a:buChar char="•"/>
+              <a:defRPr lang="en-US" sz="3200" b="0" u="none" strike="noStrike">
+                <a:solidFill>
+                  <a:schemeClr val="dk1"/>
+                </a:solidFill>
+                <a:effectLst/>
+                <a:uFillTx/>
+                <a:latin typeface="Calibri"/>
+              </a:defRPr>
+            </a:lvl1pPr>
+            <a:lvl2pPr lvl="1" algn="l" defTabSz="457200">
+              <a:lnSpc>
+                <a:spcPct val="100000"/>
+              </a:lnSpc>
+              <a:spcBef>
                 <a:spcPts val="561"/>
               </a:spcBef>
               <a:buClr>
                 <a:srgbClr val="000000"/>
               </a:buClr>
               <a:buFont typeface="Arial"/>
-              <a:buChar char="•"/>
+              <a:buChar char="–"/>
               <a:defRPr lang="en-US" sz="2800" b="0" u="none" strike="noStrike">
                 <a:solidFill>
                   <a:schemeClr val="dk1"/>
@@ -514,8 +535,8 @@
                 <a:uFillTx/>
                 <a:latin typeface="Calibri"/>
               </a:defRPr>
-            </a:lvl1pPr>
-            <a:lvl2pPr lvl="1" algn="l" defTabSz="457200">
+            </a:lvl2pPr>
+            <a:lvl3pPr lvl="2" algn="l" defTabSz="457200">
               <a:lnSpc>
                 <a:spcPct val="100000"/>
               </a:lnSpc>
@@ -526,7 +547,7 @@
                 <a:srgbClr val="000000"/>
               </a:buClr>
               <a:buFont typeface="Arial"/>
-              <a:buChar char="–"/>
+              <a:buChar char="•"/>
               <a:defRPr lang="en-US" sz="2400" b="0" u="none" strike="noStrike">
                 <a:solidFill>
                   <a:schemeClr val="dk1"/>
@@ -535,8 +556,8 @@
                 <a:uFillTx/>
                 <a:latin typeface="Calibri"/>
               </a:defRPr>
-            </a:lvl2pPr>
-            <a:lvl3pPr lvl="2" algn="l" defTabSz="457200">
+            </a:lvl3pPr>
+            <a:lvl4pPr lvl="3" algn="l" defTabSz="457200">
               <a:lnSpc>
                 <a:spcPct val="100000"/>
               </a:lnSpc>
@@ -547,29 +568,8 @@
                 <a:srgbClr val="000000"/>
               </a:buClr>
               <a:buFont typeface="Arial"/>
-              <a:buChar char="•"/>
+              <a:buChar char="–"/>
               <a:defRPr lang="en-US" sz="2000" b="0" u="none" strike="noStrike">
-                <a:solidFill>
-                  <a:schemeClr val="dk1"/>
-                </a:solidFill>
-                <a:effectLst/>
-                <a:uFillTx/>
-                <a:latin typeface="Calibri"/>
-              </a:defRPr>
-            </a:lvl3pPr>
-            <a:lvl4pPr lvl="3" algn="l" defTabSz="457200">
-              <a:lnSpc>
-                <a:spcPct val="100000"/>
-              </a:lnSpc>
-              <a:spcBef>
-                <a:spcPts val="360"/>
-              </a:spcBef>
-              <a:buClr>
-                <a:srgbClr val="000000"/>
-              </a:buClr>
-              <a:buFont typeface="Arial"/>
-              <a:buChar char="–"/>
-              <a:defRPr lang="en-US" sz="1800" b="0" u="none" strike="noStrike">
                 <a:solidFill>
                   <a:schemeClr val="dk1"/>
                 </a:solidFill>
@@ -583,14 +583,14 @@
                 <a:spcPct val="100000"/>
               </a:lnSpc>
               <a:spcBef>
-                <a:spcPts val="360"/>
+                <a:spcPts val="400"/>
               </a:spcBef>
               <a:buClr>
                 <a:srgbClr val="000000"/>
               </a:buClr>
               <a:buFont typeface="Arial"/>
               <a:buChar char="»"/>
-              <a:defRPr lang="en-US" sz="1800" b="0" u="none" strike="noStrike">
+              <a:defRPr lang="en-US" sz="2000" b="0" u="none" strike="noStrike">
                 <a:solidFill>
                   <a:schemeClr val="dk1"/>
                 </a:solidFill>
@@ -602,6 +602,40 @@
           </a:lstStyle>
           <a:p>
             <a:pPr marL="343080" indent="-343080" algn="l" defTabSz="457200">
+              <a:lnSpc>
+                <a:spcPct val="100000"/>
+              </a:lnSpc>
+              <a:spcBef>
+                <a:spcPts val="641"/>
+              </a:spcBef>
+              <a:buClr>
+                <a:srgbClr val="000000"/>
+              </a:buClr>
+              <a:buFont typeface="Arial"/>
+              <a:buChar char="•"/>
+            </a:pPr>
+            <a:r>
+              <a:rPr lang="en-US" sz="3200" b="0" u="none" strike="noStrike">
+                <a:solidFill>
+                  <a:schemeClr val="dk1"/>
+                </a:solidFill>
+                <a:effectLst/>
+                <a:uFillTx/>
+                <a:latin typeface="Calibri"/>
+              </a:rPr>
+              <a:t>Click to edit Master text styles</a:t>
+            </a:r>
+            <a:endParaRPr lang="en-US" sz="3200" b="0" u="none" strike="noStrike">
+              <a:solidFill>
+                <a:schemeClr val="dk1"/>
+              </a:solidFill>
+              <a:effectLst/>
+              <a:uFillTx/>
+              <a:latin typeface="Calibri"/>
+            </a:endParaRPr>
+          </a:p>
+          <a:p>
+            <a:pPr marL="743040" lvl="1" indent="-285840" algn="l" defTabSz="457200">
               <a:lnSpc>
                 <a:spcPct val="100000"/>
               </a:lnSpc>
@@ -612,7 +646,7 @@
                 <a:srgbClr val="000000"/>
               </a:buClr>
               <a:buFont typeface="Arial"/>
-              <a:buChar char="•"/>
+              <a:buChar char="–"/>
             </a:pPr>
             <a:r>
               <a:rPr lang="en-US" sz="2800" b="0" u="none" strike="noStrike">
@@ -623,7 +657,7 @@
                 <a:uFillTx/>
                 <a:latin typeface="Calibri"/>
               </a:rPr>
-              <a:t>Click to edit Master text styles</a:t>
+              <a:t>Second level</a:t>
             </a:r>
             <a:endParaRPr lang="en-US" sz="2800" b="0" u="none" strike="noStrike">
               <a:solidFill>
@@ -635,7 +669,7 @@
             </a:endParaRPr>
           </a:p>
           <a:p>
-            <a:pPr marL="743040" lvl="1" indent="-285840" algn="l" defTabSz="457200">
+            <a:pPr marL="1143000" lvl="2" indent="-228600" algn="l" defTabSz="457200">
               <a:lnSpc>
                 <a:spcPct val="100000"/>
               </a:lnSpc>
@@ -646,7 +680,7 @@
                 <a:srgbClr val="000000"/>
               </a:buClr>
               <a:buFont typeface="Arial"/>
-              <a:buChar char="–"/>
+              <a:buChar char="•"/>
             </a:pPr>
             <a:r>
               <a:rPr lang="en-US" sz="2400" b="0" u="none" strike="noStrike">
@@ -657,7 +691,7 @@
                 <a:uFillTx/>
                 <a:latin typeface="Calibri"/>
               </a:rPr>
-              <a:t>Second level</a:t>
+              <a:t>Third level</a:t>
             </a:r>
             <a:endParaRPr lang="en-US" sz="2400" b="0" u="none" strike="noStrike">
               <a:solidFill>
@@ -669,7 +703,7 @@
             </a:endParaRPr>
           </a:p>
           <a:p>
-            <a:pPr marL="1143000" lvl="2" indent="-228600" algn="l" defTabSz="457200">
+            <a:pPr marL="1600200" lvl="3" indent="-228600" algn="l" defTabSz="457200">
               <a:lnSpc>
                 <a:spcPct val="100000"/>
               </a:lnSpc>
@@ -680,7 +714,7 @@
                 <a:srgbClr val="000000"/>
               </a:buClr>
               <a:buFont typeface="Arial"/>
-              <a:buChar char="•"/>
+              <a:buChar char="–"/>
             </a:pPr>
             <a:r>
               <a:rPr lang="en-US" sz="2000" b="0" u="none" strike="noStrike">
@@ -691,7 +725,7 @@
                 <a:uFillTx/>
                 <a:latin typeface="Calibri"/>
               </a:rPr>
-              <a:t>Third level</a:t>
+              <a:t>Fourth level</a:t>
             </a:r>
             <a:endParaRPr lang="en-US" sz="2000" b="0" u="none" strike="noStrike">
               <a:solidFill>
@@ -703,46 +737,12 @@
             </a:endParaRPr>
           </a:p>
           <a:p>
-            <a:pPr marL="1600200" lvl="3" indent="-228600" algn="l" defTabSz="457200">
+            <a:pPr marL="2057400" lvl="4" indent="-228600" algn="l" defTabSz="457200">
               <a:lnSpc>
                 <a:spcPct val="100000"/>
               </a:lnSpc>
               <a:spcBef>
-                <a:spcPts val="360"/>
-              </a:spcBef>
-              <a:buClr>
-                <a:srgbClr val="000000"/>
-              </a:buClr>
-              <a:buFont typeface="Arial"/>
-              <a:buChar char="–"/>
-            </a:pPr>
-            <a:r>
-              <a:rPr lang="en-US" sz="1800" b="0" u="none" strike="noStrike">
-                <a:solidFill>
-                  <a:schemeClr val="dk1"/>
-                </a:solidFill>
-                <a:effectLst/>
-                <a:uFillTx/>
-                <a:latin typeface="Calibri"/>
-              </a:rPr>
-              <a:t>Fourth level</a:t>
-            </a:r>
-            <a:endParaRPr lang="en-US" sz="1800" b="0" u="none" strike="noStrike">
-              <a:solidFill>
-                <a:schemeClr val="dk1"/>
-              </a:solidFill>
-              <a:effectLst/>
-              <a:uFillTx/>
-              <a:latin typeface="Calibri"/>
-            </a:endParaRPr>
-          </a:p>
-          <a:p>
-            <a:pPr marL="2057400" lvl="4" indent="-228600" algn="l" defTabSz="457200">
-              <a:lnSpc>
-                <a:spcPct val="100000"/>
-              </a:lnSpc>
-              <a:spcBef>
-                <a:spcPts val="360"/>
+                <a:spcPts val="400"/>
               </a:spcBef>
               <a:buClr>
                 <a:srgbClr val="000000"/>
@@ -751,7 +751,7 @@
               <a:buChar char="»"/>
             </a:pPr>
             <a:r>
-              <a:rPr lang="en-US" sz="1800" b="0" u="none" strike="noStrike">
+              <a:rPr lang="en-US" sz="2000" b="0" u="none" strike="noStrike">
                 <a:solidFill>
                   <a:schemeClr val="dk1"/>
                 </a:solidFill>
@@ -761,7 +761,7 @@
               </a:rPr>
               <a:t>Fifth level</a:t>
             </a:r>
-            <a:endParaRPr lang="en-US" sz="1800" b="0" u="none" strike="noStrike">
+            <a:endParaRPr lang="en-US" sz="2000" b="0" u="none" strike="noStrike">
               <a:solidFill>
                 <a:schemeClr val="dk1"/>
               </a:solidFill>
@@ -774,7 +774,7 @@
       </p:sp>
       <p:sp>
         <p:nvSpPr>
-          <p:cNvPr id="47" name="PlaceHolder 3"/>
+          <p:cNvPr id="49" name="PlaceHolder 3"/>
           <p:cNvSpPr>
             <a:spLocks noGrp="1"/>
           </p:cNvSpPr>
@@ -784,8 +784,8 @@
         </p:nvSpPr>
         <p:spPr>
           <a:xfrm>
-            <a:off x="4648320" y="1600200"/>
-            <a:ext cx="4036320" cy="4523760"/>
+            <a:off x="457200" y="1434960"/>
+            <a:ext cx="3003840" cy="4686840"/>
           </a:xfrm>
           <a:prstGeom prst="rect">
             <a:avLst/>
@@ -800,19 +800,18 @@
             <a:noAutofit/>
           </a:bodyPr>
           <a:lstStyle>
-            <a:lvl1pPr algn="l" defTabSz="457200">
+            <a:lvl1pPr indent="0" algn="l" defTabSz="457200">
               <a:lnSpc>
                 <a:spcPct val="100000"/>
               </a:lnSpc>
               <a:spcBef>
-                <a:spcPts val="561"/>
+                <a:spcPts val="281"/>
               </a:spcBef>
-              <a:buClr>
-                <a:srgbClr val="000000"/>
-              </a:buClr>
-              <a:buFont typeface="Arial"/>
-              <a:buChar char="•"/>
-              <a:defRPr lang="en-US" sz="2800" b="0" u="none" strike="noStrike">
+              <a:buNone/>
+              <a:tabLst>
+                <a:tab pos="0" algn="l"/>
+              </a:tabLst>
+              <a:defRPr lang="en-US" sz="1400" b="0" u="none" strike="noStrike">
                 <a:solidFill>
                   <a:schemeClr val="dk1"/>
                 </a:solidFill>
@@ -821,107 +820,22 @@
                 <a:latin typeface="Calibri"/>
               </a:defRPr>
             </a:lvl1pPr>
-            <a:lvl2pPr lvl="1" algn="l" defTabSz="457200">
+          </a:lstStyle>
+          <a:p>
+            <a:pPr indent="0" algn="l" defTabSz="457200">
               <a:lnSpc>
                 <a:spcPct val="100000"/>
               </a:lnSpc>
               <a:spcBef>
-                <a:spcPts val="479"/>
+                <a:spcPts val="281"/>
               </a:spcBef>
-              <a:buClr>
-                <a:srgbClr val="000000"/>
-              </a:buClr>
-              <a:buFont typeface="Arial"/>
-              <a:buChar char="–"/>
-              <a:defRPr lang="en-US" sz="2400" b="0" u="none" strike="noStrike">
-                <a:solidFill>
-                  <a:schemeClr val="dk1"/>
-                </a:solidFill>
-                <a:effectLst/>
-                <a:uFillTx/>
-                <a:latin typeface="Calibri"/>
-              </a:defRPr>
-            </a:lvl2pPr>
-            <a:lvl3pPr lvl="2" algn="l" defTabSz="457200">
-              <a:lnSpc>
-                <a:spcPct val="100000"/>
-              </a:lnSpc>
-              <a:spcBef>
-                <a:spcPts val="400"/>
-              </a:spcBef>
-              <a:buClr>
-                <a:srgbClr val="000000"/>
-              </a:buClr>
-              <a:buFont typeface="Arial"/>
-              <a:buChar char="•"/>
-              <a:defRPr lang="en-US" sz="2000" b="0" u="none" strike="noStrike">
-                <a:solidFill>
-                  <a:schemeClr val="dk1"/>
-                </a:solidFill>
-                <a:effectLst/>
-                <a:uFillTx/>
-                <a:latin typeface="Calibri"/>
-              </a:defRPr>
-            </a:lvl3pPr>
-            <a:lvl4pPr lvl="3" algn="l" defTabSz="457200">
-              <a:lnSpc>
-                <a:spcPct val="100000"/>
-              </a:lnSpc>
-              <a:spcBef>
-                <a:spcPts val="360"/>
-              </a:spcBef>
-              <a:buClr>
-                <a:srgbClr val="000000"/>
-              </a:buClr>
-              <a:buFont typeface="Arial"/>
-              <a:buChar char="–"/>
-              <a:defRPr lang="en-US" sz="1800" b="0" u="none" strike="noStrike">
-                <a:solidFill>
-                  <a:schemeClr val="dk1"/>
-                </a:solidFill>
-                <a:effectLst/>
-                <a:uFillTx/>
-                <a:latin typeface="Calibri"/>
-              </a:defRPr>
-            </a:lvl4pPr>
-            <a:lvl5pPr lvl="4" algn="l" defTabSz="457200">
-              <a:lnSpc>
-                <a:spcPct val="100000"/>
-              </a:lnSpc>
-              <a:spcBef>
-                <a:spcPts val="360"/>
-              </a:spcBef>
-              <a:buClr>
-                <a:srgbClr val="000000"/>
-              </a:buClr>
-              <a:buFont typeface="Arial"/>
-              <a:buChar char="»"/>
-              <a:defRPr lang="en-US" sz="1800" b="0" u="none" strike="noStrike">
-                <a:solidFill>
-                  <a:schemeClr val="dk1"/>
-                </a:solidFill>
-                <a:effectLst/>
-                <a:uFillTx/>
-                <a:latin typeface="Calibri"/>
-              </a:defRPr>
-            </a:lvl5pPr>
-          </a:lstStyle>
-          <a:p>
-            <a:pPr marL="343080" indent="-343080" algn="l" defTabSz="457200">
-              <a:lnSpc>
-                <a:spcPct val="100000"/>
-              </a:lnSpc>
-              <a:spcBef>
-                <a:spcPts val="561"/>
-              </a:spcBef>
-              <a:buClr>
-                <a:srgbClr val="000000"/>
-              </a:buClr>
-              <a:buFont typeface="Arial"/>
-              <a:buChar char="•"/>
-            </a:pPr>
-            <a:r>
-              <a:rPr lang="en-US" sz="2800" b="0" u="none" strike="noStrike">
+              <a:buNone/>
+              <a:tabLst>
+                <a:tab pos="0" algn="l"/>
+              </a:tabLst>
+            </a:pPr>
+            <a:r>
+              <a:rPr lang="en-US" sz="1400" b="0" u="none" strike="noStrike">
                 <a:solidFill>
                   <a:schemeClr val="dk1"/>
                 </a:solidFill>
@@ -931,143 +845,7 @@
               </a:rPr>
               <a:t>Click to edit Master text styles</a:t>
             </a:r>
-            <a:endParaRPr lang="en-US" sz="2800" b="0" u="none" strike="noStrike">
-              <a:solidFill>
-                <a:schemeClr val="dk1"/>
-              </a:solidFill>
-              <a:effectLst/>
-              <a:uFillTx/>
-              <a:latin typeface="Calibri"/>
-            </a:endParaRPr>
-          </a:p>
-          <a:p>
-            <a:pPr marL="743040" lvl="1" indent="-285840" algn="l" defTabSz="457200">
-              <a:lnSpc>
-                <a:spcPct val="100000"/>
-              </a:lnSpc>
-              <a:spcBef>
-                <a:spcPts val="479"/>
-              </a:spcBef>
-              <a:buClr>
-                <a:srgbClr val="000000"/>
-              </a:buClr>
-              <a:buFont typeface="Arial"/>
-              <a:buChar char="–"/>
-            </a:pPr>
-            <a:r>
-              <a:rPr lang="en-US" sz="2400" b="0" u="none" strike="noStrike">
-                <a:solidFill>
-                  <a:schemeClr val="dk1"/>
-                </a:solidFill>
-                <a:effectLst/>
-                <a:uFillTx/>
-                <a:latin typeface="Calibri"/>
-              </a:rPr>
-              <a:t>Second level</a:t>
-            </a:r>
-            <a:endParaRPr lang="en-US" sz="2400" b="0" u="none" strike="noStrike">
-              <a:solidFill>
-                <a:schemeClr val="dk1"/>
-              </a:solidFill>
-              <a:effectLst/>
-              <a:uFillTx/>
-              <a:latin typeface="Calibri"/>
-            </a:endParaRPr>
-          </a:p>
-          <a:p>
-            <a:pPr marL="1143000" lvl="2" indent="-228600" algn="l" defTabSz="457200">
-              <a:lnSpc>
-                <a:spcPct val="100000"/>
-              </a:lnSpc>
-              <a:spcBef>
-                <a:spcPts val="400"/>
-              </a:spcBef>
-              <a:buClr>
-                <a:srgbClr val="000000"/>
-              </a:buClr>
-              <a:buFont typeface="Arial"/>
-              <a:buChar char="•"/>
-            </a:pPr>
-            <a:r>
-              <a:rPr lang="en-US" sz="2000" b="0" u="none" strike="noStrike">
-                <a:solidFill>
-                  <a:schemeClr val="dk1"/>
-                </a:solidFill>
-                <a:effectLst/>
-                <a:uFillTx/>
-                <a:latin typeface="Calibri"/>
-              </a:rPr>
-              <a:t>Third level</a:t>
-            </a:r>
-            <a:endParaRPr lang="en-US" sz="2000" b="0" u="none" strike="noStrike">
-              <a:solidFill>
-                <a:schemeClr val="dk1"/>
-              </a:solidFill>
-              <a:effectLst/>
-              <a:uFillTx/>
-              <a:latin typeface="Calibri"/>
-            </a:endParaRPr>
-          </a:p>
-          <a:p>
-            <a:pPr marL="1600200" lvl="3" indent="-228600" algn="l" defTabSz="457200">
-              <a:lnSpc>
-                <a:spcPct val="100000"/>
-              </a:lnSpc>
-              <a:spcBef>
-                <a:spcPts val="360"/>
-              </a:spcBef>
-              <a:buClr>
-                <a:srgbClr val="000000"/>
-              </a:buClr>
-              <a:buFont typeface="Arial"/>
-              <a:buChar char="–"/>
-            </a:pPr>
-            <a:r>
-              <a:rPr lang="en-US" sz="1800" b="0" u="none" strike="noStrike">
-                <a:solidFill>
-                  <a:schemeClr val="dk1"/>
-                </a:solidFill>
-                <a:effectLst/>
-                <a:uFillTx/>
-                <a:latin typeface="Calibri"/>
-              </a:rPr>
-              <a:t>Fourth level</a:t>
-            </a:r>
-            <a:endParaRPr lang="en-US" sz="1800" b="0" u="none" strike="noStrike">
-              <a:solidFill>
-                <a:schemeClr val="dk1"/>
-              </a:solidFill>
-              <a:effectLst/>
-              <a:uFillTx/>
-              <a:latin typeface="Calibri"/>
-            </a:endParaRPr>
-          </a:p>
-          <a:p>
-            <a:pPr marL="2057400" lvl="4" indent="-228600" algn="l" defTabSz="457200">
-              <a:lnSpc>
-                <a:spcPct val="100000"/>
-              </a:lnSpc>
-              <a:spcBef>
-                <a:spcPts val="360"/>
-              </a:spcBef>
-              <a:buClr>
-                <a:srgbClr val="000000"/>
-              </a:buClr>
-              <a:buFont typeface="Arial"/>
-              <a:buChar char="»"/>
-            </a:pPr>
-            <a:r>
-              <a:rPr lang="en-US" sz="1800" b="0" u="none" strike="noStrike">
-                <a:solidFill>
-                  <a:schemeClr val="dk1"/>
-                </a:solidFill>
-                <a:effectLst/>
-                <a:uFillTx/>
-                <a:latin typeface="Calibri"/>
-              </a:rPr>
-              <a:t>Fifth level</a:t>
-            </a:r>
-            <a:endParaRPr lang="en-US" sz="1800" b="0" u="none" strike="noStrike">
+            <a:endParaRPr lang="en-US" sz="1400" b="0" u="none" strike="noStrike">
               <a:solidFill>
                 <a:schemeClr val="dk1"/>
               </a:solidFill>
@@ -1080,7 +858,7 @@
       </p:sp>
       <p:sp>
         <p:nvSpPr>
-          <p:cNvPr id="48" name="PlaceHolder 4"/>
+          <p:cNvPr id="50" name="PlaceHolder 4"/>
           <p:cNvSpPr>
             <a:spLocks noGrp="1"/>
           </p:cNvSpPr>
@@ -1091,7 +869,7 @@
         <p:spPr>
           <a:xfrm>
             <a:off x="457200" y="6356520"/>
-            <a:ext cx="2131560" cy="362880"/>
+            <a:ext cx="2129400" cy="360720"/>
           </a:xfrm>
           <a:prstGeom prst="rect">
             <a:avLst/>
@@ -1147,7 +925,7 @@
                 <a:uFillTx/>
                 <a:latin typeface="Calibri"/>
               </a:rPr>
-              <a:t> </a:t>
+              <a:t>&lt;date/time&gt;</a:t>
             </a:r>
             <a:endParaRPr lang="en-US" sz="1200" b="0" u="none" strike="noStrike">
               <a:solidFill>
@@ -1162,7 +940,7 @@
       </p:sp>
       <p:sp>
         <p:nvSpPr>
-          <p:cNvPr id="49" name="PlaceHolder 5"/>
+          <p:cNvPr id="51" name="PlaceHolder 5"/>
           <p:cNvSpPr>
             <a:spLocks noGrp="1"/>
           </p:cNvSpPr>
@@ -1173,7 +951,7 @@
         <p:spPr>
           <a:xfrm>
             <a:off x="3124080" y="6356520"/>
-            <a:ext cx="2893320" cy="362880"/>
+            <a:ext cx="2891160" cy="360720"/>
           </a:xfrm>
           <a:prstGeom prst="rect">
             <a:avLst/>
@@ -1225,7 +1003,7 @@
                 <a:uFillTx/>
                 <a:latin typeface="Times New Roman"/>
               </a:rPr>
-              <a:t> </a:t>
+              <a:t>&lt;footer&gt;</a:t>
             </a:r>
             <a:endParaRPr lang="en-US" sz="1400" b="0" u="none" strike="noStrike">
               <a:solidFill>
@@ -1240,7 +1018,7 @@
       </p:sp>
       <p:sp>
         <p:nvSpPr>
-          <p:cNvPr id="50" name="PlaceHolder 6"/>
+          <p:cNvPr id="52" name="PlaceHolder 6"/>
           <p:cNvSpPr>
             <a:spLocks noGrp="1"/>
           </p:cNvSpPr>
@@ -1251,7 +1029,7 @@
         <p:spPr>
           <a:xfrm>
             <a:off x="6553080" y="6356520"/>
-            <a:ext cx="2131560" cy="362880"/>
+            <a:ext cx="2129400" cy="360720"/>
           </a:xfrm>
           <a:prstGeom prst="rect">
             <a:avLst/>
@@ -1296,7 +1074,7 @@
                 <a:tab pos="0" algn="l"/>
               </a:tabLst>
             </a:pPr>
-            <a:fld id="{1590D7CB-5E3A-4A7F-B00D-40AD05B5B0BC}" type="slidenum">
+            <a:fld id="{AED90071-FBF4-4005-8667-E5621F95ADCB}" type="slidenum">
               <a:rPr lang="en-US" sz="1200" b="0" u="none" strike="noStrike">
                 <a:solidFill>
                   <a:schemeClr val="dk1">
@@ -1307,7 +1085,7 @@
                 <a:uFillTx/>
                 <a:latin typeface="Calibri"/>
               </a:rPr>
-              <a:t>1</a:t>
+              <a:t>&lt;number&gt;</a:t>
             </a:fld>
             <a:endParaRPr lang="en-US" sz="1200" b="0" u="none" strike="noStrike">
               <a:solidFill>
@@ -1330,7 +1108,7 @@
 
 <file path=ppt/slideLayouts/slideLayout11.xml><?xml version="1.0" encoding="utf-8"?>
 <p:sldLayout xmlns:a="http://schemas.openxmlformats.org/drawingml/2006/main" xmlns:p="http://schemas.openxmlformats.org/presentationml/2006/main" xmlns:r="http://schemas.openxmlformats.org/officeDocument/2006/relationships" xmlns:p14="http://schemas.microsoft.com/office/powerpoint/2010/main" xmlns:p15="http://schemas.microsoft.com/office/powerpoint/2012/main" xmlns:mc="http://schemas.openxmlformats.org/markup-compatibility/2006" type="blank" preserve="1">
-  <p:cSld name="Comparison">
+  <p:cSld name="Picture with Caption">
     <p:bg>
       <p:bgPr>
         <a:solidFill>
@@ -1354,7 +1132,7 @@
       </p:grpSpPr>
       <p:sp>
         <p:nvSpPr>
-          <p:cNvPr id="51" name="PlaceHolder 1"/>
+          <p:cNvPr id="53" name="PlaceHolder 1"/>
           <p:cNvSpPr>
             <a:spLocks noGrp="1"/>
           </p:cNvSpPr>
@@ -1364,86 +1142,8 @@
         </p:nvSpPr>
         <p:spPr>
           <a:xfrm>
-            <a:off x="457200" y="274680"/>
-            <a:ext cx="8227440" cy="1140840"/>
-          </a:xfrm>
-          <a:prstGeom prst="rect">
-            <a:avLst/>
-          </a:prstGeom>
-          <a:noFill/>
-          <a:ln w="0">
-            <a:noFill/>
-          </a:ln>
-        </p:spPr>
-        <p:txBody>
-          <a:bodyPr lIns="91440" tIns="45720" rIns="91440" bIns="45720" anchor="ctr">
-            <a:noAutofit/>
-          </a:bodyPr>
-          <a:lstStyle>
-            <a:lvl1pPr indent="0" algn="ctr" defTabSz="457200">
-              <a:lnSpc>
-                <a:spcPct val="100000"/>
-              </a:lnSpc>
-              <a:buNone/>
-              <a:tabLst>
-                <a:tab pos="0" algn="l"/>
-              </a:tabLst>
-              <a:defRPr lang="en-US" sz="4400" b="0" u="none" strike="noStrike">
-                <a:solidFill>
-                  <a:schemeClr val="dk1"/>
-                </a:solidFill>
-                <a:effectLst/>
-                <a:uFillTx/>
-                <a:latin typeface="Calibri"/>
-              </a:defRPr>
-            </a:lvl1pPr>
-          </a:lstStyle>
-          <a:p>
-            <a:pPr indent="0" algn="ctr" defTabSz="457200">
-              <a:lnSpc>
-                <a:spcPct val="100000"/>
-              </a:lnSpc>
-              <a:buNone/>
-              <a:tabLst>
-                <a:tab pos="0" algn="l"/>
-              </a:tabLst>
-            </a:pPr>
-            <a:r>
-              <a:rPr lang="en-US" sz="4400" b="0" u="none" strike="noStrike">
-                <a:solidFill>
-                  <a:schemeClr val="dk1"/>
-                </a:solidFill>
-                <a:effectLst/>
-                <a:uFillTx/>
-                <a:latin typeface="Calibri"/>
-              </a:rPr>
-              <a:t>Click to edit Master title style</a:t>
-            </a:r>
-            <a:endParaRPr lang="en-US" sz="4400" b="0" u="none" strike="noStrike">
-              <a:solidFill>
-                <a:schemeClr val="dk1"/>
-              </a:solidFill>
-              <a:effectLst/>
-              <a:uFillTx/>
-              <a:latin typeface="Calibri"/>
-            </a:endParaRPr>
-          </a:p>
-        </p:txBody>
-      </p:sp>
-      <p:sp>
-        <p:nvSpPr>
-          <p:cNvPr id="52" name="PlaceHolder 2"/>
-          <p:cNvSpPr>
-            <a:spLocks noGrp="1"/>
-          </p:cNvSpPr>
-          <p:nvPr>
-            <p:ph type="body"/>
-          </p:nvPr>
-        </p:nvSpPr>
-        <p:spPr>
-          <a:xfrm>
-            <a:off x="457200" y="1535040"/>
-            <a:ext cx="4038120" cy="637560"/>
+            <a:off x="1792440" y="4800600"/>
+            <a:ext cx="5482080" cy="562320"/>
           </a:xfrm>
           <a:prstGeom prst="rect">
             <a:avLst/>
@@ -1462,14 +1162,11 @@
               <a:lnSpc>
                 <a:spcPct val="100000"/>
               </a:lnSpc>
-              <a:spcBef>
-                <a:spcPts val="479"/>
-              </a:spcBef>
-              <a:buNone/>
-              <a:tabLst>
-                <a:tab pos="0" algn="l"/>
-              </a:tabLst>
-              <a:defRPr lang="en-US" sz="2400" b="1" u="none" strike="noStrike">
+              <a:buNone/>
+              <a:tabLst>
+                <a:tab pos="0" algn="l"/>
+              </a:tabLst>
+              <a:defRPr lang="en-US" sz="2000" b="1" u="none" strike="noStrike">
                 <a:solidFill>
                   <a:schemeClr val="dk1"/>
                 </a:solidFill>
@@ -1484,26 +1181,23 @@
               <a:lnSpc>
                 <a:spcPct val="100000"/>
               </a:lnSpc>
-              <a:spcBef>
-                <a:spcPts val="479"/>
-              </a:spcBef>
-              <a:buNone/>
-              <a:tabLst>
-                <a:tab pos="0" algn="l"/>
-              </a:tabLst>
-            </a:pPr>
-            <a:r>
-              <a:rPr lang="en-US" sz="2400" b="1" u="none" strike="noStrike">
-                <a:solidFill>
-                  <a:schemeClr val="dk1"/>
-                </a:solidFill>
-                <a:effectLst/>
-                <a:uFillTx/>
-                <a:latin typeface="Calibri"/>
-              </a:rPr>
-              <a:t>Click to edit Master text styles</a:t>
-            </a:r>
-            <a:endParaRPr lang="en-US" sz="2400" b="0" u="none" strike="noStrike">
+              <a:buNone/>
+              <a:tabLst>
+                <a:tab pos="0" algn="l"/>
+              </a:tabLst>
+            </a:pPr>
+            <a:r>
+              <a:rPr lang="en-US" sz="2000" b="1" u="none" strike="noStrike">
+                <a:solidFill>
+                  <a:schemeClr val="dk1"/>
+                </a:solidFill>
+                <a:effectLst/>
+                <a:uFillTx/>
+                <a:latin typeface="Calibri"/>
+              </a:rPr>
+              <a:t>Click to edit Master title style</a:t>
+            </a:r>
+            <a:endParaRPr lang="en-US" sz="2000" b="1" u="none" strike="noStrike">
               <a:solidFill>
                 <a:schemeClr val="dk1"/>
               </a:solidFill>
@@ -1516,7 +1210,60 @@
       </p:sp>
       <p:sp>
         <p:nvSpPr>
-          <p:cNvPr id="53" name="PlaceHolder 3"/>
+          <p:cNvPr id="54" name="PlaceHolder 2"/>
+          <p:cNvSpPr>
+            <a:spLocks noGrp="1"/>
+          </p:cNvSpPr>
+          <p:nvPr>
+            <p:ph type="pic"/>
+          </p:nvPr>
+        </p:nvSpPr>
+        <p:spPr>
+          <a:xfrm>
+            <a:off x="1792440" y="612720"/>
+            <a:ext cx="5482080" cy="4110480"/>
+          </a:xfrm>
+          <a:prstGeom prst="rect">
+            <a:avLst/>
+          </a:prstGeom>
+          <a:noFill/>
+          <a:ln w="0">
+            <a:noFill/>
+          </a:ln>
+        </p:spPr>
+        <p:txBody>
+          <a:bodyPr lIns="90000" tIns="45000" rIns="90000" bIns="45000" anchor="t">
+            <a:noAutofit/>
+          </a:bodyPr>
+          <a:p>
+            <a:pPr indent="0" algn="l">
+              <a:buNone/>
+            </a:pPr>
+            <a:r>
+              <a:rPr lang="en-US" sz="1800" b="0" u="none" strike="noStrike">
+                <a:solidFill>
+                  <a:srgbClr val="000000"/>
+                </a:solidFill>
+                <a:effectLst/>
+                <a:uFillTx/>
+                <a:latin typeface="Arial"/>
+              </a:rPr>
+              <a:t>Double-click to add an Image</a:t>
+            </a:r>
+            <a:endParaRPr lang="en-US" sz="1800" b="0" u="none" strike="noStrike">
+              <a:solidFill>
+                <a:srgbClr val="000000"/>
+              </a:solidFill>
+              <a:effectLst/>
+              <a:uFillTx/>
+              <a:latin typeface="Arial"/>
+            </a:endParaRPr>
+          </a:p>
+        </p:txBody>
+      </p:sp>
+      <p:sp>
+        <p:nvSpPr>
+          <p:cNvPr id="55" name="PlaceHolder 3"/>
           <p:cNvSpPr>
             <a:spLocks noGrp="1"/>
           </p:cNvSpPr>
@@ -1526,8 +1273,8 @@
         </p:nvSpPr>
         <p:spPr>
           <a:xfrm>
-            <a:off x="457200" y="2174760"/>
-            <a:ext cx="4038120" cy="3949200"/>
+            <a:off x="1792440" y="5367240"/>
+            <a:ext cx="5482080" cy="800640"/>
           </a:xfrm>
           <a:prstGeom prst="rect">
             <a:avLst/>
@@ -1542,22 +1289,18 @@
             <a:noAutofit/>
           </a:bodyPr>
           <a:lstStyle>
-            <a:lvl1pPr algn="l" defTabSz="457200">
+            <a:lvl1pPr indent="0" algn="l" defTabSz="457200">
               <a:lnSpc>
                 <a:spcPct val="100000"/>
               </a:lnSpc>
               <a:spcBef>
-                <a:spcPts val="479"/>
+                <a:spcPts val="281"/>
               </a:spcBef>
-              <a:buClr>
-                <a:srgbClr val="000000"/>
-              </a:buClr>
-              <a:buFont typeface="Arial"/>
-              <a:buChar char="•"/>
-              <a:tabLst>
-                <a:tab pos="0" algn="l"/>
-              </a:tabLst>
-              <a:defRPr lang="en-US" sz="2400" b="0" u="none" strike="noStrike">
+              <a:buNone/>
+              <a:tabLst>
+                <a:tab pos="0" algn="l"/>
+              </a:tabLst>
+              <a:defRPr lang="en-US" sz="1400" b="0" u="none" strike="noStrike">
                 <a:solidFill>
                   <a:schemeClr val="dk1"/>
                 </a:solidFill>
@@ -1566,122 +1309,22 @@
                 <a:latin typeface="Calibri"/>
               </a:defRPr>
             </a:lvl1pPr>
-            <a:lvl2pPr lvl="1" algn="l" defTabSz="457200">
+          </a:lstStyle>
+          <a:p>
+            <a:pPr indent="0" algn="l" defTabSz="457200">
               <a:lnSpc>
                 <a:spcPct val="100000"/>
               </a:lnSpc>
               <a:spcBef>
-                <a:spcPts val="400"/>
+                <a:spcPts val="281"/>
               </a:spcBef>
-              <a:buClr>
-                <a:srgbClr val="000000"/>
-              </a:buClr>
-              <a:buFont typeface="Arial"/>
-              <a:buChar char="–"/>
-              <a:tabLst>
-                <a:tab pos="0" algn="l"/>
-              </a:tabLst>
-              <a:defRPr lang="en-US" sz="2000" b="0" u="none" strike="noStrike">
-                <a:solidFill>
-                  <a:schemeClr val="dk1"/>
-                </a:solidFill>
-                <a:effectLst/>
-                <a:uFillTx/>
-                <a:latin typeface="Calibri"/>
-              </a:defRPr>
-            </a:lvl2pPr>
-            <a:lvl3pPr lvl="2" algn="l" defTabSz="457200">
-              <a:lnSpc>
-                <a:spcPct val="100000"/>
-              </a:lnSpc>
-              <a:spcBef>
-                <a:spcPts val="360"/>
-              </a:spcBef>
-              <a:buClr>
-                <a:srgbClr val="000000"/>
-              </a:buClr>
-              <a:buFont typeface="Arial"/>
-              <a:buChar char="•"/>
-              <a:tabLst>
-                <a:tab pos="0" algn="l"/>
-              </a:tabLst>
-              <a:defRPr lang="en-US" sz="1800" b="0" u="none" strike="noStrike">
-                <a:solidFill>
-                  <a:schemeClr val="dk1"/>
-                </a:solidFill>
-                <a:effectLst/>
-                <a:uFillTx/>
-                <a:latin typeface="Calibri"/>
-              </a:defRPr>
-            </a:lvl3pPr>
-            <a:lvl4pPr lvl="3" algn="l" defTabSz="457200">
-              <a:lnSpc>
-                <a:spcPct val="100000"/>
-              </a:lnSpc>
-              <a:spcBef>
-                <a:spcPts val="320"/>
-              </a:spcBef>
-              <a:buClr>
-                <a:srgbClr val="000000"/>
-              </a:buClr>
-              <a:buFont typeface="Arial"/>
-              <a:buChar char="–"/>
-              <a:tabLst>
-                <a:tab pos="0" algn="l"/>
-              </a:tabLst>
-              <a:defRPr lang="en-US" sz="1600" b="0" u="none" strike="noStrike">
-                <a:solidFill>
-                  <a:schemeClr val="dk1"/>
-                </a:solidFill>
-                <a:effectLst/>
-                <a:uFillTx/>
-                <a:latin typeface="Calibri"/>
-              </a:defRPr>
-            </a:lvl4pPr>
-            <a:lvl5pPr lvl="4" algn="l" defTabSz="457200">
-              <a:lnSpc>
-                <a:spcPct val="100000"/>
-              </a:lnSpc>
-              <a:spcBef>
-                <a:spcPts val="320"/>
-              </a:spcBef>
-              <a:buClr>
-                <a:srgbClr val="000000"/>
-              </a:buClr>
-              <a:buFont typeface="Arial"/>
-              <a:buChar char="»"/>
-              <a:tabLst>
-                <a:tab pos="0" algn="l"/>
-              </a:tabLst>
-              <a:defRPr lang="en-US" sz="1600" b="0" u="none" strike="noStrike">
-                <a:solidFill>
-                  <a:schemeClr val="dk1"/>
-                </a:solidFill>
-                <a:effectLst/>
-                <a:uFillTx/>
-                <a:latin typeface="Calibri"/>
-              </a:defRPr>
-            </a:lvl5pPr>
-          </a:lstStyle>
-          <a:p>
-            <a:pPr marL="343080" indent="-343080" algn="l" defTabSz="457200">
-              <a:lnSpc>
-                <a:spcPct val="100000"/>
-              </a:lnSpc>
-              <a:spcBef>
-                <a:spcPts val="479"/>
-              </a:spcBef>
-              <a:buClr>
-                <a:srgbClr val="000000"/>
-              </a:buClr>
-              <a:buFont typeface="Arial"/>
-              <a:buChar char="•"/>
-              <a:tabLst>
-                <a:tab pos="0" algn="l"/>
-              </a:tabLst>
-            </a:pPr>
-            <a:r>
-              <a:rPr lang="en-US" sz="2400" b="0" u="none" strike="noStrike">
+              <a:buNone/>
+              <a:tabLst>
+                <a:tab pos="0" algn="l"/>
+              </a:tabLst>
+            </a:pPr>
+            <a:r>
+              <a:rPr lang="en-US" sz="1400" b="0" u="none" strike="noStrike">
                 <a:solidFill>
                   <a:schemeClr val="dk1"/>
                 </a:solidFill>
@@ -1691,155 +1334,7 @@
               </a:rPr>
               <a:t>Click to edit Master text styles</a:t>
             </a:r>
-            <a:endParaRPr lang="en-US" sz="2400" b="0" u="none" strike="noStrike">
-              <a:solidFill>
-                <a:schemeClr val="dk1"/>
-              </a:solidFill>
-              <a:effectLst/>
-              <a:uFillTx/>
-              <a:latin typeface="Calibri"/>
-            </a:endParaRPr>
-          </a:p>
-          <a:p>
-            <a:pPr marL="743040" lvl="1" indent="-285840" algn="l" defTabSz="457200">
-              <a:lnSpc>
-                <a:spcPct val="100000"/>
-              </a:lnSpc>
-              <a:spcBef>
-                <a:spcPts val="400"/>
-              </a:spcBef>
-              <a:buClr>
-                <a:srgbClr val="000000"/>
-              </a:buClr>
-              <a:buFont typeface="Arial"/>
-              <a:buChar char="–"/>
-              <a:tabLst>
-                <a:tab pos="0" algn="l"/>
-              </a:tabLst>
-            </a:pPr>
-            <a:r>
-              <a:rPr lang="en-US" sz="2000" b="0" u="none" strike="noStrike">
-                <a:solidFill>
-                  <a:schemeClr val="dk1"/>
-                </a:solidFill>
-                <a:effectLst/>
-                <a:uFillTx/>
-                <a:latin typeface="Calibri"/>
-              </a:rPr>
-              <a:t>Second level</a:t>
-            </a:r>
-            <a:endParaRPr lang="en-US" sz="2000" b="0" u="none" strike="noStrike">
-              <a:solidFill>
-                <a:schemeClr val="dk1"/>
-              </a:solidFill>
-              <a:effectLst/>
-              <a:uFillTx/>
-              <a:latin typeface="Calibri"/>
-            </a:endParaRPr>
-          </a:p>
-          <a:p>
-            <a:pPr marL="1143000" lvl="2" indent="-228600" algn="l" defTabSz="457200">
-              <a:lnSpc>
-                <a:spcPct val="100000"/>
-              </a:lnSpc>
-              <a:spcBef>
-                <a:spcPts val="360"/>
-              </a:spcBef>
-              <a:buClr>
-                <a:srgbClr val="000000"/>
-              </a:buClr>
-              <a:buFont typeface="Arial"/>
-              <a:buChar char="•"/>
-              <a:tabLst>
-                <a:tab pos="0" algn="l"/>
-              </a:tabLst>
-            </a:pPr>
-            <a:r>
-              <a:rPr lang="en-US" sz="1800" b="0" u="none" strike="noStrike">
-                <a:solidFill>
-                  <a:schemeClr val="dk1"/>
-                </a:solidFill>
-                <a:effectLst/>
-                <a:uFillTx/>
-                <a:latin typeface="Calibri"/>
-              </a:rPr>
-              <a:t>Third level</a:t>
-            </a:r>
-            <a:endParaRPr lang="en-US" sz="1800" b="0" u="none" strike="noStrike">
-              <a:solidFill>
-                <a:schemeClr val="dk1"/>
-              </a:solidFill>
-              <a:effectLst/>
-              <a:uFillTx/>
-              <a:latin typeface="Calibri"/>
-            </a:endParaRPr>
-          </a:p>
-          <a:p>
-            <a:pPr marL="1600200" lvl="3" indent="-228600" algn="l" defTabSz="457200">
-              <a:lnSpc>
-                <a:spcPct val="100000"/>
-              </a:lnSpc>
-              <a:spcBef>
-                <a:spcPts val="320"/>
-              </a:spcBef>
-              <a:buClr>
-                <a:srgbClr val="000000"/>
-              </a:buClr>
-              <a:buFont typeface="Arial"/>
-              <a:buChar char="–"/>
-              <a:tabLst>
-                <a:tab pos="0" algn="l"/>
-              </a:tabLst>
-            </a:pPr>
-            <a:r>
-              <a:rPr lang="en-US" sz="1600" b="0" u="none" strike="noStrike">
-                <a:solidFill>
-                  <a:schemeClr val="dk1"/>
-                </a:solidFill>
-                <a:effectLst/>
-                <a:uFillTx/>
-                <a:latin typeface="Calibri"/>
-              </a:rPr>
-              <a:t>Fourth level</a:t>
-            </a:r>
-            <a:endParaRPr lang="en-US" sz="1600" b="0" u="none" strike="noStrike">
-              <a:solidFill>
-                <a:schemeClr val="dk1"/>
-              </a:solidFill>
-              <a:effectLst/>
-              <a:uFillTx/>
-              <a:latin typeface="Calibri"/>
-            </a:endParaRPr>
-          </a:p>
-          <a:p>
-            <a:pPr marL="2057400" lvl="4" indent="-228600" algn="l" defTabSz="457200">
-              <a:lnSpc>
-                <a:spcPct val="100000"/>
-              </a:lnSpc>
-              <a:spcBef>
-                <a:spcPts val="320"/>
-              </a:spcBef>
-              <a:buClr>
-                <a:srgbClr val="000000"/>
-              </a:buClr>
-              <a:buFont typeface="Arial"/>
-              <a:buChar char="»"/>
-              <a:tabLst>
-                <a:tab pos="0" algn="l"/>
-              </a:tabLst>
-            </a:pPr>
-            <a:r>
-              <a:rPr lang="en-US" sz="1600" b="0" u="none" strike="noStrike">
-                <a:solidFill>
-                  <a:schemeClr val="dk1"/>
-                </a:solidFill>
-                <a:effectLst/>
-                <a:uFillTx/>
-                <a:latin typeface="Calibri"/>
-              </a:rPr>
-              <a:t>Fifth level</a:t>
-            </a:r>
-            <a:endParaRPr lang="en-US" sz="1600" b="0" u="none" strike="noStrike">
+            <a:endParaRPr lang="en-US" sz="1400" b="0" u="none" strike="noStrike">
               <a:solidFill>
                 <a:schemeClr val="dk1"/>
               </a:solidFill>
@@ -1852,427 +1347,7 @@
       </p:sp>
       <p:sp>
         <p:nvSpPr>
-          <p:cNvPr id="54" name="PlaceHolder 4"/>
-          <p:cNvSpPr>
-            <a:spLocks noGrp="1"/>
-          </p:cNvSpPr>
-          <p:nvPr>
-            <p:ph type="body"/>
-          </p:nvPr>
-        </p:nvSpPr>
-        <p:spPr>
-          <a:xfrm>
-            <a:off x="4645080" y="1535040"/>
-            <a:ext cx="4039560" cy="637560"/>
-          </a:xfrm>
-          <a:prstGeom prst="rect">
-            <a:avLst/>
-          </a:prstGeom>
-          <a:noFill/>
-          <a:ln w="0">
-            <a:noFill/>
-          </a:ln>
-        </p:spPr>
-        <p:txBody>
-          <a:bodyPr lIns="91440" tIns="45720" rIns="91440" bIns="45720" anchor="b">
-            <a:noAutofit/>
-          </a:bodyPr>
-          <a:lstStyle>
-            <a:lvl1pPr indent="0" algn="l" defTabSz="457200">
-              <a:lnSpc>
-                <a:spcPct val="100000"/>
-              </a:lnSpc>
-              <a:spcBef>
-                <a:spcPts val="479"/>
-              </a:spcBef>
-              <a:buNone/>
-              <a:tabLst>
-                <a:tab pos="0" algn="l"/>
-              </a:tabLst>
-              <a:defRPr lang="en-US" sz="2400" b="1" u="none" strike="noStrike">
-                <a:solidFill>
-                  <a:schemeClr val="dk1"/>
-                </a:solidFill>
-                <a:effectLst/>
-                <a:uFillTx/>
-                <a:latin typeface="Calibri"/>
-              </a:defRPr>
-            </a:lvl1pPr>
-          </a:lstStyle>
-          <a:p>
-            <a:pPr indent="0" algn="l" defTabSz="457200">
-              <a:lnSpc>
-                <a:spcPct val="100000"/>
-              </a:lnSpc>
-              <a:spcBef>
-                <a:spcPts val="479"/>
-              </a:spcBef>
-              <a:buNone/>
-              <a:tabLst>
-                <a:tab pos="0" algn="l"/>
-              </a:tabLst>
-            </a:pPr>
-            <a:r>
-              <a:rPr lang="en-US" sz="2400" b="1" u="none" strike="noStrike">
-                <a:solidFill>
-                  <a:schemeClr val="dk1"/>
-                </a:solidFill>
-                <a:effectLst/>
-                <a:uFillTx/>
-                <a:latin typeface="Calibri"/>
-              </a:rPr>
-              <a:t>Click to edit Master text styles</a:t>
-            </a:r>
-            <a:endParaRPr lang="en-US" sz="2400" b="0" u="none" strike="noStrike">
-              <a:solidFill>
-                <a:schemeClr val="dk1"/>
-              </a:solidFill>
-              <a:effectLst/>
-              <a:uFillTx/>
-              <a:latin typeface="Calibri"/>
-            </a:endParaRPr>
-          </a:p>
-        </p:txBody>
-      </p:sp>
-      <p:sp>
-        <p:nvSpPr>
-          <p:cNvPr id="55" name="PlaceHolder 5"/>
-          <p:cNvSpPr>
-            <a:spLocks noGrp="1"/>
-          </p:cNvSpPr>
-          <p:nvPr>
-            <p:ph type="body"/>
-          </p:nvPr>
-        </p:nvSpPr>
-        <p:spPr>
-          <a:xfrm>
-            <a:off x="4645080" y="2174760"/>
-            <a:ext cx="4039560" cy="3949200"/>
-          </a:xfrm>
-          <a:prstGeom prst="rect">
-            <a:avLst/>
-          </a:prstGeom>
-          <a:noFill/>
-          <a:ln w="0">
-            <a:noFill/>
-          </a:ln>
-        </p:spPr>
-        <p:txBody>
-          <a:bodyPr lIns="91440" tIns="45720" rIns="91440" bIns="45720" anchor="t">
-            <a:noAutofit/>
-          </a:bodyPr>
-          <a:lstStyle>
-            <a:lvl1pPr algn="l" defTabSz="457200">
-              <a:lnSpc>
-                <a:spcPct val="100000"/>
-              </a:lnSpc>
-              <a:spcBef>
-                <a:spcPts val="479"/>
-              </a:spcBef>
-              <a:buClr>
-                <a:srgbClr val="000000"/>
-              </a:buClr>
-              <a:buFont typeface="Arial"/>
-              <a:buChar char="•"/>
-              <a:tabLst>
-                <a:tab pos="0" algn="l"/>
-              </a:tabLst>
-              <a:defRPr lang="en-US" sz="2400" b="0" u="none" strike="noStrike">
-                <a:solidFill>
-                  <a:schemeClr val="dk1"/>
-                </a:solidFill>
-                <a:effectLst/>
-                <a:uFillTx/>
-                <a:latin typeface="Calibri"/>
-              </a:defRPr>
-            </a:lvl1pPr>
-            <a:lvl2pPr lvl="1" algn="l" defTabSz="457200">
-              <a:lnSpc>
-                <a:spcPct val="100000"/>
-              </a:lnSpc>
-              <a:spcBef>
-                <a:spcPts val="400"/>
-              </a:spcBef>
-              <a:buClr>
-                <a:srgbClr val="000000"/>
-              </a:buClr>
-              <a:buFont typeface="Arial"/>
-              <a:buChar char="–"/>
-              <a:tabLst>
-                <a:tab pos="0" algn="l"/>
-              </a:tabLst>
-              <a:defRPr lang="en-US" sz="2000" b="0" u="none" strike="noStrike">
-                <a:solidFill>
-                  <a:schemeClr val="dk1"/>
-                </a:solidFill>
-                <a:effectLst/>
-                <a:uFillTx/>
-                <a:latin typeface="Calibri"/>
-              </a:defRPr>
-            </a:lvl2pPr>
-            <a:lvl3pPr lvl="2" algn="l" defTabSz="457200">
-              <a:lnSpc>
-                <a:spcPct val="100000"/>
-              </a:lnSpc>
-              <a:spcBef>
-                <a:spcPts val="360"/>
-              </a:spcBef>
-              <a:buClr>
-                <a:srgbClr val="000000"/>
-              </a:buClr>
-              <a:buFont typeface="Arial"/>
-              <a:buChar char="•"/>
-              <a:tabLst>
-                <a:tab pos="0" algn="l"/>
-              </a:tabLst>
-              <a:defRPr lang="en-US" sz="1800" b="0" u="none" strike="noStrike">
-                <a:solidFill>
-                  <a:schemeClr val="dk1"/>
-                </a:solidFill>
-                <a:effectLst/>
-                <a:uFillTx/>
-                <a:latin typeface="Calibri"/>
-              </a:defRPr>
-            </a:lvl3pPr>
-            <a:lvl4pPr lvl="3" algn="l" defTabSz="457200">
-              <a:lnSpc>
-                <a:spcPct val="100000"/>
-              </a:lnSpc>
-              <a:spcBef>
-                <a:spcPts val="320"/>
-              </a:spcBef>
-              <a:buClr>
-                <a:srgbClr val="000000"/>
-              </a:buClr>
-              <a:buFont typeface="Arial"/>
-              <a:buChar char="–"/>
-              <a:tabLst>
-                <a:tab pos="0" algn="l"/>
-              </a:tabLst>
-              <a:defRPr lang="en-US" sz="1600" b="0" u="none" strike="noStrike">
-                <a:solidFill>
-                  <a:schemeClr val="dk1"/>
-                </a:solidFill>
-                <a:effectLst/>
-                <a:uFillTx/>
-                <a:latin typeface="Calibri"/>
-              </a:defRPr>
-            </a:lvl4pPr>
-            <a:lvl5pPr lvl="4" algn="l" defTabSz="457200">
-              <a:lnSpc>
-                <a:spcPct val="100000"/>
-              </a:lnSpc>
-              <a:spcBef>
-                <a:spcPts val="320"/>
-              </a:spcBef>
-              <a:buClr>
-                <a:srgbClr val="000000"/>
-              </a:buClr>
-              <a:buFont typeface="Arial"/>
-              <a:buChar char="»"/>
-              <a:tabLst>
-                <a:tab pos="0" algn="l"/>
-              </a:tabLst>
-              <a:defRPr lang="en-US" sz="1600" b="0" u="none" strike="noStrike">
-                <a:solidFill>
-                  <a:schemeClr val="dk1"/>
-                </a:solidFill>
-                <a:effectLst/>
-                <a:uFillTx/>
-                <a:latin typeface="Calibri"/>
-              </a:defRPr>
-            </a:lvl5pPr>
-          </a:lstStyle>
-          <a:p>
-            <a:pPr marL="343080" indent="-343080" algn="l" defTabSz="457200">
-              <a:lnSpc>
-                <a:spcPct val="100000"/>
-              </a:lnSpc>
-              <a:spcBef>
-                <a:spcPts val="479"/>
-              </a:spcBef>
-              <a:buClr>
-                <a:srgbClr val="000000"/>
-              </a:buClr>
-              <a:buFont typeface="Arial"/>
-              <a:buChar char="•"/>
-              <a:tabLst>
-                <a:tab pos="0" algn="l"/>
-              </a:tabLst>
-            </a:pPr>
-            <a:r>
-              <a:rPr lang="en-US" sz="2400" b="0" u="none" strike="noStrike">
-                <a:solidFill>
-                  <a:schemeClr val="dk1"/>
-                </a:solidFill>
-                <a:effectLst/>
-                <a:uFillTx/>
-                <a:latin typeface="Calibri"/>
-              </a:rPr>
-              <a:t>Click to edit Master text styles</a:t>
-            </a:r>
-            <a:endParaRPr lang="en-US" sz="2400" b="0" u="none" strike="noStrike">
-              <a:solidFill>
-                <a:schemeClr val="dk1"/>
-              </a:solidFill>
-              <a:effectLst/>
-              <a:uFillTx/>
-              <a:latin typeface="Calibri"/>
-            </a:endParaRPr>
-          </a:p>
-          <a:p>
-            <a:pPr marL="743040" lvl="1" indent="-285840" algn="l" defTabSz="457200">
-              <a:lnSpc>
-                <a:spcPct val="100000"/>
-              </a:lnSpc>
-              <a:spcBef>
-                <a:spcPts val="400"/>
-              </a:spcBef>
-              <a:buClr>
-                <a:srgbClr val="000000"/>
-              </a:buClr>
-              <a:buFont typeface="Arial"/>
-              <a:buChar char="–"/>
-              <a:tabLst>
-                <a:tab pos="0" algn="l"/>
-              </a:tabLst>
-            </a:pPr>
-            <a:r>
-              <a:rPr lang="en-US" sz="2000" b="0" u="none" strike="noStrike">
-                <a:solidFill>
-                  <a:schemeClr val="dk1"/>
-                </a:solidFill>
-                <a:effectLst/>
-                <a:uFillTx/>
-                <a:latin typeface="Calibri"/>
-              </a:rPr>
-              <a:t>Second level</a:t>
-            </a:r>
-            <a:endParaRPr lang="en-US" sz="2000" b="0" u="none" strike="noStrike">
-              <a:solidFill>
-                <a:schemeClr val="dk1"/>
-              </a:solidFill>
-              <a:effectLst/>
-              <a:uFillTx/>
-              <a:latin typeface="Calibri"/>
-            </a:endParaRPr>
-          </a:p>
-          <a:p>
-            <a:pPr marL="1143000" lvl="2" indent="-228600" algn="l" defTabSz="457200">
-              <a:lnSpc>
-                <a:spcPct val="100000"/>
-              </a:lnSpc>
-              <a:spcBef>
-                <a:spcPts val="360"/>
-              </a:spcBef>
-              <a:buClr>
-                <a:srgbClr val="000000"/>
-              </a:buClr>
-              <a:buFont typeface="Arial"/>
-              <a:buChar char="•"/>
-              <a:tabLst>
-                <a:tab pos="0" algn="l"/>
-              </a:tabLst>
-            </a:pPr>
-            <a:r>
-              <a:rPr lang="en-US" sz="1800" b="0" u="none" strike="noStrike">
-                <a:solidFill>
-                  <a:schemeClr val="dk1"/>
-                </a:solidFill>
-                <a:effectLst/>
-                <a:uFillTx/>
-                <a:latin typeface="Calibri"/>
-              </a:rPr>
-              <a:t>Third level</a:t>
-            </a:r>
-            <a:endParaRPr lang="en-US" sz="1800" b="0" u="none" strike="noStrike">
-              <a:solidFill>
-                <a:schemeClr val="dk1"/>
-              </a:solidFill>
-              <a:effectLst/>
-              <a:uFillTx/>
-              <a:latin typeface="Calibri"/>
-            </a:endParaRPr>
-          </a:p>
-          <a:p>
-            <a:pPr marL="1600200" lvl="3" indent="-228600" algn="l" defTabSz="457200">
-              <a:lnSpc>
-                <a:spcPct val="100000"/>
-              </a:lnSpc>
-              <a:spcBef>
-                <a:spcPts val="320"/>
-              </a:spcBef>
-              <a:buClr>
-                <a:srgbClr val="000000"/>
-              </a:buClr>
-              <a:buFont typeface="Arial"/>
-              <a:buChar char="–"/>
-              <a:tabLst>
-                <a:tab pos="0" algn="l"/>
-              </a:tabLst>
-            </a:pPr>
-            <a:r>
-              <a:rPr lang="en-US" sz="1600" b="0" u="none" strike="noStrike">
-                <a:solidFill>
-                  <a:schemeClr val="dk1"/>
-                </a:solidFill>
-                <a:effectLst/>
-                <a:uFillTx/>
-                <a:latin typeface="Calibri"/>
-              </a:rPr>
-              <a:t>Fourth level</a:t>
-            </a:r>
-            <a:endParaRPr lang="en-US" sz="1600" b="0" u="none" strike="noStrike">
-              <a:solidFill>
-                <a:schemeClr val="dk1"/>
-              </a:solidFill>
-              <a:effectLst/>
-              <a:uFillTx/>
-              <a:latin typeface="Calibri"/>
-            </a:endParaRPr>
-          </a:p>
-          <a:p>
-            <a:pPr marL="2057400" lvl="4" indent="-228600" algn="l" defTabSz="457200">
-              <a:lnSpc>
-                <a:spcPct val="100000"/>
-              </a:lnSpc>
-              <a:spcBef>
-                <a:spcPts val="320"/>
-              </a:spcBef>
-              <a:buClr>
-                <a:srgbClr val="000000"/>
-              </a:buClr>
-              <a:buFont typeface="Arial"/>
-              <a:buChar char="»"/>
-              <a:tabLst>
-                <a:tab pos="0" algn="l"/>
-              </a:tabLst>
-            </a:pPr>
-            <a:r>
-              <a:rPr lang="en-US" sz="1600" b="0" u="none" strike="noStrike">
-                <a:solidFill>
-                  <a:schemeClr val="dk1"/>
-                </a:solidFill>
-                <a:effectLst/>
-                <a:uFillTx/>
-                <a:latin typeface="Calibri"/>
-              </a:rPr>
-              <a:t>Fifth level</a:t>
-            </a:r>
-            <a:endParaRPr lang="en-US" sz="1600" b="0" u="none" strike="noStrike">
-              <a:solidFill>
-                <a:schemeClr val="dk1"/>
-              </a:solidFill>
-              <a:effectLst/>
-              <a:uFillTx/>
-              <a:latin typeface="Calibri"/>
-            </a:endParaRPr>
-          </a:p>
-        </p:txBody>
-      </p:sp>
-      <p:sp>
-        <p:nvSpPr>
-          <p:cNvPr id="56" name="PlaceHolder 6"/>
+          <p:cNvPr id="56" name="PlaceHolder 4"/>
           <p:cNvSpPr>
             <a:spLocks noGrp="1"/>
           </p:cNvSpPr>
@@ -2283,7 +1358,7 @@
         <p:spPr>
           <a:xfrm>
             <a:off x="457200" y="6356520"/>
-            <a:ext cx="2131560" cy="362880"/>
+            <a:ext cx="2129400" cy="360720"/>
           </a:xfrm>
           <a:prstGeom prst="rect">
             <a:avLst/>
@@ -2339,7 +1414,7 @@
                 <a:uFillTx/>
                 <a:latin typeface="Calibri"/>
               </a:rPr>
-              <a:t> </a:t>
+              <a:t>&lt;date/time&gt;</a:t>
             </a:r>
             <a:endParaRPr lang="en-US" sz="1200" b="0" u="none" strike="noStrike">
               <a:solidFill>
@@ -2354,7 +1429,7 @@
       </p:sp>
       <p:sp>
         <p:nvSpPr>
-          <p:cNvPr id="57" name="PlaceHolder 7"/>
+          <p:cNvPr id="57" name="PlaceHolder 5"/>
           <p:cNvSpPr>
             <a:spLocks noGrp="1"/>
           </p:cNvSpPr>
@@ -2365,7 +1440,7 @@
         <p:spPr>
           <a:xfrm>
             <a:off x="3124080" y="6356520"/>
-            <a:ext cx="2893320" cy="362880"/>
+            <a:ext cx="2891160" cy="360720"/>
           </a:xfrm>
           <a:prstGeom prst="rect">
             <a:avLst/>
@@ -2417,7 +1492,7 @@
                 <a:uFillTx/>
                 <a:latin typeface="Times New Roman"/>
               </a:rPr>
-              <a:t> </a:t>
+              <a:t>&lt;footer&gt;</a:t>
             </a:r>
             <a:endParaRPr lang="en-US" sz="1400" b="0" u="none" strike="noStrike">
               <a:solidFill>
@@ -2432,7 +1507,7 @@
       </p:sp>
       <p:sp>
         <p:nvSpPr>
-          <p:cNvPr id="58" name="PlaceHolder 8"/>
+          <p:cNvPr id="58" name="PlaceHolder 6"/>
           <p:cNvSpPr>
             <a:spLocks noGrp="1"/>
           </p:cNvSpPr>
@@ -2443,7 +1518,7 @@
         <p:spPr>
           <a:xfrm>
             <a:off x="6553080" y="6356520"/>
-            <a:ext cx="2131560" cy="362880"/>
+            <a:ext cx="2129400" cy="360720"/>
           </a:xfrm>
           <a:prstGeom prst="rect">
             <a:avLst/>
@@ -2488,7 +1563,7 @@
                 <a:tab pos="0" algn="l"/>
               </a:tabLst>
             </a:pPr>
-            <a:fld id="{88B58529-D644-47BF-A96A-0BBEEDA5240F}" type="slidenum">
+            <a:fld id="{5254B51C-4EB4-4B3B-8F96-CCF187805A6C}" type="slidenum">
               <a:rPr lang="en-US" sz="1200" b="0" u="none" strike="noStrike">
                 <a:solidFill>
                   <a:schemeClr val="dk1">
@@ -2499,7 +1574,7 @@
                 <a:uFillTx/>
                 <a:latin typeface="Calibri"/>
               </a:rPr>
-              <a:t>1</a:t>
+              <a:t>&lt;number&gt;</a:t>
             </a:fld>
             <a:endParaRPr lang="en-US" sz="1200" b="0" u="none" strike="noStrike">
               <a:solidFill>
@@ -2521,8 +1596,8 @@
 </file>
 
 <file path=ppt/slideLayouts/slideLayout2.xml><?xml version="1.0" encoding="utf-8"?>
-<p:sldLayout xmlns:a="http://schemas.openxmlformats.org/drawingml/2006/main" xmlns:p="http://schemas.openxmlformats.org/presentationml/2006/main" xmlns:r="http://schemas.openxmlformats.org/officeDocument/2006/relationships" xmlns:p14="http://schemas.microsoft.com/office/powerpoint/2010/main" xmlns:p15="http://schemas.microsoft.com/office/powerpoint/2012/main" xmlns:mc="http://schemas.openxmlformats.org/markup-compatibility/2006" type="blank" preserve="1">
-  <p:cSld name="Blank">
+<p:sldLayout xmlns:a="http://schemas.openxmlformats.org/drawingml/2006/main" xmlns:p="http://schemas.openxmlformats.org/presentationml/2006/main" xmlns:r="http://schemas.openxmlformats.org/officeDocument/2006/relationships" xmlns:p14="http://schemas.microsoft.com/office/powerpoint/2010/main" xmlns:p15="http://schemas.microsoft.com/office/powerpoint/2012/main" xmlns:mc="http://schemas.openxmlformats.org/markup-compatibility/2006" type="vertTx" preserve="1">
+  <p:cSld name="Title and Vertical Text">
     <p:bg>
       <p:bgPr>
         <a:solidFill>
@@ -2551,13 +1626,397 @@
             <a:spLocks noGrp="1"/>
           </p:cNvSpPr>
           <p:nvPr>
+            <p:ph type="title"/>
+          </p:nvPr>
+        </p:nvSpPr>
+        <p:spPr>
+          <a:xfrm>
+            <a:off x="457200" y="274680"/>
+            <a:ext cx="8225280" cy="1138680"/>
+          </a:xfrm>
+          <a:prstGeom prst="rect">
+            <a:avLst/>
+          </a:prstGeom>
+          <a:noFill/>
+          <a:ln w="0">
+            <a:noFill/>
+          </a:ln>
+        </p:spPr>
+        <p:txBody>
+          <a:bodyPr lIns="91440" tIns="45720" rIns="91440" bIns="45720" anchor="ctr">
+            <a:noAutofit/>
+          </a:bodyPr>
+          <a:lstStyle>
+            <a:lvl1pPr indent="0" algn="ctr" defTabSz="457200">
+              <a:lnSpc>
+                <a:spcPct val="100000"/>
+              </a:lnSpc>
+              <a:buNone/>
+              <a:tabLst>
+                <a:tab pos="0" algn="l"/>
+              </a:tabLst>
+              <a:defRPr lang="en-US" sz="4400" b="0" u="none" strike="noStrike">
+                <a:solidFill>
+                  <a:schemeClr val="dk1"/>
+                </a:solidFill>
+                <a:effectLst/>
+                <a:uFillTx/>
+                <a:latin typeface="Calibri"/>
+              </a:defRPr>
+            </a:lvl1pPr>
+          </a:lstStyle>
+          <a:p>
+            <a:pPr indent="0" algn="ctr" defTabSz="457200">
+              <a:lnSpc>
+                <a:spcPct val="100000"/>
+              </a:lnSpc>
+              <a:buNone/>
+              <a:tabLst>
+                <a:tab pos="0" algn="l"/>
+              </a:tabLst>
+            </a:pPr>
+            <a:r>
+              <a:rPr lang="en-US" sz="4400" b="0" u="none" strike="noStrike">
+                <a:solidFill>
+                  <a:schemeClr val="dk1"/>
+                </a:solidFill>
+                <a:effectLst/>
+                <a:uFillTx/>
+                <a:latin typeface="Calibri"/>
+              </a:rPr>
+              <a:t>Click to edit Master title style</a:t>
+            </a:r>
+            <a:endParaRPr lang="en-US" sz="4400" b="0" u="none" strike="noStrike">
+              <a:solidFill>
+                <a:schemeClr val="dk1"/>
+              </a:solidFill>
+              <a:effectLst/>
+              <a:uFillTx/>
+              <a:latin typeface="Calibri"/>
+            </a:endParaRPr>
+          </a:p>
+        </p:txBody>
+      </p:sp>
+      <p:sp>
+        <p:nvSpPr>
+          <p:cNvPr id="7" name="PlaceHolder 2"/>
+          <p:cNvSpPr>
+            <a:spLocks noGrp="1"/>
+          </p:cNvSpPr>
+          <p:nvPr>
+            <p:ph type="body"/>
+          </p:nvPr>
+        </p:nvSpPr>
+        <p:spPr>
+          <a:xfrm>
+            <a:off x="457200" y="1600200"/>
+            <a:ext cx="8225280" cy="4521600"/>
+          </a:xfrm>
+          <a:prstGeom prst="rect">
+            <a:avLst/>
+          </a:prstGeom>
+          <a:noFill/>
+          <a:ln w="0">
+            <a:noFill/>
+          </a:ln>
+        </p:spPr>
+        <p:txBody>
+          <a:bodyPr lIns="91440" tIns="45720" rIns="91440" bIns="45720" anchor="t" vert="eaVert">
+            <a:noAutofit/>
+          </a:bodyPr>
+          <a:lstStyle>
+            <a:lvl1pPr algn="l" defTabSz="457200">
+              <a:lnSpc>
+                <a:spcPct val="100000"/>
+              </a:lnSpc>
+              <a:spcBef>
+                <a:spcPts val="641"/>
+              </a:spcBef>
+              <a:buClr>
+                <a:srgbClr val="000000"/>
+              </a:buClr>
+              <a:buFont typeface="Arial"/>
+              <a:buChar char="•"/>
+              <a:defRPr lang="en-US" sz="3200" b="0" u="none" strike="noStrike">
+                <a:solidFill>
+                  <a:schemeClr val="dk1"/>
+                </a:solidFill>
+                <a:effectLst/>
+                <a:uFillTx/>
+                <a:latin typeface="Calibri"/>
+              </a:defRPr>
+            </a:lvl1pPr>
+            <a:lvl2pPr lvl="1" algn="l" defTabSz="457200">
+              <a:lnSpc>
+                <a:spcPct val="100000"/>
+              </a:lnSpc>
+              <a:spcBef>
+                <a:spcPts val="561"/>
+              </a:spcBef>
+              <a:buClr>
+                <a:srgbClr val="000000"/>
+              </a:buClr>
+              <a:buFont typeface="Arial"/>
+              <a:buChar char="–"/>
+              <a:defRPr lang="en-US" sz="2800" b="0" u="none" strike="noStrike">
+                <a:solidFill>
+                  <a:schemeClr val="dk1"/>
+                </a:solidFill>
+                <a:effectLst/>
+                <a:uFillTx/>
+                <a:latin typeface="Calibri"/>
+              </a:defRPr>
+            </a:lvl2pPr>
+            <a:lvl3pPr lvl="2" algn="l" defTabSz="457200">
+              <a:lnSpc>
+                <a:spcPct val="100000"/>
+              </a:lnSpc>
+              <a:spcBef>
+                <a:spcPts val="479"/>
+              </a:spcBef>
+              <a:buClr>
+                <a:srgbClr val="000000"/>
+              </a:buClr>
+              <a:buFont typeface="Arial"/>
+              <a:buChar char="•"/>
+              <a:defRPr lang="en-US" sz="2400" b="0" u="none" strike="noStrike">
+                <a:solidFill>
+                  <a:schemeClr val="dk1"/>
+                </a:solidFill>
+                <a:effectLst/>
+                <a:uFillTx/>
+                <a:latin typeface="Calibri"/>
+              </a:defRPr>
+            </a:lvl3pPr>
+            <a:lvl4pPr lvl="3" algn="l" defTabSz="457200">
+              <a:lnSpc>
+                <a:spcPct val="100000"/>
+              </a:lnSpc>
+              <a:spcBef>
+                <a:spcPts val="400"/>
+              </a:spcBef>
+              <a:buClr>
+                <a:srgbClr val="000000"/>
+              </a:buClr>
+              <a:buFont typeface="Arial"/>
+              <a:buChar char="–"/>
+              <a:defRPr lang="en-US" sz="2000" b="0" u="none" strike="noStrike">
+                <a:solidFill>
+                  <a:schemeClr val="dk1"/>
+                </a:solidFill>
+                <a:effectLst/>
+                <a:uFillTx/>
+                <a:latin typeface="Calibri"/>
+              </a:defRPr>
+            </a:lvl4pPr>
+            <a:lvl5pPr lvl="4" algn="l" defTabSz="457200">
+              <a:lnSpc>
+                <a:spcPct val="100000"/>
+              </a:lnSpc>
+              <a:spcBef>
+                <a:spcPts val="400"/>
+              </a:spcBef>
+              <a:buClr>
+                <a:srgbClr val="000000"/>
+              </a:buClr>
+              <a:buFont typeface="Arial"/>
+              <a:buChar char="»"/>
+              <a:defRPr lang="en-US" sz="2000" b="0" u="none" strike="noStrike">
+                <a:solidFill>
+                  <a:schemeClr val="dk1"/>
+                </a:solidFill>
+                <a:effectLst/>
+                <a:uFillTx/>
+                <a:latin typeface="Calibri"/>
+              </a:defRPr>
+            </a:lvl5pPr>
+          </a:lstStyle>
+          <a:p>
+            <a:pPr marL="343080" indent="-343080" algn="l" defTabSz="457200">
+              <a:lnSpc>
+                <a:spcPct val="100000"/>
+              </a:lnSpc>
+              <a:spcBef>
+                <a:spcPts val="641"/>
+              </a:spcBef>
+              <a:buClr>
+                <a:srgbClr val="000000"/>
+              </a:buClr>
+              <a:buFont typeface="Arial"/>
+              <a:buChar char="•"/>
+            </a:pPr>
+            <a:r>
+              <a:rPr lang="en-US" sz="3200" b="0" u="none" strike="noStrike">
+                <a:solidFill>
+                  <a:schemeClr val="dk1"/>
+                </a:solidFill>
+                <a:effectLst/>
+                <a:uFillTx/>
+                <a:latin typeface="Calibri"/>
+              </a:rPr>
+              <a:t>Click to edit Master text styles</a:t>
+            </a:r>
+            <a:endParaRPr lang="en-US" sz="3200" b="0" u="none" strike="noStrike">
+              <a:solidFill>
+                <a:schemeClr val="dk1"/>
+              </a:solidFill>
+              <a:effectLst/>
+              <a:uFillTx/>
+              <a:latin typeface="Calibri"/>
+            </a:endParaRPr>
+          </a:p>
+          <a:p>
+            <a:pPr marL="743040" lvl="1" indent="-285840" algn="l" defTabSz="457200">
+              <a:lnSpc>
+                <a:spcPct val="100000"/>
+              </a:lnSpc>
+              <a:spcBef>
+                <a:spcPts val="561"/>
+              </a:spcBef>
+              <a:buClr>
+                <a:srgbClr val="000000"/>
+              </a:buClr>
+              <a:buFont typeface="Arial"/>
+              <a:buChar char="–"/>
+            </a:pPr>
+            <a:r>
+              <a:rPr lang="en-US" sz="2800" b="0" u="none" strike="noStrike">
+                <a:solidFill>
+                  <a:schemeClr val="dk1"/>
+                </a:solidFill>
+                <a:effectLst/>
+                <a:uFillTx/>
+                <a:latin typeface="Calibri"/>
+              </a:rPr>
+              <a:t>Second level</a:t>
+            </a:r>
+            <a:endParaRPr lang="en-US" sz="2800" b="0" u="none" strike="noStrike">
+              <a:solidFill>
+                <a:schemeClr val="dk1"/>
+              </a:solidFill>
+              <a:effectLst/>
+              <a:uFillTx/>
+              <a:latin typeface="Calibri"/>
+            </a:endParaRPr>
+          </a:p>
+          <a:p>
+            <a:pPr marL="1143000" lvl="2" indent="-228600" algn="l" defTabSz="457200">
+              <a:lnSpc>
+                <a:spcPct val="100000"/>
+              </a:lnSpc>
+              <a:spcBef>
+                <a:spcPts val="479"/>
+              </a:spcBef>
+              <a:buClr>
+                <a:srgbClr val="000000"/>
+              </a:buClr>
+              <a:buFont typeface="Arial"/>
+              <a:buChar char="•"/>
+            </a:pPr>
+            <a:r>
+              <a:rPr lang="en-US" sz="2400" b="0" u="none" strike="noStrike">
+                <a:solidFill>
+                  <a:schemeClr val="dk1"/>
+                </a:solidFill>
+                <a:effectLst/>
+                <a:uFillTx/>
+                <a:latin typeface="Calibri"/>
+              </a:rPr>
+              <a:t>Third level</a:t>
+            </a:r>
+            <a:endParaRPr lang="en-US" sz="2400" b="0" u="none" strike="noStrike">
+              <a:solidFill>
+                <a:schemeClr val="dk1"/>
+              </a:solidFill>
+              <a:effectLst/>
+              <a:uFillTx/>
+              <a:latin typeface="Calibri"/>
+            </a:endParaRPr>
+          </a:p>
+          <a:p>
+            <a:pPr marL="1600200" lvl="3" indent="-228600" algn="l" defTabSz="457200">
+              <a:lnSpc>
+                <a:spcPct val="100000"/>
+              </a:lnSpc>
+              <a:spcBef>
+                <a:spcPts val="400"/>
+              </a:spcBef>
+              <a:buClr>
+                <a:srgbClr val="000000"/>
+              </a:buClr>
+              <a:buFont typeface="Arial"/>
+              <a:buChar char="–"/>
+            </a:pPr>
+            <a:r>
+              <a:rPr lang="en-US" sz="2000" b="0" u="none" strike="noStrike">
+                <a:solidFill>
+                  <a:schemeClr val="dk1"/>
+                </a:solidFill>
+                <a:effectLst/>
+                <a:uFillTx/>
+                <a:latin typeface="Calibri"/>
+              </a:rPr>
+              <a:t>Fourth level</a:t>
+            </a:r>
+            <a:endParaRPr lang="en-US" sz="2000" b="0" u="none" strike="noStrike">
+              <a:solidFill>
+                <a:schemeClr val="dk1"/>
+              </a:solidFill>
+              <a:effectLst/>
+              <a:uFillTx/>
+              <a:latin typeface="Calibri"/>
+            </a:endParaRPr>
+          </a:p>
+          <a:p>
+            <a:pPr marL="2057400" lvl="4" indent="-228600" algn="l" defTabSz="457200">
+              <a:lnSpc>
+                <a:spcPct val="100000"/>
+              </a:lnSpc>
+              <a:spcBef>
+                <a:spcPts val="400"/>
+              </a:spcBef>
+              <a:buClr>
+                <a:srgbClr val="000000"/>
+              </a:buClr>
+              <a:buFont typeface="Arial"/>
+              <a:buChar char="»"/>
+            </a:pPr>
+            <a:r>
+              <a:rPr lang="en-US" sz="2000" b="0" u="none" strike="noStrike">
+                <a:solidFill>
+                  <a:schemeClr val="dk1"/>
+                </a:solidFill>
+                <a:effectLst/>
+                <a:uFillTx/>
+                <a:latin typeface="Calibri"/>
+              </a:rPr>
+              <a:t>Fifth level</a:t>
+            </a:r>
+            <a:endParaRPr lang="en-US" sz="2000" b="0" u="none" strike="noStrike">
+              <a:solidFill>
+                <a:schemeClr val="dk1"/>
+              </a:solidFill>
+              <a:effectLst/>
+              <a:uFillTx/>
+              <a:latin typeface="Calibri"/>
+            </a:endParaRPr>
+          </a:p>
+        </p:txBody>
+      </p:sp>
+      <p:sp>
+        <p:nvSpPr>
+          <p:cNvPr id="8" name="PlaceHolder 3"/>
+          <p:cNvSpPr>
+            <a:spLocks noGrp="1"/>
+          </p:cNvSpPr>
+          <p:nvPr>
             <p:ph type="dt" idx="4"/>
           </p:nvPr>
         </p:nvSpPr>
         <p:spPr>
           <a:xfrm>
             <a:off x="457200" y="6356520"/>
-            <a:ext cx="2131560" cy="362880"/>
+            <a:ext cx="2129400" cy="360720"/>
           </a:xfrm>
           <a:prstGeom prst="rect">
             <a:avLst/>
@@ -2613,7 +2072,7 @@
                 <a:uFillTx/>
                 <a:latin typeface="Calibri"/>
               </a:rPr>
-              <a:t> </a:t>
+              <a:t>&lt;date/time&gt;</a:t>
             </a:r>
             <a:endParaRPr lang="en-US" sz="1200" b="0" u="none" strike="noStrike">
               <a:solidFill>
@@ -2628,7 +2087,7 @@
       </p:sp>
       <p:sp>
         <p:nvSpPr>
-          <p:cNvPr id="7" name="PlaceHolder 2"/>
+          <p:cNvPr id="9" name="PlaceHolder 4"/>
           <p:cNvSpPr>
             <a:spLocks noGrp="1"/>
           </p:cNvSpPr>
@@ -2639,7 +2098,7 @@
         <p:spPr>
           <a:xfrm>
             <a:off x="3124080" y="6356520"/>
-            <a:ext cx="2893320" cy="362880"/>
+            <a:ext cx="2891160" cy="360720"/>
           </a:xfrm>
           <a:prstGeom prst="rect">
             <a:avLst/>
@@ -2691,7 +2150,7 @@
                 <a:uFillTx/>
                 <a:latin typeface="Times New Roman"/>
               </a:rPr>
-              <a:t> </a:t>
+              <a:t>&lt;footer&gt;</a:t>
             </a:r>
             <a:endParaRPr lang="en-US" sz="1400" b="0" u="none" strike="noStrike">
               <a:solidFill>
@@ -2706,7 +2165,7 @@
       </p:sp>
       <p:sp>
         <p:nvSpPr>
-          <p:cNvPr id="8" name="PlaceHolder 3"/>
+          <p:cNvPr id="10" name="PlaceHolder 5"/>
           <p:cNvSpPr>
             <a:spLocks noGrp="1"/>
           </p:cNvSpPr>
@@ -2717,7 +2176,7 @@
         <p:spPr>
           <a:xfrm>
             <a:off x="6553080" y="6356520"/>
-            <a:ext cx="2131560" cy="362880"/>
+            <a:ext cx="2129400" cy="360720"/>
           </a:xfrm>
           <a:prstGeom prst="rect">
             <a:avLst/>
@@ -2762,7 +2221,7 @@
                 <a:tab pos="0" algn="l"/>
               </a:tabLst>
             </a:pPr>
-            <a:fld id="{2704E7E7-B6EC-463E-907E-E0E78D52482B}" type="slidenum">
+            <a:fld id="{0A6B4B55-B57C-44F1-9EA6-BD67857F8A12}" type="slidenum">
               <a:rPr lang="en-US" sz="1200" b="0" u="none" strike="noStrike">
                 <a:solidFill>
                   <a:schemeClr val="dk1">
@@ -2773,7 +2232,7 @@
                 <a:uFillTx/>
                 <a:latin typeface="Calibri"/>
               </a:rPr>
-              <a:t>1</a:t>
+              <a:t>&lt;number&gt;</a:t>
             </a:fld>
             <a:endParaRPr lang="en-US" sz="1200" b="0" u="none" strike="noStrike">
               <a:solidFill>
@@ -2795,8 +2254,8 @@
 </file>
 
 <file path=ppt/slideLayouts/slideLayout3.xml><?xml version="1.0" encoding="utf-8"?>
-<p:sldLayout xmlns:a="http://schemas.openxmlformats.org/drawingml/2006/main" xmlns:p="http://schemas.openxmlformats.org/presentationml/2006/main" xmlns:r="http://schemas.openxmlformats.org/officeDocument/2006/relationships" xmlns:p14="http://schemas.microsoft.com/office/powerpoint/2010/main" xmlns:p15="http://schemas.microsoft.com/office/powerpoint/2012/main" xmlns:mc="http://schemas.openxmlformats.org/markup-compatibility/2006" type="blank" preserve="1">
-  <p:cSld name="Content with Caption">
+<p:sldLayout xmlns:a="http://schemas.openxmlformats.org/drawingml/2006/main" xmlns:p="http://schemas.openxmlformats.org/presentationml/2006/main" xmlns:r="http://schemas.openxmlformats.org/officeDocument/2006/relationships" xmlns:p14="http://schemas.microsoft.com/office/powerpoint/2010/main" xmlns:p15="http://schemas.microsoft.com/office/powerpoint/2012/main" xmlns:mc="http://schemas.openxmlformats.org/markup-compatibility/2006" type="vertTitleAndTx" preserve="1">
+  <p:cSld name="Vertical Title and Text">
     <p:bg>
       <p:bgPr>
         <a:solidFill>
@@ -2820,7 +2279,7 @@
       </p:grpSpPr>
       <p:sp>
         <p:nvSpPr>
-          <p:cNvPr id="9" name="PlaceHolder 1"/>
+          <p:cNvPr id="11" name="PlaceHolder 1"/>
           <p:cNvSpPr>
             <a:spLocks noGrp="1"/>
           </p:cNvSpPr>
@@ -2830,8 +2289,8 @@
         </p:nvSpPr>
         <p:spPr>
           <a:xfrm>
-            <a:off x="457200" y="272880"/>
-            <a:ext cx="3006000" cy="1159920"/>
+            <a:off x="6629400" y="274680"/>
+            <a:ext cx="2053080" cy="5847120"/>
           </a:xfrm>
           <a:prstGeom prst="rect">
             <a:avLst/>
@@ -2842,19 +2301,19 @@
           </a:ln>
         </p:spPr>
         <p:txBody>
-          <a:bodyPr lIns="91440" tIns="45720" rIns="91440" bIns="45720" anchor="b">
+          <a:bodyPr lIns="91440" tIns="45720" rIns="91440" bIns="45720" anchor="ctr" vert="eaVert">
             <a:noAutofit/>
           </a:bodyPr>
           <a:lstStyle>
-            <a:lvl1pPr indent="0" algn="l" defTabSz="457200">
-              <a:lnSpc>
-                <a:spcPct val="100000"/>
-              </a:lnSpc>
-              <a:buNone/>
-              <a:tabLst>
-                <a:tab pos="0" algn="l"/>
-              </a:tabLst>
-              <a:defRPr lang="en-US" sz="2000" b="1" u="none" strike="noStrike">
+            <a:lvl1pPr indent="0" algn="ctr" defTabSz="457200">
+              <a:lnSpc>
+                <a:spcPct val="100000"/>
+              </a:lnSpc>
+              <a:buNone/>
+              <a:tabLst>
+                <a:tab pos="0" algn="l"/>
+              </a:tabLst>
+              <a:defRPr lang="en-US" sz="4400" b="0" u="none" strike="noStrike">
                 <a:solidFill>
                   <a:schemeClr val="dk1"/>
                 </a:solidFill>
@@ -2865,17 +2324,17 @@
             </a:lvl1pPr>
           </a:lstStyle>
           <a:p>
-            <a:pPr indent="0" algn="l" defTabSz="457200">
-              <a:lnSpc>
-                <a:spcPct val="100000"/>
-              </a:lnSpc>
-              <a:buNone/>
-              <a:tabLst>
-                <a:tab pos="0" algn="l"/>
-              </a:tabLst>
-            </a:pPr>
-            <a:r>
-              <a:rPr lang="en-US" sz="2000" b="1" u="none" strike="noStrike">
+            <a:pPr indent="0" algn="ctr" defTabSz="457200">
+              <a:lnSpc>
+                <a:spcPct val="100000"/>
+              </a:lnSpc>
+              <a:buNone/>
+              <a:tabLst>
+                <a:tab pos="0" algn="l"/>
+              </a:tabLst>
+            </a:pPr>
+            <a:r>
+              <a:rPr lang="en-US" sz="4400" b="0" u="none" strike="noStrike">
                 <a:solidFill>
                   <a:schemeClr val="dk1"/>
                 </a:solidFill>
@@ -2885,7 +2344,7 @@
               </a:rPr>
               <a:t>Click to edit Master title style</a:t>
             </a:r>
-            <a:endParaRPr lang="en-US" sz="2000" b="1" u="none" strike="noStrike">
+            <a:endParaRPr lang="en-US" sz="4400" b="0" u="none" strike="noStrike">
               <a:solidFill>
                 <a:schemeClr val="dk1"/>
               </a:solidFill>
@@ -2898,7 +2357,7 @@
       </p:sp>
       <p:sp>
         <p:nvSpPr>
-          <p:cNvPr id="10" name="PlaceHolder 2"/>
+          <p:cNvPr id="12" name="PlaceHolder 2"/>
           <p:cNvSpPr>
             <a:spLocks noGrp="1"/>
           </p:cNvSpPr>
@@ -2908,8 +2367,8 @@
         </p:nvSpPr>
         <p:spPr>
           <a:xfrm>
-            <a:off x="3575160" y="272880"/>
-            <a:ext cx="5109480" cy="5851080"/>
+            <a:off x="457200" y="274680"/>
+            <a:ext cx="6015600" cy="5847120"/>
           </a:xfrm>
           <a:prstGeom prst="rect">
             <a:avLst/>
@@ -2920,7 +2379,7 @@
           </a:ln>
         </p:spPr>
         <p:txBody>
-          <a:bodyPr lIns="91440" tIns="45720" rIns="91440" bIns="45720" anchor="t">
+          <a:bodyPr lIns="91440" tIns="45720" rIns="91440" bIns="45720" anchor="t" vert="eaVert">
             <a:noAutofit/>
           </a:bodyPr>
           <a:lstStyle>
@@ -3204,91 +2663,7 @@
       </p:sp>
       <p:sp>
         <p:nvSpPr>
-          <p:cNvPr id="11" name="PlaceHolder 3"/>
-          <p:cNvSpPr>
-            <a:spLocks noGrp="1"/>
-          </p:cNvSpPr>
-          <p:nvPr>
-            <p:ph type="body"/>
-          </p:nvPr>
-        </p:nvSpPr>
-        <p:spPr>
-          <a:xfrm>
-            <a:off x="457200" y="1434960"/>
-            <a:ext cx="3006000" cy="4689000"/>
-          </a:xfrm>
-          <a:prstGeom prst="rect">
-            <a:avLst/>
-          </a:prstGeom>
-          <a:noFill/>
-          <a:ln w="0">
-            <a:noFill/>
-          </a:ln>
-        </p:spPr>
-        <p:txBody>
-          <a:bodyPr lIns="91440" tIns="45720" rIns="91440" bIns="45720" anchor="t">
-            <a:noAutofit/>
-          </a:bodyPr>
-          <a:lstStyle>
-            <a:lvl1pPr indent="0" algn="l" defTabSz="457200">
-              <a:lnSpc>
-                <a:spcPct val="100000"/>
-              </a:lnSpc>
-              <a:spcBef>
-                <a:spcPts val="281"/>
-              </a:spcBef>
-              <a:buNone/>
-              <a:tabLst>
-                <a:tab pos="0" algn="l"/>
-              </a:tabLst>
-              <a:defRPr lang="en-US" sz="1400" b="0" u="none" strike="noStrike">
-                <a:solidFill>
-                  <a:schemeClr val="dk1"/>
-                </a:solidFill>
-                <a:effectLst/>
-                <a:uFillTx/>
-                <a:latin typeface="Calibri"/>
-              </a:defRPr>
-            </a:lvl1pPr>
-          </a:lstStyle>
-          <a:p>
-            <a:pPr indent="0" algn="l" defTabSz="457200">
-              <a:lnSpc>
-                <a:spcPct val="100000"/>
-              </a:lnSpc>
-              <a:spcBef>
-                <a:spcPts val="281"/>
-              </a:spcBef>
-              <a:buNone/>
-              <a:tabLst>
-                <a:tab pos="0" algn="l"/>
-              </a:tabLst>
-            </a:pPr>
-            <a:r>
-              <a:rPr lang="en-US" sz="1400" b="0" u="none" strike="noStrike">
-                <a:solidFill>
-                  <a:schemeClr val="dk1"/>
-                </a:solidFill>
-                <a:effectLst/>
-                <a:uFillTx/>
-                <a:latin typeface="Calibri"/>
-              </a:rPr>
-              <a:t>Click to edit Master text styles</a:t>
-            </a:r>
-            <a:endParaRPr lang="en-US" sz="1400" b="0" u="none" strike="noStrike">
-              <a:solidFill>
-                <a:schemeClr val="dk1"/>
-              </a:solidFill>
-              <a:effectLst/>
-              <a:uFillTx/>
-              <a:latin typeface="Calibri"/>
-            </a:endParaRPr>
-          </a:p>
-        </p:txBody>
-      </p:sp>
-      <p:sp>
-        <p:nvSpPr>
-          <p:cNvPr id="12" name="PlaceHolder 4"/>
+          <p:cNvPr id="13" name="PlaceHolder 3"/>
           <p:cNvSpPr>
             <a:spLocks noGrp="1"/>
           </p:cNvSpPr>
@@ -3299,7 +2674,7 @@
         <p:spPr>
           <a:xfrm>
             <a:off x="457200" y="6356520"/>
-            <a:ext cx="2131560" cy="362880"/>
+            <a:ext cx="2129400" cy="360720"/>
           </a:xfrm>
           <a:prstGeom prst="rect">
             <a:avLst/>
@@ -3355,7 +2730,7 @@
                 <a:uFillTx/>
                 <a:latin typeface="Calibri"/>
               </a:rPr>
-              <a:t> </a:t>
+              <a:t>&lt;date/time&gt;</a:t>
             </a:r>
             <a:endParaRPr lang="en-US" sz="1200" b="0" u="none" strike="noStrike">
               <a:solidFill>
@@ -3370,7 +2745,7 @@
       </p:sp>
       <p:sp>
         <p:nvSpPr>
-          <p:cNvPr id="13" name="PlaceHolder 5"/>
+          <p:cNvPr id="14" name="PlaceHolder 4"/>
           <p:cNvSpPr>
             <a:spLocks noGrp="1"/>
           </p:cNvSpPr>
@@ -3381,7 +2756,7 @@
         <p:spPr>
           <a:xfrm>
             <a:off x="3124080" y="6356520"/>
-            <a:ext cx="2893320" cy="362880"/>
+            <a:ext cx="2891160" cy="360720"/>
           </a:xfrm>
           <a:prstGeom prst="rect">
             <a:avLst/>
@@ -3433,7 +2808,7 @@
                 <a:uFillTx/>
                 <a:latin typeface="Times New Roman"/>
               </a:rPr>
-              <a:t> </a:t>
+              <a:t>&lt;footer&gt;</a:t>
             </a:r>
             <a:endParaRPr lang="en-US" sz="1400" b="0" u="none" strike="noStrike">
               <a:solidFill>
@@ -3448,7 +2823,7 @@
       </p:sp>
       <p:sp>
         <p:nvSpPr>
-          <p:cNvPr id="14" name="PlaceHolder 6"/>
+          <p:cNvPr id="15" name="PlaceHolder 5"/>
           <p:cNvSpPr>
             <a:spLocks noGrp="1"/>
           </p:cNvSpPr>
@@ -3459,7 +2834,7 @@
         <p:spPr>
           <a:xfrm>
             <a:off x="6553080" y="6356520"/>
-            <a:ext cx="2131560" cy="362880"/>
+            <a:ext cx="2129400" cy="360720"/>
           </a:xfrm>
           <a:prstGeom prst="rect">
             <a:avLst/>
@@ -3504,7 +2879,7 @@
                 <a:tab pos="0" algn="l"/>
               </a:tabLst>
             </a:pPr>
-            <a:fld id="{72F2ACC3-9273-4A6F-BD1C-4209FD2CB61E}" type="slidenum">
+            <a:fld id="{703B59BC-1056-4026-BE49-D42DA07B0559}" type="slidenum">
               <a:rPr lang="en-US" sz="1200" b="0" u="none" strike="noStrike">
                 <a:solidFill>
                   <a:schemeClr val="dk1">
@@ -3515,7 +2890,7 @@
                 <a:uFillTx/>
                 <a:latin typeface="Calibri"/>
               </a:rPr>
-              <a:t>1</a:t>
+              <a:t>&lt;number&gt;</a:t>
             </a:fld>
             <a:endParaRPr lang="en-US" sz="1200" b="0" u="none" strike="noStrike">
               <a:solidFill>
@@ -3537,8 +2912,8 @@
 </file>
 
 <file path=ppt/slideLayouts/slideLayout4.xml><?xml version="1.0" encoding="utf-8"?>
-<p:sldLayout xmlns:a="http://schemas.openxmlformats.org/drawingml/2006/main" xmlns:p="http://schemas.openxmlformats.org/presentationml/2006/main" xmlns:r="http://schemas.openxmlformats.org/officeDocument/2006/relationships" xmlns:p14="http://schemas.microsoft.com/office/powerpoint/2010/main" xmlns:p15="http://schemas.microsoft.com/office/powerpoint/2012/main" xmlns:mc="http://schemas.openxmlformats.org/markup-compatibility/2006" type="blank" preserve="1">
-  <p:cSld name="Picture with Caption">
+<p:sldLayout xmlns:a="http://schemas.openxmlformats.org/drawingml/2006/main" xmlns:p="http://schemas.openxmlformats.org/presentationml/2006/main" xmlns:r="http://schemas.openxmlformats.org/officeDocument/2006/relationships" xmlns:p14="http://schemas.microsoft.com/office/powerpoint/2010/main" xmlns:p15="http://schemas.microsoft.com/office/powerpoint/2012/main" xmlns:mc="http://schemas.openxmlformats.org/markup-compatibility/2006" type="obj" preserve="1">
+  <p:cSld name="Title and Content">
     <p:bg>
       <p:bgPr>
         <a:solidFill>
@@ -3562,7 +2937,7 @@
       </p:grpSpPr>
       <p:sp>
         <p:nvSpPr>
-          <p:cNvPr id="15" name="PlaceHolder 1"/>
+          <p:cNvPr id="16" name="PlaceHolder 1"/>
           <p:cNvSpPr>
             <a:spLocks noGrp="1"/>
           </p:cNvSpPr>
@@ -3572,8 +2947,8 @@
         </p:nvSpPr>
         <p:spPr>
           <a:xfrm>
-            <a:off x="1792440" y="4800600"/>
-            <a:ext cx="5484240" cy="564480"/>
+            <a:off x="457200" y="274680"/>
+            <a:ext cx="8225280" cy="1138680"/>
           </a:xfrm>
           <a:prstGeom prst="rect">
             <a:avLst/>
@@ -3584,19 +2959,19 @@
           </a:ln>
         </p:spPr>
         <p:txBody>
-          <a:bodyPr lIns="91440" tIns="45720" rIns="91440" bIns="45720" anchor="b">
+          <a:bodyPr lIns="91440" tIns="45720" rIns="91440" bIns="45720" anchor="ctr">
             <a:noAutofit/>
           </a:bodyPr>
           <a:lstStyle>
-            <a:lvl1pPr indent="0" algn="l" defTabSz="457200">
-              <a:lnSpc>
-                <a:spcPct val="100000"/>
-              </a:lnSpc>
-              <a:buNone/>
-              <a:tabLst>
-                <a:tab pos="0" algn="l"/>
-              </a:tabLst>
-              <a:defRPr lang="en-US" sz="2000" b="1" u="none" strike="noStrike">
+            <a:lvl1pPr indent="0" algn="ctr" defTabSz="457200">
+              <a:lnSpc>
+                <a:spcPct val="100000"/>
+              </a:lnSpc>
+              <a:buNone/>
+              <a:tabLst>
+                <a:tab pos="0" algn="l"/>
+              </a:tabLst>
+              <a:defRPr lang="en-US" sz="4400" b="0" u="none" strike="noStrike">
                 <a:solidFill>
                   <a:schemeClr val="dk1"/>
                 </a:solidFill>
@@ -3607,17 +2982,17 @@
             </a:lvl1pPr>
           </a:lstStyle>
           <a:p>
-            <a:pPr indent="0" algn="l" defTabSz="457200">
-              <a:lnSpc>
-                <a:spcPct val="100000"/>
-              </a:lnSpc>
-              <a:buNone/>
-              <a:tabLst>
-                <a:tab pos="0" algn="l"/>
-              </a:tabLst>
-            </a:pPr>
-            <a:r>
-              <a:rPr lang="en-US" sz="2000" b="1" u="none" strike="noStrike">
+            <a:pPr indent="0" algn="ctr" defTabSz="457200">
+              <a:lnSpc>
+                <a:spcPct val="100000"/>
+              </a:lnSpc>
+              <a:buNone/>
+              <a:tabLst>
+                <a:tab pos="0" algn="l"/>
+              </a:tabLst>
+            </a:pPr>
+            <a:r>
+              <a:rPr lang="en-US" sz="4400" b="0" u="none" strike="noStrike">
                 <a:solidFill>
                   <a:schemeClr val="dk1"/>
                 </a:solidFill>
@@ -3627,7 +3002,7 @@
               </a:rPr>
               <a:t>Click to edit Master title style</a:t>
             </a:r>
-            <a:endParaRPr lang="en-US" sz="2000" b="1" u="none" strike="noStrike">
+            <a:endParaRPr lang="en-US" sz="4400" b="0" u="none" strike="noStrike">
               <a:solidFill>
                 <a:schemeClr val="dk1"/>
               </a:solidFill>
@@ -3640,60 +3015,7 @@
       </p:sp>
       <p:sp>
         <p:nvSpPr>
-          <p:cNvPr id="16" name="PlaceHolder 2"/>
-          <p:cNvSpPr>
-            <a:spLocks noGrp="1"/>
-          </p:cNvSpPr>
-          <p:nvPr>
-            <p:ph type="pic"/>
-          </p:nvPr>
-        </p:nvSpPr>
-        <p:spPr>
-          <a:xfrm>
-            <a:off x="1792440" y="612720"/>
-            <a:ext cx="5484240" cy="4112640"/>
-          </a:xfrm>
-          <a:prstGeom prst="rect">
-            <a:avLst/>
-          </a:prstGeom>
-          <a:noFill/>
-          <a:ln w="0">
-            <a:noFill/>
-          </a:ln>
-        </p:spPr>
-        <p:txBody>
-          <a:bodyPr lIns="90000" tIns="45000" rIns="90000" bIns="45000" anchor="t">
-            <a:noAutofit/>
-          </a:bodyPr>
-          <a:p>
-            <a:pPr indent="0" algn="l">
-              <a:buNone/>
-            </a:pPr>
-            <a:r>
-              <a:rPr lang="en-US" sz="1800" b="0" u="none" strike="noStrike">
-                <a:solidFill>
-                  <a:srgbClr val="000000"/>
-                </a:solidFill>
-                <a:effectLst/>
-                <a:uFillTx/>
-                <a:latin typeface="Arial"/>
-              </a:rPr>
-              <a:t>Double-click to add an Image</a:t>
-            </a:r>
-            <a:endParaRPr lang="en-US" sz="1800" b="0" u="none" strike="noStrike">
-              <a:solidFill>
-                <a:srgbClr val="000000"/>
-              </a:solidFill>
-              <a:effectLst/>
-              <a:uFillTx/>
-              <a:latin typeface="Arial"/>
-            </a:endParaRPr>
-          </a:p>
-        </p:txBody>
-      </p:sp>
-      <p:sp>
-        <p:nvSpPr>
-          <p:cNvPr id="17" name="PlaceHolder 3"/>
+          <p:cNvPr id="17" name="PlaceHolder 2"/>
           <p:cNvSpPr>
             <a:spLocks noGrp="1"/>
           </p:cNvSpPr>
@@ -3703,8 +3025,8 @@
         </p:nvSpPr>
         <p:spPr>
           <a:xfrm>
-            <a:off x="1792440" y="5367240"/>
-            <a:ext cx="5484240" cy="802800"/>
+            <a:off x="457200" y="1600200"/>
+            <a:ext cx="8225280" cy="4521600"/>
           </a:xfrm>
           <a:prstGeom prst="rect">
             <a:avLst/>
@@ -3719,18 +3041,19 @@
             <a:noAutofit/>
           </a:bodyPr>
           <a:lstStyle>
-            <a:lvl1pPr indent="0" algn="l" defTabSz="457200">
+            <a:lvl1pPr algn="l" defTabSz="457200">
               <a:lnSpc>
                 <a:spcPct val="100000"/>
               </a:lnSpc>
               <a:spcBef>
-                <a:spcPts val="281"/>
+                <a:spcPts val="641"/>
               </a:spcBef>
-              <a:buNone/>
-              <a:tabLst>
-                <a:tab pos="0" algn="l"/>
-              </a:tabLst>
-              <a:defRPr lang="en-US" sz="1400" b="0" u="none" strike="noStrike">
+              <a:buClr>
+                <a:srgbClr val="000000"/>
+              </a:buClr>
+              <a:buFont typeface="Arial"/>
+              <a:buChar char="•"/>
+              <a:defRPr lang="en-US" sz="3200" b="0" u="none" strike="noStrike">
                 <a:solidFill>
                   <a:schemeClr val="dk1"/>
                 </a:solidFill>
@@ -3739,22 +3062,107 @@
                 <a:latin typeface="Calibri"/>
               </a:defRPr>
             </a:lvl1pPr>
+            <a:lvl2pPr lvl="1" algn="l" defTabSz="457200">
+              <a:lnSpc>
+                <a:spcPct val="100000"/>
+              </a:lnSpc>
+              <a:spcBef>
+                <a:spcPts val="561"/>
+              </a:spcBef>
+              <a:buClr>
+                <a:srgbClr val="000000"/>
+              </a:buClr>
+              <a:buFont typeface="Arial"/>
+              <a:buChar char="–"/>
+              <a:defRPr lang="en-US" sz="2800" b="0" u="none" strike="noStrike">
+                <a:solidFill>
+                  <a:schemeClr val="dk1"/>
+                </a:solidFill>
+                <a:effectLst/>
+                <a:uFillTx/>
+                <a:latin typeface="Calibri"/>
+              </a:defRPr>
+            </a:lvl2pPr>
+            <a:lvl3pPr lvl="2" algn="l" defTabSz="457200">
+              <a:lnSpc>
+                <a:spcPct val="100000"/>
+              </a:lnSpc>
+              <a:spcBef>
+                <a:spcPts val="479"/>
+              </a:spcBef>
+              <a:buClr>
+                <a:srgbClr val="000000"/>
+              </a:buClr>
+              <a:buFont typeface="Arial"/>
+              <a:buChar char="•"/>
+              <a:defRPr lang="en-US" sz="2400" b="0" u="none" strike="noStrike">
+                <a:solidFill>
+                  <a:schemeClr val="dk1"/>
+                </a:solidFill>
+                <a:effectLst/>
+                <a:uFillTx/>
+                <a:latin typeface="Calibri"/>
+              </a:defRPr>
+            </a:lvl3pPr>
+            <a:lvl4pPr lvl="3" algn="l" defTabSz="457200">
+              <a:lnSpc>
+                <a:spcPct val="100000"/>
+              </a:lnSpc>
+              <a:spcBef>
+                <a:spcPts val="400"/>
+              </a:spcBef>
+              <a:buClr>
+                <a:srgbClr val="000000"/>
+              </a:buClr>
+              <a:buFont typeface="Arial"/>
+              <a:buChar char="–"/>
+              <a:defRPr lang="en-US" sz="2000" b="0" u="none" strike="noStrike">
+                <a:solidFill>
+                  <a:schemeClr val="dk1"/>
+                </a:solidFill>
+                <a:effectLst/>
+                <a:uFillTx/>
+                <a:latin typeface="Calibri"/>
+              </a:defRPr>
+            </a:lvl4pPr>
+            <a:lvl5pPr lvl="4" algn="l" defTabSz="457200">
+              <a:lnSpc>
+                <a:spcPct val="100000"/>
+              </a:lnSpc>
+              <a:spcBef>
+                <a:spcPts val="400"/>
+              </a:spcBef>
+              <a:buClr>
+                <a:srgbClr val="000000"/>
+              </a:buClr>
+              <a:buFont typeface="Arial"/>
+              <a:buChar char="»"/>
+              <a:defRPr lang="en-US" sz="2000" b="0" u="none" strike="noStrike">
+                <a:solidFill>
+                  <a:schemeClr val="dk1"/>
+                </a:solidFill>
+                <a:effectLst/>
+                <a:uFillTx/>
+                <a:latin typeface="Calibri"/>
+              </a:defRPr>
+            </a:lvl5pPr>
           </a:lstStyle>
           <a:p>
-            <a:pPr indent="0" algn="l" defTabSz="457200">
+            <a:pPr marL="343080" indent="-343080" algn="l" defTabSz="457200">
               <a:lnSpc>
                 <a:spcPct val="100000"/>
               </a:lnSpc>
               <a:spcBef>
-                <a:spcPts val="281"/>
+                <a:spcPts val="641"/>
               </a:spcBef>
-              <a:buNone/>
-              <a:tabLst>
-                <a:tab pos="0" algn="l"/>
-              </a:tabLst>
-            </a:pPr>
-            <a:r>
-              <a:rPr lang="en-US" sz="1400" b="0" u="none" strike="noStrike">
+              <a:buClr>
+                <a:srgbClr val="000000"/>
+              </a:buClr>
+              <a:buFont typeface="Arial"/>
+              <a:buChar char="•"/>
+            </a:pPr>
+            <a:r>
+              <a:rPr lang="en-US" sz="3200" b="0" u="none" strike="noStrike">
                 <a:solidFill>
                   <a:schemeClr val="dk1"/>
                 </a:solidFill>
@@ -3764,7 +3172,143 @@
               </a:rPr>
               <a:t>Click to edit Master text styles</a:t>
             </a:r>
-            <a:endParaRPr lang="en-US" sz="1400" b="0" u="none" strike="noStrike">
+            <a:endParaRPr lang="en-US" sz="3200" b="0" u="none" strike="noStrike">
+              <a:solidFill>
+                <a:schemeClr val="dk1"/>
+              </a:solidFill>
+              <a:effectLst/>
+              <a:uFillTx/>
+              <a:latin typeface="Calibri"/>
+            </a:endParaRPr>
+          </a:p>
+          <a:p>
+            <a:pPr marL="743040" lvl="1" indent="-285840" algn="l" defTabSz="457200">
+              <a:lnSpc>
+                <a:spcPct val="100000"/>
+              </a:lnSpc>
+              <a:spcBef>
+                <a:spcPts val="561"/>
+              </a:spcBef>
+              <a:buClr>
+                <a:srgbClr val="000000"/>
+              </a:buClr>
+              <a:buFont typeface="Arial"/>
+              <a:buChar char="–"/>
+            </a:pPr>
+            <a:r>
+              <a:rPr lang="en-US" sz="2800" b="0" u="none" strike="noStrike">
+                <a:solidFill>
+                  <a:schemeClr val="dk1"/>
+                </a:solidFill>
+                <a:effectLst/>
+                <a:uFillTx/>
+                <a:latin typeface="Calibri"/>
+              </a:rPr>
+              <a:t>Second level</a:t>
+            </a:r>
+            <a:endParaRPr lang="en-US" sz="2800" b="0" u="none" strike="noStrike">
+              <a:solidFill>
+                <a:schemeClr val="dk1"/>
+              </a:solidFill>
+              <a:effectLst/>
+              <a:uFillTx/>
+              <a:latin typeface="Calibri"/>
+            </a:endParaRPr>
+          </a:p>
+          <a:p>
+            <a:pPr marL="1143000" lvl="2" indent="-228600" algn="l" defTabSz="457200">
+              <a:lnSpc>
+                <a:spcPct val="100000"/>
+              </a:lnSpc>
+              <a:spcBef>
+                <a:spcPts val="479"/>
+              </a:spcBef>
+              <a:buClr>
+                <a:srgbClr val="000000"/>
+              </a:buClr>
+              <a:buFont typeface="Arial"/>
+              <a:buChar char="•"/>
+            </a:pPr>
+            <a:r>
+              <a:rPr lang="en-US" sz="2400" b="0" u="none" strike="noStrike">
+                <a:solidFill>
+                  <a:schemeClr val="dk1"/>
+                </a:solidFill>
+                <a:effectLst/>
+                <a:uFillTx/>
+                <a:latin typeface="Calibri"/>
+              </a:rPr>
+              <a:t>Third level</a:t>
+            </a:r>
+            <a:endParaRPr lang="en-US" sz="2400" b="0" u="none" strike="noStrike">
+              <a:solidFill>
+                <a:schemeClr val="dk1"/>
+              </a:solidFill>
+              <a:effectLst/>
+              <a:uFillTx/>
+              <a:latin typeface="Calibri"/>
+            </a:endParaRPr>
+          </a:p>
+          <a:p>
+            <a:pPr marL="1600200" lvl="3" indent="-228600" algn="l" defTabSz="457200">
+              <a:lnSpc>
+                <a:spcPct val="100000"/>
+              </a:lnSpc>
+              <a:spcBef>
+                <a:spcPts val="400"/>
+              </a:spcBef>
+              <a:buClr>
+                <a:srgbClr val="000000"/>
+              </a:buClr>
+              <a:buFont typeface="Arial"/>
+              <a:buChar char="–"/>
+            </a:pPr>
+            <a:r>
+              <a:rPr lang="en-US" sz="2000" b="0" u="none" strike="noStrike">
+                <a:solidFill>
+                  <a:schemeClr val="dk1"/>
+                </a:solidFill>
+                <a:effectLst/>
+                <a:uFillTx/>
+                <a:latin typeface="Calibri"/>
+              </a:rPr>
+              <a:t>Fourth level</a:t>
+            </a:r>
+            <a:endParaRPr lang="en-US" sz="2000" b="0" u="none" strike="noStrike">
+              <a:solidFill>
+                <a:schemeClr val="dk1"/>
+              </a:solidFill>
+              <a:effectLst/>
+              <a:uFillTx/>
+              <a:latin typeface="Calibri"/>
+            </a:endParaRPr>
+          </a:p>
+          <a:p>
+            <a:pPr marL="2057400" lvl="4" indent="-228600" algn="l" defTabSz="457200">
+              <a:lnSpc>
+                <a:spcPct val="100000"/>
+              </a:lnSpc>
+              <a:spcBef>
+                <a:spcPts val="400"/>
+              </a:spcBef>
+              <a:buClr>
+                <a:srgbClr val="000000"/>
+              </a:buClr>
+              <a:buFont typeface="Arial"/>
+              <a:buChar char="»"/>
+            </a:pPr>
+            <a:r>
+              <a:rPr lang="en-US" sz="2000" b="0" u="none" strike="noStrike">
+                <a:solidFill>
+                  <a:schemeClr val="dk1"/>
+                </a:solidFill>
+                <a:effectLst/>
+                <a:uFillTx/>
+                <a:latin typeface="Calibri"/>
+              </a:rPr>
+              <a:t>Fifth level</a:t>
+            </a:r>
+            <a:endParaRPr lang="en-US" sz="2000" b="0" u="none" strike="noStrike">
               <a:solidFill>
                 <a:schemeClr val="dk1"/>
               </a:solidFill>
@@ -3777,7 +3321,7 @@
       </p:sp>
       <p:sp>
         <p:nvSpPr>
-          <p:cNvPr id="18" name="PlaceHolder 4"/>
+          <p:cNvPr id="18" name="PlaceHolder 3"/>
           <p:cNvSpPr>
             <a:spLocks noGrp="1"/>
           </p:cNvSpPr>
@@ -3788,7 +3332,7 @@
         <p:spPr>
           <a:xfrm>
             <a:off x="457200" y="6356520"/>
-            <a:ext cx="2131560" cy="362880"/>
+            <a:ext cx="2129400" cy="360720"/>
           </a:xfrm>
           <a:prstGeom prst="rect">
             <a:avLst/>
@@ -3844,7 +3388,7 @@
                 <a:uFillTx/>
                 <a:latin typeface="Calibri"/>
               </a:rPr>
-              <a:t> </a:t>
+              <a:t>&lt;date/time&gt;</a:t>
             </a:r>
             <a:endParaRPr lang="en-US" sz="1200" b="0" u="none" strike="noStrike">
               <a:solidFill>
@@ -3859,7 +3403,7 @@
       </p:sp>
       <p:sp>
         <p:nvSpPr>
-          <p:cNvPr id="19" name="PlaceHolder 5"/>
+          <p:cNvPr id="19" name="PlaceHolder 4"/>
           <p:cNvSpPr>
             <a:spLocks noGrp="1"/>
           </p:cNvSpPr>
@@ -3870,7 +3414,7 @@
         <p:spPr>
           <a:xfrm>
             <a:off x="3124080" y="6356520"/>
-            <a:ext cx="2893320" cy="362880"/>
+            <a:ext cx="2891160" cy="360720"/>
           </a:xfrm>
           <a:prstGeom prst="rect">
             <a:avLst/>
@@ -3922,7 +3466,7 @@
                 <a:uFillTx/>
                 <a:latin typeface="Times New Roman"/>
               </a:rPr>
-              <a:t> </a:t>
+              <a:t>&lt;footer&gt;</a:t>
             </a:r>
             <a:endParaRPr lang="en-US" sz="1400" b="0" u="none" strike="noStrike">
               <a:solidFill>
@@ -3937,7 +3481,7 @@
       </p:sp>
       <p:sp>
         <p:nvSpPr>
-          <p:cNvPr id="20" name="PlaceHolder 6"/>
+          <p:cNvPr id="20" name="PlaceHolder 5"/>
           <p:cNvSpPr>
             <a:spLocks noGrp="1"/>
           </p:cNvSpPr>
@@ -3948,7 +3492,7 @@
         <p:spPr>
           <a:xfrm>
             <a:off x="6553080" y="6356520"/>
-            <a:ext cx="2131560" cy="362880"/>
+            <a:ext cx="2129400" cy="360720"/>
           </a:xfrm>
           <a:prstGeom prst="rect">
             <a:avLst/>
@@ -3993,7 +3537,7 @@
                 <a:tab pos="0" algn="l"/>
               </a:tabLst>
             </a:pPr>
-            <a:fld id="{3B5B528B-D35D-4776-A88D-1F6E19961DA6}" type="slidenum">
+            <a:fld id="{4E17AC44-EA73-49C2-A077-43B3FBECC7D6}" type="slidenum">
               <a:rPr lang="en-US" sz="1200" b="0" u="none" strike="noStrike">
                 <a:solidFill>
                   <a:schemeClr val="dk1">
@@ -4004,7 +3548,7 @@
                 <a:uFillTx/>
                 <a:latin typeface="Calibri"/>
               </a:rPr>
-              <a:t>1</a:t>
+              <a:t>&lt;number&gt;</a:t>
             </a:fld>
             <a:endParaRPr lang="en-US" sz="1200" b="0" u="none" strike="noStrike">
               <a:solidFill>
@@ -4026,8 +3570,8 @@
 </file>
 
 <file path=ppt/slideLayouts/slideLayout5.xml><?xml version="1.0" encoding="utf-8"?>
-<p:sldLayout xmlns:a="http://schemas.openxmlformats.org/drawingml/2006/main" xmlns:p="http://schemas.openxmlformats.org/presentationml/2006/main" xmlns:r="http://schemas.openxmlformats.org/officeDocument/2006/relationships" xmlns:p14="http://schemas.microsoft.com/office/powerpoint/2010/main" xmlns:p15="http://schemas.microsoft.com/office/powerpoint/2012/main" xmlns:mc="http://schemas.openxmlformats.org/markup-compatibility/2006" type="title" preserve="1">
-  <p:cSld name="Title Slide">
+<p:sldLayout xmlns:a="http://schemas.openxmlformats.org/drawingml/2006/main" xmlns:p="http://schemas.openxmlformats.org/presentationml/2006/main" xmlns:r="http://schemas.openxmlformats.org/officeDocument/2006/relationships" xmlns:p14="http://schemas.microsoft.com/office/powerpoint/2010/main" xmlns:p15="http://schemas.microsoft.com/office/powerpoint/2012/main" xmlns:mc="http://schemas.openxmlformats.org/markup-compatibility/2006" type="blank" preserve="1">
+  <p:cSld name="Section Header">
     <p:bg>
       <p:bgPr>
         <a:solidFill>
@@ -4061,8 +3605,8 @@
         </p:nvSpPr>
         <p:spPr>
           <a:xfrm>
-            <a:off x="685800" y="2130480"/>
-            <a:ext cx="7770240" cy="1467720"/>
+            <a:off x="722160" y="4406760"/>
+            <a:ext cx="7768080" cy="1357920"/>
           </a:xfrm>
           <a:prstGeom prst="rect">
             <a:avLst/>
@@ -4073,19 +3617,19 @@
           </a:ln>
         </p:spPr>
         <p:txBody>
-          <a:bodyPr lIns="91440" tIns="45720" rIns="91440" bIns="45720" anchor="ctr">
+          <a:bodyPr lIns="91440" tIns="45720" rIns="91440" bIns="45720" anchor="t">
             <a:noAutofit/>
           </a:bodyPr>
           <a:lstStyle>
-            <a:lvl1pPr indent="0" algn="ctr" defTabSz="457200">
-              <a:lnSpc>
-                <a:spcPct val="100000"/>
-              </a:lnSpc>
-              <a:buNone/>
-              <a:tabLst>
-                <a:tab pos="0" algn="l"/>
-              </a:tabLst>
-              <a:defRPr lang="en-US" sz="4400" b="0" u="none" strike="noStrike">
+            <a:lvl1pPr indent="0" algn="l" defTabSz="457200">
+              <a:lnSpc>
+                <a:spcPct val="100000"/>
+              </a:lnSpc>
+              <a:buNone/>
+              <a:tabLst>
+                <a:tab pos="0" algn="l"/>
+              </a:tabLst>
+              <a:defRPr lang="en-US" sz="4000" b="1" u="none" strike="noStrike" cap="all">
                 <a:solidFill>
                   <a:schemeClr val="dk1"/>
                 </a:solidFill>
@@ -4096,17 +3640,17 @@
             </a:lvl1pPr>
           </a:lstStyle>
           <a:p>
-            <a:pPr indent="0" algn="ctr" defTabSz="457200">
-              <a:lnSpc>
-                <a:spcPct val="100000"/>
-              </a:lnSpc>
-              <a:buNone/>
-              <a:tabLst>
-                <a:tab pos="0" algn="l"/>
-              </a:tabLst>
-            </a:pPr>
-            <a:r>
-              <a:rPr lang="en-US" sz="4400" b="0" u="none" strike="noStrike">
+            <a:pPr indent="0" algn="l" defTabSz="457200">
+              <a:lnSpc>
+                <a:spcPct val="100000"/>
+              </a:lnSpc>
+              <a:buNone/>
+              <a:tabLst>
+                <a:tab pos="0" algn="l"/>
+              </a:tabLst>
+            </a:pPr>
+            <a:r>
+              <a:rPr lang="en-US" sz="4000" b="1" u="none" strike="noStrike" cap="all">
                 <a:solidFill>
                   <a:schemeClr val="dk1"/>
                 </a:solidFill>
@@ -4116,7 +3660,7 @@
               </a:rPr>
               <a:t>Click to edit Master title style</a:t>
             </a:r>
-            <a:endParaRPr lang="en-US" sz="4400" b="0" u="none" strike="noStrike">
+            <a:endParaRPr lang="en-US" sz="4000" b="1" u="none" strike="noStrike" cap="all">
               <a:solidFill>
                 <a:schemeClr val="dk1"/>
               </a:solidFill>
@@ -4130,6 +3674,96 @@
       <p:sp>
         <p:nvSpPr>
           <p:cNvPr id="22" name="PlaceHolder 2"/>
+          <p:cNvSpPr>
+            <a:spLocks noGrp="1"/>
+          </p:cNvSpPr>
+          <p:nvPr>
+            <p:ph type="body"/>
+          </p:nvPr>
+        </p:nvSpPr>
+        <p:spPr>
+          <a:xfrm>
+            <a:off x="722160" y="2906640"/>
+            <a:ext cx="7768080" cy="1495800"/>
+          </a:xfrm>
+          <a:prstGeom prst="rect">
+            <a:avLst/>
+          </a:prstGeom>
+          <a:noFill/>
+          <a:ln w="0">
+            <a:noFill/>
+          </a:ln>
+        </p:spPr>
+        <p:txBody>
+          <a:bodyPr lIns="91440" tIns="45720" rIns="91440" bIns="45720" anchor="b">
+            <a:noAutofit/>
+          </a:bodyPr>
+          <a:lstStyle>
+            <a:lvl1pPr indent="0" algn="l" defTabSz="457200">
+              <a:lnSpc>
+                <a:spcPct val="100000"/>
+              </a:lnSpc>
+              <a:spcBef>
+                <a:spcPts val="400"/>
+              </a:spcBef>
+              <a:buNone/>
+              <a:tabLst>
+                <a:tab pos="0" algn="l"/>
+              </a:tabLst>
+              <a:defRPr lang="en-US" sz="2000" b="0" u="none" strike="noStrike">
+                <a:solidFill>
+                  <a:schemeClr val="dk1">
+                    <a:tint val="75000"/>
+                  </a:schemeClr>
+                </a:solidFill>
+                <a:effectLst/>
+                <a:uFillTx/>
+                <a:latin typeface="Calibri"/>
+              </a:defRPr>
+            </a:lvl1pPr>
+          </a:lstStyle>
+          <a:p>
+            <a:pPr indent="0" algn="l" defTabSz="457200">
+              <a:lnSpc>
+                <a:spcPct val="100000"/>
+              </a:lnSpc>
+              <a:spcBef>
+                <a:spcPts val="400"/>
+              </a:spcBef>
+              <a:buNone/>
+              <a:tabLst>
+                <a:tab pos="0" algn="l"/>
+              </a:tabLst>
+            </a:pPr>
+            <a:r>
+              <a:rPr lang="en-US" sz="2000" b="0" u="none" strike="noStrike">
+                <a:solidFill>
+                  <a:schemeClr val="dk1">
+                    <a:tint val="75000"/>
+                  </a:schemeClr>
+                </a:solidFill>
+                <a:effectLst/>
+                <a:uFillTx/>
+                <a:latin typeface="Calibri"/>
+              </a:rPr>
+              <a:t>Click to edit Master text styles</a:t>
+            </a:r>
+            <a:endParaRPr lang="en-US" sz="2000" b="0" u="none" strike="noStrike">
+              <a:solidFill>
+                <a:schemeClr val="dk1">
+                  <a:tint val="75000"/>
+                </a:schemeClr>
+              </a:solidFill>
+              <a:effectLst/>
+              <a:uFillTx/>
+              <a:latin typeface="Calibri"/>
+            </a:endParaRPr>
+          </a:p>
+        </p:txBody>
+      </p:sp>
+      <p:sp>
+        <p:nvSpPr>
+          <p:cNvPr id="23" name="PlaceHolder 3"/>
           <p:cNvSpPr>
             <a:spLocks noGrp="1"/>
           </p:cNvSpPr>
@@ -4140,7 +3774,7 @@
         <p:spPr>
           <a:xfrm>
             <a:off x="457200" y="6356520"/>
-            <a:ext cx="2131560" cy="362880"/>
+            <a:ext cx="2129400" cy="360720"/>
           </a:xfrm>
           <a:prstGeom prst="rect">
             <a:avLst/>
@@ -4196,7 +3830,7 @@
                 <a:uFillTx/>
                 <a:latin typeface="Calibri"/>
               </a:rPr>
-              <a:t> </a:t>
+              <a:t>&lt;date/time&gt;</a:t>
             </a:r>
             <a:endParaRPr lang="en-US" sz="1200" b="0" u="none" strike="noStrike">
               <a:solidFill>
@@ -4211,7 +3845,7 @@
       </p:sp>
       <p:sp>
         <p:nvSpPr>
-          <p:cNvPr id="23" name="PlaceHolder 3"/>
+          <p:cNvPr id="24" name="PlaceHolder 4"/>
           <p:cNvSpPr>
             <a:spLocks noGrp="1"/>
           </p:cNvSpPr>
@@ -4222,7 +3856,7 @@
         <p:spPr>
           <a:xfrm>
             <a:off x="3124080" y="6356520"/>
-            <a:ext cx="2893320" cy="362880"/>
+            <a:ext cx="2891160" cy="360720"/>
           </a:xfrm>
           <a:prstGeom prst="rect">
             <a:avLst/>
@@ -4274,7 +3908,7 @@
                 <a:uFillTx/>
                 <a:latin typeface="Times New Roman"/>
               </a:rPr>
-              <a:t> </a:t>
+              <a:t>&lt;footer&gt;</a:t>
             </a:r>
             <a:endParaRPr lang="en-US" sz="1400" b="0" u="none" strike="noStrike">
               <a:solidFill>
@@ -4289,7 +3923,7 @@
       </p:sp>
       <p:sp>
         <p:nvSpPr>
-          <p:cNvPr id="24" name="PlaceHolder 4"/>
+          <p:cNvPr id="25" name="PlaceHolder 5"/>
           <p:cNvSpPr>
             <a:spLocks noGrp="1"/>
           </p:cNvSpPr>
@@ -4300,7 +3934,7 @@
         <p:spPr>
           <a:xfrm>
             <a:off x="6553080" y="6356520"/>
-            <a:ext cx="2131560" cy="362880"/>
+            <a:ext cx="2129400" cy="360720"/>
           </a:xfrm>
           <a:prstGeom prst="rect">
             <a:avLst/>
@@ -4345,7 +3979,7 @@
                 <a:tab pos="0" algn="l"/>
               </a:tabLst>
             </a:pPr>
-            <a:fld id="{5E2E5CC3-283C-4F59-9883-29713CDAEEE5}" type="slidenum">
+            <a:fld id="{25C6174E-09C8-41C3-BA87-1D8DB2CFA9B3}" type="slidenum">
               <a:rPr lang="en-US" sz="1200" b="0" u="none" strike="noStrike">
                 <a:solidFill>
                   <a:schemeClr val="dk1">
@@ -4356,7 +3990,7 @@
                 <a:uFillTx/>
                 <a:latin typeface="Calibri"/>
               </a:rPr>
-              <a:t>1</a:t>
+              <a:t>&lt;number&gt;</a:t>
             </a:fld>
             <a:endParaRPr lang="en-US" sz="1200" b="0" u="none" strike="noStrike">
               <a:solidFill>
@@ -4378,8 +4012,8 @@
 </file>
 
 <file path=ppt/slideLayouts/slideLayout6.xml><?xml version="1.0" encoding="utf-8"?>
-<p:sldLayout xmlns:a="http://schemas.openxmlformats.org/drawingml/2006/main" xmlns:p="http://schemas.openxmlformats.org/presentationml/2006/main" xmlns:r="http://schemas.openxmlformats.org/officeDocument/2006/relationships" xmlns:p14="http://schemas.microsoft.com/office/powerpoint/2010/main" xmlns:p15="http://schemas.microsoft.com/office/powerpoint/2012/main" xmlns:mc="http://schemas.openxmlformats.org/markup-compatibility/2006" type="vertTx" preserve="1">
-  <p:cSld name="Title and Vertical Text">
+<p:sldLayout xmlns:a="http://schemas.openxmlformats.org/drawingml/2006/main" xmlns:p="http://schemas.openxmlformats.org/presentationml/2006/main" xmlns:r="http://schemas.openxmlformats.org/officeDocument/2006/relationships" xmlns:p14="http://schemas.microsoft.com/office/powerpoint/2010/main" xmlns:p15="http://schemas.microsoft.com/office/powerpoint/2012/main" xmlns:mc="http://schemas.openxmlformats.org/markup-compatibility/2006" type="twoObj" preserve="1">
+  <p:cSld name="Two Content">
     <p:bg>
       <p:bgPr>
         <a:solidFill>
@@ -4403,7 +4037,7 @@
       </p:grpSpPr>
       <p:sp>
         <p:nvSpPr>
-          <p:cNvPr id="25" name="PlaceHolder 1"/>
+          <p:cNvPr id="26" name="PlaceHolder 1"/>
           <p:cNvSpPr>
             <a:spLocks noGrp="1"/>
           </p:cNvSpPr>
@@ -4414,7 +4048,7 @@
         <p:spPr>
           <a:xfrm>
             <a:off x="457200" y="274680"/>
-            <a:ext cx="8227440" cy="1140840"/>
+            <a:ext cx="8225280" cy="1138680"/>
           </a:xfrm>
           <a:prstGeom prst="rect">
             <a:avLst/>
@@ -4481,7 +4115,7 @@
       </p:sp>
       <p:sp>
         <p:nvSpPr>
-          <p:cNvPr id="26" name="PlaceHolder 2"/>
+          <p:cNvPr id="27" name="PlaceHolder 2"/>
           <p:cNvSpPr>
             <a:spLocks noGrp="1"/>
           </p:cNvSpPr>
@@ -4492,7 +4126,7 @@
         <p:spPr>
           <a:xfrm>
             <a:off x="457200" y="1600200"/>
-            <a:ext cx="8227440" cy="4523760"/>
+            <a:ext cx="4034160" cy="4521600"/>
           </a:xfrm>
           <a:prstGeom prst="rect">
             <a:avLst/>
@@ -4503,7 +4137,7 @@
           </a:ln>
         </p:spPr>
         <p:txBody>
-          <a:bodyPr lIns="91440" tIns="45720" rIns="91440" bIns="45720" anchor="t" vert="eaVert">
+          <a:bodyPr lIns="91440" tIns="45720" rIns="91440" bIns="45720" anchor="t">
             <a:noAutofit/>
           </a:bodyPr>
           <a:lstStyle>
@@ -4512,14 +4146,14 @@
                 <a:spcPct val="100000"/>
               </a:lnSpc>
               <a:spcBef>
-                <a:spcPts val="641"/>
+                <a:spcPts val="561"/>
               </a:spcBef>
               <a:buClr>
                 <a:srgbClr val="000000"/>
               </a:buClr>
               <a:buFont typeface="Arial"/>
               <a:buChar char="•"/>
-              <a:defRPr lang="en-US" sz="3200" b="0" u="none" strike="noStrike">
+              <a:defRPr lang="en-US" sz="2800" b="0" u="none" strike="noStrike">
                 <a:solidFill>
                   <a:schemeClr val="dk1"/>
                 </a:solidFill>
@@ -4529,6 +4163,92 @@
               </a:defRPr>
             </a:lvl1pPr>
             <a:lvl2pPr lvl="1" algn="l" defTabSz="457200">
+              <a:lnSpc>
+                <a:spcPct val="100000"/>
+              </a:lnSpc>
+              <a:spcBef>
+                <a:spcPts val="479"/>
+              </a:spcBef>
+              <a:buClr>
+                <a:srgbClr val="000000"/>
+              </a:buClr>
+              <a:buFont typeface="Arial"/>
+              <a:buChar char="–"/>
+              <a:defRPr lang="en-US" sz="2400" b="0" u="none" strike="noStrike">
+                <a:solidFill>
+                  <a:schemeClr val="dk1"/>
+                </a:solidFill>
+                <a:effectLst/>
+                <a:uFillTx/>
+                <a:latin typeface="Calibri"/>
+              </a:defRPr>
+            </a:lvl2pPr>
+            <a:lvl3pPr lvl="2" algn="l" defTabSz="457200">
+              <a:lnSpc>
+                <a:spcPct val="100000"/>
+              </a:lnSpc>
+              <a:spcBef>
+                <a:spcPts val="400"/>
+              </a:spcBef>
+              <a:buClr>
+                <a:srgbClr val="000000"/>
+              </a:buClr>
+              <a:buFont typeface="Arial"/>
+              <a:buChar char="•"/>
+              <a:defRPr lang="en-US" sz="2000" b="0" u="none" strike="noStrike">
+                <a:solidFill>
+                  <a:schemeClr val="dk1"/>
+                </a:solidFill>
+                <a:effectLst/>
+                <a:uFillTx/>
+                <a:latin typeface="Calibri"/>
+              </a:defRPr>
+            </a:lvl3pPr>
+            <a:lvl4pPr lvl="3" algn="l" defTabSz="457200">
+              <a:lnSpc>
+                <a:spcPct val="100000"/>
+              </a:lnSpc>
+              <a:spcBef>
+                <a:spcPts val="360"/>
+              </a:spcBef>
+              <a:buClr>
+                <a:srgbClr val="000000"/>
+              </a:buClr>
+              <a:buFont typeface="Arial"/>
+              <a:buChar char="–"/>
+              <a:defRPr lang="en-US" sz="1800" b="0" u="none" strike="noStrike">
+                <a:solidFill>
+                  <a:schemeClr val="dk1"/>
+                </a:solidFill>
+                <a:effectLst/>
+                <a:uFillTx/>
+                <a:latin typeface="Calibri"/>
+              </a:defRPr>
+            </a:lvl4pPr>
+            <a:lvl5pPr lvl="4" algn="l" defTabSz="457200">
+              <a:lnSpc>
+                <a:spcPct val="100000"/>
+              </a:lnSpc>
+              <a:spcBef>
+                <a:spcPts val="360"/>
+              </a:spcBef>
+              <a:buClr>
+                <a:srgbClr val="000000"/>
+              </a:buClr>
+              <a:buFont typeface="Arial"/>
+              <a:buChar char="»"/>
+              <a:defRPr lang="en-US" sz="1800" b="0" u="none" strike="noStrike">
+                <a:solidFill>
+                  <a:schemeClr val="dk1"/>
+                </a:solidFill>
+                <a:effectLst/>
+                <a:uFillTx/>
+                <a:latin typeface="Calibri"/>
+              </a:defRPr>
+            </a:lvl5pPr>
+          </a:lstStyle>
+          <a:p>
+            <a:pPr marL="343080" indent="-343080" algn="l" defTabSz="457200">
               <a:lnSpc>
                 <a:spcPct val="100000"/>
               </a:lnSpc>
@@ -4539,17 +4259,30 @@
                 <a:srgbClr val="000000"/>
               </a:buClr>
               <a:buFont typeface="Arial"/>
-              <a:buChar char="–"/>
-              <a:defRPr lang="en-US" sz="2800" b="0" u="none" strike="noStrike">
-                <a:solidFill>
-                  <a:schemeClr val="dk1"/>
-                </a:solidFill>
-                <a:effectLst/>
-                <a:uFillTx/>
-                <a:latin typeface="Calibri"/>
-              </a:defRPr>
-            </a:lvl2pPr>
-            <a:lvl3pPr lvl="2" algn="l" defTabSz="457200">
+              <a:buChar char="•"/>
+            </a:pPr>
+            <a:r>
+              <a:rPr lang="en-US" sz="2800" b="0" u="none" strike="noStrike">
+                <a:solidFill>
+                  <a:schemeClr val="dk1"/>
+                </a:solidFill>
+                <a:effectLst/>
+                <a:uFillTx/>
+                <a:latin typeface="Calibri"/>
+              </a:rPr>
+              <a:t>Click to edit Master text styles</a:t>
+            </a:r>
+            <a:endParaRPr lang="en-US" sz="2800" b="0" u="none" strike="noStrike">
+              <a:solidFill>
+                <a:schemeClr val="dk1"/>
+              </a:solidFill>
+              <a:effectLst/>
+              <a:uFillTx/>
+              <a:latin typeface="Calibri"/>
+            </a:endParaRPr>
+          </a:p>
+          <a:p>
+            <a:pPr marL="743040" lvl="1" indent="-285840" algn="l" defTabSz="457200">
               <a:lnSpc>
                 <a:spcPct val="100000"/>
               </a:lnSpc>
@@ -4560,17 +4293,30 @@
                 <a:srgbClr val="000000"/>
               </a:buClr>
               <a:buFont typeface="Arial"/>
-              <a:buChar char="•"/>
-              <a:defRPr lang="en-US" sz="2400" b="0" u="none" strike="noStrike">
-                <a:solidFill>
-                  <a:schemeClr val="dk1"/>
-                </a:solidFill>
-                <a:effectLst/>
-                <a:uFillTx/>
-                <a:latin typeface="Calibri"/>
-              </a:defRPr>
-            </a:lvl3pPr>
-            <a:lvl4pPr lvl="3" algn="l" defTabSz="457200">
+              <a:buChar char="–"/>
+            </a:pPr>
+            <a:r>
+              <a:rPr lang="en-US" sz="2400" b="0" u="none" strike="noStrike">
+                <a:solidFill>
+                  <a:schemeClr val="dk1"/>
+                </a:solidFill>
+                <a:effectLst/>
+                <a:uFillTx/>
+                <a:latin typeface="Calibri"/>
+              </a:rPr>
+              <a:t>Second level</a:t>
+            </a:r>
+            <a:endParaRPr lang="en-US" sz="2400" b="0" u="none" strike="noStrike">
+              <a:solidFill>
+                <a:schemeClr val="dk1"/>
+              </a:solidFill>
+              <a:effectLst/>
+              <a:uFillTx/>
+              <a:latin typeface="Calibri"/>
+            </a:endParaRPr>
+          </a:p>
+          <a:p>
+            <a:pPr marL="1143000" lvl="2" indent="-228600" algn="l" defTabSz="457200">
               <a:lnSpc>
                 <a:spcPct val="100000"/>
               </a:lnSpc>
@@ -4581,8 +4327,139 @@
                 <a:srgbClr val="000000"/>
               </a:buClr>
               <a:buFont typeface="Arial"/>
+              <a:buChar char="•"/>
+            </a:pPr>
+            <a:r>
+              <a:rPr lang="en-US" sz="2000" b="0" u="none" strike="noStrike">
+                <a:solidFill>
+                  <a:schemeClr val="dk1"/>
+                </a:solidFill>
+                <a:effectLst/>
+                <a:uFillTx/>
+                <a:latin typeface="Calibri"/>
+              </a:rPr>
+              <a:t>Third level</a:t>
+            </a:r>
+            <a:endParaRPr lang="en-US" sz="2000" b="0" u="none" strike="noStrike">
+              <a:solidFill>
+                <a:schemeClr val="dk1"/>
+              </a:solidFill>
+              <a:effectLst/>
+              <a:uFillTx/>
+              <a:latin typeface="Calibri"/>
+            </a:endParaRPr>
+          </a:p>
+          <a:p>
+            <a:pPr marL="1600200" lvl="3" indent="-228600" algn="l" defTabSz="457200">
+              <a:lnSpc>
+                <a:spcPct val="100000"/>
+              </a:lnSpc>
+              <a:spcBef>
+                <a:spcPts val="360"/>
+              </a:spcBef>
+              <a:buClr>
+                <a:srgbClr val="000000"/>
+              </a:buClr>
+              <a:buFont typeface="Arial"/>
               <a:buChar char="–"/>
-              <a:defRPr lang="en-US" sz="2000" b="0" u="none" strike="noStrike">
+            </a:pPr>
+            <a:r>
+              <a:rPr lang="en-US" sz="1800" b="0" u="none" strike="noStrike">
+                <a:solidFill>
+                  <a:schemeClr val="dk1"/>
+                </a:solidFill>
+                <a:effectLst/>
+                <a:uFillTx/>
+                <a:latin typeface="Calibri"/>
+              </a:rPr>
+              <a:t>Fourth level</a:t>
+            </a:r>
+            <a:endParaRPr lang="en-US" sz="1800" b="0" u="none" strike="noStrike">
+              <a:solidFill>
+                <a:schemeClr val="dk1"/>
+              </a:solidFill>
+              <a:effectLst/>
+              <a:uFillTx/>
+              <a:latin typeface="Calibri"/>
+            </a:endParaRPr>
+          </a:p>
+          <a:p>
+            <a:pPr marL="2057400" lvl="4" indent="-228600" algn="l" defTabSz="457200">
+              <a:lnSpc>
+                <a:spcPct val="100000"/>
+              </a:lnSpc>
+              <a:spcBef>
+                <a:spcPts val="360"/>
+              </a:spcBef>
+              <a:buClr>
+                <a:srgbClr val="000000"/>
+              </a:buClr>
+              <a:buFont typeface="Arial"/>
+              <a:buChar char="»"/>
+            </a:pPr>
+            <a:r>
+              <a:rPr lang="en-US" sz="1800" b="0" u="none" strike="noStrike">
+                <a:solidFill>
+                  <a:schemeClr val="dk1"/>
+                </a:solidFill>
+                <a:effectLst/>
+                <a:uFillTx/>
+                <a:latin typeface="Calibri"/>
+              </a:rPr>
+              <a:t>Fifth level</a:t>
+            </a:r>
+            <a:endParaRPr lang="en-US" sz="1800" b="0" u="none" strike="noStrike">
+              <a:solidFill>
+                <a:schemeClr val="dk1"/>
+              </a:solidFill>
+              <a:effectLst/>
+              <a:uFillTx/>
+              <a:latin typeface="Calibri"/>
+            </a:endParaRPr>
+          </a:p>
+        </p:txBody>
+      </p:sp>
+      <p:sp>
+        <p:nvSpPr>
+          <p:cNvPr id="28" name="PlaceHolder 3"/>
+          <p:cNvSpPr>
+            <a:spLocks noGrp="1"/>
+          </p:cNvSpPr>
+          <p:nvPr>
+            <p:ph type="body"/>
+          </p:nvPr>
+        </p:nvSpPr>
+        <p:spPr>
+          <a:xfrm>
+            <a:off x="4648320" y="1600200"/>
+            <a:ext cx="4034160" cy="4521600"/>
+          </a:xfrm>
+          <a:prstGeom prst="rect">
+            <a:avLst/>
+          </a:prstGeom>
+          <a:noFill/>
+          <a:ln w="0">
+            <a:noFill/>
+          </a:ln>
+        </p:spPr>
+        <p:txBody>
+          <a:bodyPr lIns="91440" tIns="45720" rIns="91440" bIns="45720" anchor="t">
+            <a:noAutofit/>
+          </a:bodyPr>
+          <a:lstStyle>
+            <a:lvl1pPr algn="l" defTabSz="457200">
+              <a:lnSpc>
+                <a:spcPct val="100000"/>
+              </a:lnSpc>
+              <a:spcBef>
+                <a:spcPts val="561"/>
+              </a:spcBef>
+              <a:buClr>
+                <a:srgbClr val="000000"/>
+              </a:buClr>
+              <a:buFont typeface="Arial"/>
+              <a:buChar char="•"/>
+              <a:defRPr lang="en-US" sz="2800" b="0" u="none" strike="noStrike">
                 <a:solidFill>
                   <a:schemeClr val="dk1"/>
                 </a:solidFill>
@@ -4590,8 +4467,29 @@
                 <a:uFillTx/>
                 <a:latin typeface="Calibri"/>
               </a:defRPr>
-            </a:lvl4pPr>
-            <a:lvl5pPr lvl="4" algn="l" defTabSz="457200">
+            </a:lvl1pPr>
+            <a:lvl2pPr lvl="1" algn="l" defTabSz="457200">
+              <a:lnSpc>
+                <a:spcPct val="100000"/>
+              </a:lnSpc>
+              <a:spcBef>
+                <a:spcPts val="479"/>
+              </a:spcBef>
+              <a:buClr>
+                <a:srgbClr val="000000"/>
+              </a:buClr>
+              <a:buFont typeface="Arial"/>
+              <a:buChar char="–"/>
+              <a:defRPr lang="en-US" sz="2400" b="0" u="none" strike="noStrike">
+                <a:solidFill>
+                  <a:schemeClr val="dk1"/>
+                </a:solidFill>
+                <a:effectLst/>
+                <a:uFillTx/>
+                <a:latin typeface="Calibri"/>
+              </a:defRPr>
+            </a:lvl2pPr>
+            <a:lvl3pPr lvl="2" algn="l" defTabSz="457200">
               <a:lnSpc>
                 <a:spcPct val="100000"/>
               </a:lnSpc>
@@ -4602,8 +4500,50 @@
                 <a:srgbClr val="000000"/>
               </a:buClr>
               <a:buFont typeface="Arial"/>
+              <a:buChar char="•"/>
+              <a:defRPr lang="en-US" sz="2000" b="0" u="none" strike="noStrike">
+                <a:solidFill>
+                  <a:schemeClr val="dk1"/>
+                </a:solidFill>
+                <a:effectLst/>
+                <a:uFillTx/>
+                <a:latin typeface="Calibri"/>
+              </a:defRPr>
+            </a:lvl3pPr>
+            <a:lvl4pPr lvl="3" algn="l" defTabSz="457200">
+              <a:lnSpc>
+                <a:spcPct val="100000"/>
+              </a:lnSpc>
+              <a:spcBef>
+                <a:spcPts val="360"/>
+              </a:spcBef>
+              <a:buClr>
+                <a:srgbClr val="000000"/>
+              </a:buClr>
+              <a:buFont typeface="Arial"/>
+              <a:buChar char="–"/>
+              <a:defRPr lang="en-US" sz="1800" b="0" u="none" strike="noStrike">
+                <a:solidFill>
+                  <a:schemeClr val="dk1"/>
+                </a:solidFill>
+                <a:effectLst/>
+                <a:uFillTx/>
+                <a:latin typeface="Calibri"/>
+              </a:defRPr>
+            </a:lvl4pPr>
+            <a:lvl5pPr lvl="4" algn="l" defTabSz="457200">
+              <a:lnSpc>
+                <a:spcPct val="100000"/>
+              </a:lnSpc>
+              <a:spcBef>
+                <a:spcPts val="360"/>
+              </a:spcBef>
+              <a:buClr>
+                <a:srgbClr val="000000"/>
+              </a:buClr>
+              <a:buFont typeface="Arial"/>
               <a:buChar char="»"/>
-              <a:defRPr lang="en-US" sz="2000" b="0" u="none" strike="noStrike">
+              <a:defRPr lang="en-US" sz="1800" b="0" u="none" strike="noStrike">
                 <a:solidFill>
                   <a:schemeClr val="dk1"/>
                 </a:solidFill>
@@ -4615,40 +4555,6 @@
           </a:lstStyle>
           <a:p>
             <a:pPr marL="343080" indent="-343080" algn="l" defTabSz="457200">
-              <a:lnSpc>
-                <a:spcPct val="100000"/>
-              </a:lnSpc>
-              <a:spcBef>
-                <a:spcPts val="641"/>
-              </a:spcBef>
-              <a:buClr>
-                <a:srgbClr val="000000"/>
-              </a:buClr>
-              <a:buFont typeface="Arial"/>
-              <a:buChar char="•"/>
-            </a:pPr>
-            <a:r>
-              <a:rPr lang="en-US" sz="3200" b="0" u="none" strike="noStrike">
-                <a:solidFill>
-                  <a:schemeClr val="dk1"/>
-                </a:solidFill>
-                <a:effectLst/>
-                <a:uFillTx/>
-                <a:latin typeface="Calibri"/>
-              </a:rPr>
-              <a:t>Click to edit Master text styles</a:t>
-            </a:r>
-            <a:endParaRPr lang="en-US" sz="3200" b="0" u="none" strike="noStrike">
-              <a:solidFill>
-                <a:schemeClr val="dk1"/>
-              </a:solidFill>
-              <a:effectLst/>
-              <a:uFillTx/>
-              <a:latin typeface="Calibri"/>
-            </a:endParaRPr>
-          </a:p>
-          <a:p>
-            <a:pPr marL="743040" lvl="1" indent="-285840" algn="l" defTabSz="457200">
               <a:lnSpc>
                 <a:spcPct val="100000"/>
               </a:lnSpc>
@@ -4659,7 +4565,7 @@
                 <a:srgbClr val="000000"/>
               </a:buClr>
               <a:buFont typeface="Arial"/>
-              <a:buChar char="–"/>
+              <a:buChar char="•"/>
             </a:pPr>
             <a:r>
               <a:rPr lang="en-US" sz="2800" b="0" u="none" strike="noStrike">
@@ -4670,7 +4576,7 @@
                 <a:uFillTx/>
                 <a:latin typeface="Calibri"/>
               </a:rPr>
-              <a:t>Second level</a:t>
+              <a:t>Click to edit Master text styles</a:t>
             </a:r>
             <a:endParaRPr lang="en-US" sz="2800" b="0" u="none" strike="noStrike">
               <a:solidFill>
@@ -4682,7 +4588,7 @@
             </a:endParaRPr>
           </a:p>
           <a:p>
-            <a:pPr marL="1143000" lvl="2" indent="-228600" algn="l" defTabSz="457200">
+            <a:pPr marL="743040" lvl="1" indent="-285840" algn="l" defTabSz="457200">
               <a:lnSpc>
                 <a:spcPct val="100000"/>
               </a:lnSpc>
@@ -4693,7 +4599,7 @@
                 <a:srgbClr val="000000"/>
               </a:buClr>
               <a:buFont typeface="Arial"/>
-              <a:buChar char="•"/>
+              <a:buChar char="–"/>
             </a:pPr>
             <a:r>
               <a:rPr lang="en-US" sz="2400" b="0" u="none" strike="noStrike">
@@ -4704,7 +4610,7 @@
                 <a:uFillTx/>
                 <a:latin typeface="Calibri"/>
               </a:rPr>
-              <a:t>Third level</a:t>
+              <a:t>Second level</a:t>
             </a:r>
             <a:endParaRPr lang="en-US" sz="2400" b="0" u="none" strike="noStrike">
               <a:solidFill>
@@ -4716,7 +4622,7 @@
             </a:endParaRPr>
           </a:p>
           <a:p>
-            <a:pPr marL="1600200" lvl="3" indent="-228600" algn="l" defTabSz="457200">
+            <a:pPr marL="1143000" lvl="2" indent="-228600" algn="l" defTabSz="457200">
               <a:lnSpc>
                 <a:spcPct val="100000"/>
               </a:lnSpc>
@@ -4727,10 +4633,44 @@
                 <a:srgbClr val="000000"/>
               </a:buClr>
               <a:buFont typeface="Arial"/>
+              <a:buChar char="•"/>
+            </a:pPr>
+            <a:r>
+              <a:rPr lang="en-US" sz="2000" b="0" u="none" strike="noStrike">
+                <a:solidFill>
+                  <a:schemeClr val="dk1"/>
+                </a:solidFill>
+                <a:effectLst/>
+                <a:uFillTx/>
+                <a:latin typeface="Calibri"/>
+              </a:rPr>
+              <a:t>Third level</a:t>
+            </a:r>
+            <a:endParaRPr lang="en-US" sz="2000" b="0" u="none" strike="noStrike">
+              <a:solidFill>
+                <a:schemeClr val="dk1"/>
+              </a:solidFill>
+              <a:effectLst/>
+              <a:uFillTx/>
+              <a:latin typeface="Calibri"/>
+            </a:endParaRPr>
+          </a:p>
+          <a:p>
+            <a:pPr marL="1600200" lvl="3" indent="-228600" algn="l" defTabSz="457200">
+              <a:lnSpc>
+                <a:spcPct val="100000"/>
+              </a:lnSpc>
+              <a:spcBef>
+                <a:spcPts val="360"/>
+              </a:spcBef>
+              <a:buClr>
+                <a:srgbClr val="000000"/>
+              </a:buClr>
+              <a:buFont typeface="Arial"/>
               <a:buChar char="–"/>
             </a:pPr>
             <a:r>
-              <a:rPr lang="en-US" sz="2000" b="0" u="none" strike="noStrike">
+              <a:rPr lang="en-US" sz="1800" b="0" u="none" strike="noStrike">
                 <a:solidFill>
                   <a:schemeClr val="dk1"/>
                 </a:solidFill>
@@ -4740,7 +4680,7 @@
               </a:rPr>
               <a:t>Fourth level</a:t>
             </a:r>
-            <a:endParaRPr lang="en-US" sz="2000" b="0" u="none" strike="noStrike">
+            <a:endParaRPr lang="en-US" sz="1800" b="0" u="none" strike="noStrike">
               <a:solidFill>
                 <a:schemeClr val="dk1"/>
               </a:solidFill>
@@ -4755,7 +4695,7 @@
                 <a:spcPct val="100000"/>
               </a:lnSpc>
               <a:spcBef>
-                <a:spcPts val="400"/>
+                <a:spcPts val="360"/>
               </a:spcBef>
               <a:buClr>
                 <a:srgbClr val="000000"/>
@@ -4764,7 +4704,7 @@
               <a:buChar char="»"/>
             </a:pPr>
             <a:r>
-              <a:rPr lang="en-US" sz="2000" b="0" u="none" strike="noStrike">
+              <a:rPr lang="en-US" sz="1800" b="0" u="none" strike="noStrike">
                 <a:solidFill>
                   <a:schemeClr val="dk1"/>
                 </a:solidFill>
@@ -4774,7 +4714,7 @@
               </a:rPr>
               <a:t>Fifth level</a:t>
             </a:r>
-            <a:endParaRPr lang="en-US" sz="2000" b="0" u="none" strike="noStrike">
+            <a:endParaRPr lang="en-US" sz="1800" b="0" u="none" strike="noStrike">
               <a:solidFill>
                 <a:schemeClr val="dk1"/>
               </a:solidFill>
@@ -4787,7 +4727,7 @@
       </p:sp>
       <p:sp>
         <p:nvSpPr>
-          <p:cNvPr id="27" name="PlaceHolder 3"/>
+          <p:cNvPr id="29" name="PlaceHolder 4"/>
           <p:cNvSpPr>
             <a:spLocks noGrp="1"/>
           </p:cNvSpPr>
@@ -4798,7 +4738,7 @@
         <p:spPr>
           <a:xfrm>
             <a:off x="457200" y="6356520"/>
-            <a:ext cx="2131560" cy="362880"/>
+            <a:ext cx="2129400" cy="360720"/>
           </a:xfrm>
           <a:prstGeom prst="rect">
             <a:avLst/>
@@ -4854,7 +4794,7 @@
                 <a:uFillTx/>
                 <a:latin typeface="Calibri"/>
               </a:rPr>
-              <a:t> </a:t>
+              <a:t>&lt;date/time&gt;</a:t>
             </a:r>
             <a:endParaRPr lang="en-US" sz="1200" b="0" u="none" strike="noStrike">
               <a:solidFill>
@@ -4869,7 +4809,7 @@
       </p:sp>
       <p:sp>
         <p:nvSpPr>
-          <p:cNvPr id="28" name="PlaceHolder 4"/>
+          <p:cNvPr id="30" name="PlaceHolder 5"/>
           <p:cNvSpPr>
             <a:spLocks noGrp="1"/>
           </p:cNvSpPr>
@@ -4880,7 +4820,7 @@
         <p:spPr>
           <a:xfrm>
             <a:off x="3124080" y="6356520"/>
-            <a:ext cx="2893320" cy="362880"/>
+            <a:ext cx="2891160" cy="360720"/>
           </a:xfrm>
           <a:prstGeom prst="rect">
             <a:avLst/>
@@ -4932,7 +4872,7 @@
                 <a:uFillTx/>
                 <a:latin typeface="Times New Roman"/>
               </a:rPr>
-              <a:t> </a:t>
+              <a:t>&lt;footer&gt;</a:t>
             </a:r>
             <a:endParaRPr lang="en-US" sz="1400" b="0" u="none" strike="noStrike">
               <a:solidFill>
@@ -4947,7 +4887,7 @@
       </p:sp>
       <p:sp>
         <p:nvSpPr>
-          <p:cNvPr id="29" name="PlaceHolder 5"/>
+          <p:cNvPr id="31" name="PlaceHolder 6"/>
           <p:cNvSpPr>
             <a:spLocks noGrp="1"/>
           </p:cNvSpPr>
@@ -4958,7 +4898,7 @@
         <p:spPr>
           <a:xfrm>
             <a:off x="6553080" y="6356520"/>
-            <a:ext cx="2131560" cy="362880"/>
+            <a:ext cx="2129400" cy="360720"/>
           </a:xfrm>
           <a:prstGeom prst="rect">
             <a:avLst/>
@@ -5003,7 +4943,7 @@
                 <a:tab pos="0" algn="l"/>
               </a:tabLst>
             </a:pPr>
-            <a:fld id="{E09D0E80-2496-4E21-905A-CC91F2481B68}" type="slidenum">
+            <a:fld id="{A44D3F66-BCE2-446C-8B99-18ADA7F86AA4}" type="slidenum">
               <a:rPr lang="en-US" sz="1200" b="0" u="none" strike="noStrike">
                 <a:solidFill>
                   <a:schemeClr val="dk1">
@@ -5014,7 +4954,7 @@
                 <a:uFillTx/>
                 <a:latin typeface="Calibri"/>
               </a:rPr>
-              <a:t>1</a:t>
+              <a:t>&lt;number&gt;</a:t>
             </a:fld>
             <a:endParaRPr lang="en-US" sz="1200" b="0" u="none" strike="noStrike">
               <a:solidFill>
@@ -5036,8 +4976,8 @@
 </file>
 
 <file path=ppt/slideLayouts/slideLayout7.xml><?xml version="1.0" encoding="utf-8"?>
-<p:sldLayout xmlns:a="http://schemas.openxmlformats.org/drawingml/2006/main" xmlns:p="http://schemas.openxmlformats.org/presentationml/2006/main" xmlns:r="http://schemas.openxmlformats.org/officeDocument/2006/relationships" xmlns:p14="http://schemas.microsoft.com/office/powerpoint/2010/main" xmlns:p15="http://schemas.microsoft.com/office/powerpoint/2012/main" xmlns:mc="http://schemas.openxmlformats.org/markup-compatibility/2006" type="vertTitleAndTx" preserve="1">
-  <p:cSld name="Vertical Title and Text">
+<p:sldLayout xmlns:a="http://schemas.openxmlformats.org/drawingml/2006/main" xmlns:p="http://schemas.openxmlformats.org/presentationml/2006/main" xmlns:r="http://schemas.openxmlformats.org/officeDocument/2006/relationships" xmlns:p14="http://schemas.microsoft.com/office/powerpoint/2010/main" xmlns:p15="http://schemas.microsoft.com/office/powerpoint/2012/main" xmlns:mc="http://schemas.openxmlformats.org/markup-compatibility/2006" type="blank" preserve="1">
+  <p:cSld name="Comparison">
     <p:bg>
       <p:bgPr>
         <a:solidFill>
@@ -5061,7 +5001,7 @@
       </p:grpSpPr>
       <p:sp>
         <p:nvSpPr>
-          <p:cNvPr id="30" name="PlaceHolder 1"/>
+          <p:cNvPr id="32" name="PlaceHolder 1"/>
           <p:cNvSpPr>
             <a:spLocks noGrp="1"/>
           </p:cNvSpPr>
@@ -5071,8 +5011,8 @@
         </p:nvSpPr>
         <p:spPr>
           <a:xfrm>
-            <a:off x="6629400" y="274680"/>
-            <a:ext cx="2055240" cy="5849280"/>
+            <a:off x="457200" y="274680"/>
+            <a:ext cx="8225280" cy="1138680"/>
           </a:xfrm>
           <a:prstGeom prst="rect">
             <a:avLst/>
@@ -5083,7 +5023,7 @@
           </a:ln>
         </p:spPr>
         <p:txBody>
-          <a:bodyPr lIns="91440" tIns="45720" rIns="91440" bIns="45720" anchor="ctr" vert="eaVert">
+          <a:bodyPr lIns="91440" tIns="45720" rIns="91440" bIns="45720" anchor="ctr">
             <a:noAutofit/>
           </a:bodyPr>
           <a:lstStyle>
@@ -5139,7 +5079,7 @@
       </p:sp>
       <p:sp>
         <p:nvSpPr>
-          <p:cNvPr id="31" name="PlaceHolder 2"/>
+          <p:cNvPr id="33" name="PlaceHolder 2"/>
           <p:cNvSpPr>
             <a:spLocks noGrp="1"/>
           </p:cNvSpPr>
@@ -5149,8 +5089,8 @@
         </p:nvSpPr>
         <p:spPr>
           <a:xfrm>
-            <a:off x="457200" y="274680"/>
-            <a:ext cx="6017760" cy="5849280"/>
+            <a:off x="457200" y="1535040"/>
+            <a:ext cx="4035960" cy="635400"/>
           </a:xfrm>
           <a:prstGeom prst="rect">
             <a:avLst/>
@@ -5161,7 +5101,91 @@
           </a:ln>
         </p:spPr>
         <p:txBody>
-          <a:bodyPr lIns="91440" tIns="45720" rIns="91440" bIns="45720" anchor="t" vert="eaVert">
+          <a:bodyPr lIns="91440" tIns="45720" rIns="91440" bIns="45720" anchor="b">
+            <a:noAutofit/>
+          </a:bodyPr>
+          <a:lstStyle>
+            <a:lvl1pPr indent="0" algn="l" defTabSz="457200">
+              <a:lnSpc>
+                <a:spcPct val="100000"/>
+              </a:lnSpc>
+              <a:spcBef>
+                <a:spcPts val="479"/>
+              </a:spcBef>
+              <a:buNone/>
+              <a:tabLst>
+                <a:tab pos="0" algn="l"/>
+              </a:tabLst>
+              <a:defRPr lang="en-US" sz="2400" b="1" u="none" strike="noStrike">
+                <a:solidFill>
+                  <a:schemeClr val="dk1"/>
+                </a:solidFill>
+                <a:effectLst/>
+                <a:uFillTx/>
+                <a:latin typeface="Calibri"/>
+              </a:defRPr>
+            </a:lvl1pPr>
+          </a:lstStyle>
+          <a:p>
+            <a:pPr indent="0" algn="l" defTabSz="457200">
+              <a:lnSpc>
+                <a:spcPct val="100000"/>
+              </a:lnSpc>
+              <a:spcBef>
+                <a:spcPts val="479"/>
+              </a:spcBef>
+              <a:buNone/>
+              <a:tabLst>
+                <a:tab pos="0" algn="l"/>
+              </a:tabLst>
+            </a:pPr>
+            <a:r>
+              <a:rPr lang="en-US" sz="2400" b="1" u="none" strike="noStrike">
+                <a:solidFill>
+                  <a:schemeClr val="dk1"/>
+                </a:solidFill>
+                <a:effectLst/>
+                <a:uFillTx/>
+                <a:latin typeface="Calibri"/>
+              </a:rPr>
+              <a:t>Click to edit Master text styles</a:t>
+            </a:r>
+            <a:endParaRPr lang="en-US" sz="2400" b="0" u="none" strike="noStrike">
+              <a:solidFill>
+                <a:schemeClr val="dk1"/>
+              </a:solidFill>
+              <a:effectLst/>
+              <a:uFillTx/>
+              <a:latin typeface="Calibri"/>
+            </a:endParaRPr>
+          </a:p>
+        </p:txBody>
+      </p:sp>
+      <p:sp>
+        <p:nvSpPr>
+          <p:cNvPr id="34" name="PlaceHolder 3"/>
+          <p:cNvSpPr>
+            <a:spLocks noGrp="1"/>
+          </p:cNvSpPr>
+          <p:nvPr>
+            <p:ph type="body"/>
+          </p:nvPr>
+        </p:nvSpPr>
+        <p:spPr>
+          <a:xfrm>
+            <a:off x="457200" y="2174760"/>
+            <a:ext cx="4035960" cy="3947040"/>
+          </a:xfrm>
+          <a:prstGeom prst="rect">
+            <a:avLst/>
+          </a:prstGeom>
+          <a:noFill/>
+          <a:ln w="0">
+            <a:noFill/>
+          </a:ln>
+        </p:spPr>
+        <p:txBody>
+          <a:bodyPr lIns="91440" tIns="45720" rIns="91440" bIns="45720" anchor="t">
             <a:noAutofit/>
           </a:bodyPr>
           <a:lstStyle>
@@ -5170,14 +5194,17 @@
                 <a:spcPct val="100000"/>
               </a:lnSpc>
               <a:spcBef>
-                <a:spcPts val="641"/>
+                <a:spcPts val="479"/>
               </a:spcBef>
               <a:buClr>
                 <a:srgbClr val="000000"/>
               </a:buClr>
               <a:buFont typeface="Arial"/>
               <a:buChar char="•"/>
-              <a:defRPr lang="en-US" sz="3200" b="0" u="none" strike="noStrike">
+              <a:tabLst>
+                <a:tab pos="0" algn="l"/>
+              </a:tabLst>
+              <a:defRPr lang="en-US" sz="2400" b="0" u="none" strike="noStrike">
                 <a:solidFill>
                   <a:schemeClr val="dk1"/>
                 </a:solidFill>
@@ -5191,14 +5218,17 @@
                 <a:spcPct val="100000"/>
               </a:lnSpc>
               <a:spcBef>
-                <a:spcPts val="561"/>
+                <a:spcPts val="400"/>
               </a:spcBef>
               <a:buClr>
                 <a:srgbClr val="000000"/>
               </a:buClr>
               <a:buFont typeface="Arial"/>
               <a:buChar char="–"/>
-              <a:defRPr lang="en-US" sz="2800" b="0" u="none" strike="noStrike">
+              <a:tabLst>
+                <a:tab pos="0" algn="l"/>
+              </a:tabLst>
+              <a:defRPr lang="en-US" sz="2000" b="0" u="none" strike="noStrike">
                 <a:solidFill>
                   <a:schemeClr val="dk1"/>
                 </a:solidFill>
@@ -5208,6 +5238,80 @@
               </a:defRPr>
             </a:lvl2pPr>
             <a:lvl3pPr lvl="2" algn="l" defTabSz="457200">
+              <a:lnSpc>
+                <a:spcPct val="100000"/>
+              </a:lnSpc>
+              <a:spcBef>
+                <a:spcPts val="360"/>
+              </a:spcBef>
+              <a:buClr>
+                <a:srgbClr val="000000"/>
+              </a:buClr>
+              <a:buFont typeface="Arial"/>
+              <a:buChar char="•"/>
+              <a:tabLst>
+                <a:tab pos="0" algn="l"/>
+              </a:tabLst>
+              <a:defRPr lang="en-US" sz="1800" b="0" u="none" strike="noStrike">
+                <a:solidFill>
+                  <a:schemeClr val="dk1"/>
+                </a:solidFill>
+                <a:effectLst/>
+                <a:uFillTx/>
+                <a:latin typeface="Calibri"/>
+              </a:defRPr>
+            </a:lvl3pPr>
+            <a:lvl4pPr lvl="3" algn="l" defTabSz="457200">
+              <a:lnSpc>
+                <a:spcPct val="100000"/>
+              </a:lnSpc>
+              <a:spcBef>
+                <a:spcPts val="320"/>
+              </a:spcBef>
+              <a:buClr>
+                <a:srgbClr val="000000"/>
+              </a:buClr>
+              <a:buFont typeface="Arial"/>
+              <a:buChar char="–"/>
+              <a:tabLst>
+                <a:tab pos="0" algn="l"/>
+              </a:tabLst>
+              <a:defRPr lang="en-US" sz="1600" b="0" u="none" strike="noStrike">
+                <a:solidFill>
+                  <a:schemeClr val="dk1"/>
+                </a:solidFill>
+                <a:effectLst/>
+                <a:uFillTx/>
+                <a:latin typeface="Calibri"/>
+              </a:defRPr>
+            </a:lvl4pPr>
+            <a:lvl5pPr lvl="4" algn="l" defTabSz="457200">
+              <a:lnSpc>
+                <a:spcPct val="100000"/>
+              </a:lnSpc>
+              <a:spcBef>
+                <a:spcPts val="320"/>
+              </a:spcBef>
+              <a:buClr>
+                <a:srgbClr val="000000"/>
+              </a:buClr>
+              <a:buFont typeface="Arial"/>
+              <a:buChar char="»"/>
+              <a:tabLst>
+                <a:tab pos="0" algn="l"/>
+              </a:tabLst>
+              <a:defRPr lang="en-US" sz="1600" b="0" u="none" strike="noStrike">
+                <a:solidFill>
+                  <a:schemeClr val="dk1"/>
+                </a:solidFill>
+                <a:effectLst/>
+                <a:uFillTx/>
+                <a:latin typeface="Calibri"/>
+              </a:defRPr>
+            </a:lvl5pPr>
+          </a:lstStyle>
+          <a:p>
+            <a:pPr marL="343080" indent="-343080" algn="l" defTabSz="457200">
               <a:lnSpc>
                 <a:spcPct val="100000"/>
               </a:lnSpc>
@@ -5219,16 +5323,32 @@
               </a:buClr>
               <a:buFont typeface="Arial"/>
               <a:buChar char="•"/>
-              <a:defRPr lang="en-US" sz="2400" b="0" u="none" strike="noStrike">
-                <a:solidFill>
-                  <a:schemeClr val="dk1"/>
-                </a:solidFill>
-                <a:effectLst/>
-                <a:uFillTx/>
-                <a:latin typeface="Calibri"/>
-              </a:defRPr>
-            </a:lvl3pPr>
-            <a:lvl4pPr lvl="3" algn="l" defTabSz="457200">
+              <a:tabLst>
+                <a:tab pos="0" algn="l"/>
+              </a:tabLst>
+            </a:pPr>
+            <a:r>
+              <a:rPr lang="en-US" sz="2400" b="0" u="none" strike="noStrike">
+                <a:solidFill>
+                  <a:schemeClr val="dk1"/>
+                </a:solidFill>
+                <a:effectLst/>
+                <a:uFillTx/>
+                <a:latin typeface="Calibri"/>
+              </a:rPr>
+              <a:t>Click to edit Master text styles</a:t>
+            </a:r>
+            <a:endParaRPr lang="en-US" sz="2400" b="0" u="none" strike="noStrike">
+              <a:solidFill>
+                <a:schemeClr val="dk1"/>
+              </a:solidFill>
+              <a:effectLst/>
+              <a:uFillTx/>
+              <a:latin typeface="Calibri"/>
+            </a:endParaRPr>
+          </a:p>
+          <a:p>
+            <a:pPr marL="743040" lvl="1" indent="-285840" algn="l" defTabSz="457200">
               <a:lnSpc>
                 <a:spcPct val="100000"/>
               </a:lnSpc>
@@ -5240,7 +5360,183 @@
               </a:buClr>
               <a:buFont typeface="Arial"/>
               <a:buChar char="–"/>
-              <a:defRPr lang="en-US" sz="2000" b="0" u="none" strike="noStrike">
+              <a:tabLst>
+                <a:tab pos="0" algn="l"/>
+              </a:tabLst>
+            </a:pPr>
+            <a:r>
+              <a:rPr lang="en-US" sz="2000" b="0" u="none" strike="noStrike">
+                <a:solidFill>
+                  <a:schemeClr val="dk1"/>
+                </a:solidFill>
+                <a:effectLst/>
+                <a:uFillTx/>
+                <a:latin typeface="Calibri"/>
+              </a:rPr>
+              <a:t>Second level</a:t>
+            </a:r>
+            <a:endParaRPr lang="en-US" sz="2000" b="0" u="none" strike="noStrike">
+              <a:solidFill>
+                <a:schemeClr val="dk1"/>
+              </a:solidFill>
+              <a:effectLst/>
+              <a:uFillTx/>
+              <a:latin typeface="Calibri"/>
+            </a:endParaRPr>
+          </a:p>
+          <a:p>
+            <a:pPr marL="1143000" lvl="2" indent="-228600" algn="l" defTabSz="457200">
+              <a:lnSpc>
+                <a:spcPct val="100000"/>
+              </a:lnSpc>
+              <a:spcBef>
+                <a:spcPts val="360"/>
+              </a:spcBef>
+              <a:buClr>
+                <a:srgbClr val="000000"/>
+              </a:buClr>
+              <a:buFont typeface="Arial"/>
+              <a:buChar char="•"/>
+              <a:tabLst>
+                <a:tab pos="0" algn="l"/>
+              </a:tabLst>
+            </a:pPr>
+            <a:r>
+              <a:rPr lang="en-US" sz="1800" b="0" u="none" strike="noStrike">
+                <a:solidFill>
+                  <a:schemeClr val="dk1"/>
+                </a:solidFill>
+                <a:effectLst/>
+                <a:uFillTx/>
+                <a:latin typeface="Calibri"/>
+              </a:rPr>
+              <a:t>Third level</a:t>
+            </a:r>
+            <a:endParaRPr lang="en-US" sz="1800" b="0" u="none" strike="noStrike">
+              <a:solidFill>
+                <a:schemeClr val="dk1"/>
+              </a:solidFill>
+              <a:effectLst/>
+              <a:uFillTx/>
+              <a:latin typeface="Calibri"/>
+            </a:endParaRPr>
+          </a:p>
+          <a:p>
+            <a:pPr marL="1600200" lvl="3" indent="-228600" algn="l" defTabSz="457200">
+              <a:lnSpc>
+                <a:spcPct val="100000"/>
+              </a:lnSpc>
+              <a:spcBef>
+                <a:spcPts val="320"/>
+              </a:spcBef>
+              <a:buClr>
+                <a:srgbClr val="000000"/>
+              </a:buClr>
+              <a:buFont typeface="Arial"/>
+              <a:buChar char="–"/>
+              <a:tabLst>
+                <a:tab pos="0" algn="l"/>
+              </a:tabLst>
+            </a:pPr>
+            <a:r>
+              <a:rPr lang="en-US" sz="1600" b="0" u="none" strike="noStrike">
+                <a:solidFill>
+                  <a:schemeClr val="dk1"/>
+                </a:solidFill>
+                <a:effectLst/>
+                <a:uFillTx/>
+                <a:latin typeface="Calibri"/>
+              </a:rPr>
+              <a:t>Fourth level</a:t>
+            </a:r>
+            <a:endParaRPr lang="en-US" sz="1600" b="0" u="none" strike="noStrike">
+              <a:solidFill>
+                <a:schemeClr val="dk1"/>
+              </a:solidFill>
+              <a:effectLst/>
+              <a:uFillTx/>
+              <a:latin typeface="Calibri"/>
+            </a:endParaRPr>
+          </a:p>
+          <a:p>
+            <a:pPr marL="2057400" lvl="4" indent="-228600" algn="l" defTabSz="457200">
+              <a:lnSpc>
+                <a:spcPct val="100000"/>
+              </a:lnSpc>
+              <a:spcBef>
+                <a:spcPts val="320"/>
+              </a:spcBef>
+              <a:buClr>
+                <a:srgbClr val="000000"/>
+              </a:buClr>
+              <a:buFont typeface="Arial"/>
+              <a:buChar char="»"/>
+              <a:tabLst>
+                <a:tab pos="0" algn="l"/>
+              </a:tabLst>
+            </a:pPr>
+            <a:r>
+              <a:rPr lang="en-US" sz="1600" b="0" u="none" strike="noStrike">
+                <a:solidFill>
+                  <a:schemeClr val="dk1"/>
+                </a:solidFill>
+                <a:effectLst/>
+                <a:uFillTx/>
+                <a:latin typeface="Calibri"/>
+              </a:rPr>
+              <a:t>Fifth level</a:t>
+            </a:r>
+            <a:endParaRPr lang="en-US" sz="1600" b="0" u="none" strike="noStrike">
+              <a:solidFill>
+                <a:schemeClr val="dk1"/>
+              </a:solidFill>
+              <a:effectLst/>
+              <a:uFillTx/>
+              <a:latin typeface="Calibri"/>
+            </a:endParaRPr>
+          </a:p>
+        </p:txBody>
+      </p:sp>
+      <p:sp>
+        <p:nvSpPr>
+          <p:cNvPr id="35" name="PlaceHolder 4"/>
+          <p:cNvSpPr>
+            <a:spLocks noGrp="1"/>
+          </p:cNvSpPr>
+          <p:nvPr>
+            <p:ph type="body"/>
+          </p:nvPr>
+        </p:nvSpPr>
+        <p:spPr>
+          <a:xfrm>
+            <a:off x="4645080" y="1535040"/>
+            <a:ext cx="4037400" cy="635400"/>
+          </a:xfrm>
+          <a:prstGeom prst="rect">
+            <a:avLst/>
+          </a:prstGeom>
+          <a:noFill/>
+          <a:ln w="0">
+            <a:noFill/>
+          </a:ln>
+        </p:spPr>
+        <p:txBody>
+          <a:bodyPr lIns="91440" tIns="45720" rIns="91440" bIns="45720" anchor="b">
+            <a:noAutofit/>
+          </a:bodyPr>
+          <a:lstStyle>
+            <a:lvl1pPr indent="0" algn="l" defTabSz="457200">
+              <a:lnSpc>
+                <a:spcPct val="100000"/>
+              </a:lnSpc>
+              <a:spcBef>
+                <a:spcPts val="479"/>
+              </a:spcBef>
+              <a:buNone/>
+              <a:tabLst>
+                <a:tab pos="0" algn="l"/>
+              </a:tabLst>
+              <a:defRPr lang="en-US" sz="2400" b="1" u="none" strike="noStrike">
                 <a:solidFill>
                   <a:schemeClr val="dk1"/>
                 </a:solidFill>
@@ -5248,8 +5544,96 @@
                 <a:uFillTx/>
                 <a:latin typeface="Calibri"/>
               </a:defRPr>
-            </a:lvl4pPr>
-            <a:lvl5pPr lvl="4" algn="l" defTabSz="457200">
+            </a:lvl1pPr>
+          </a:lstStyle>
+          <a:p>
+            <a:pPr indent="0" algn="l" defTabSz="457200">
+              <a:lnSpc>
+                <a:spcPct val="100000"/>
+              </a:lnSpc>
+              <a:spcBef>
+                <a:spcPts val="479"/>
+              </a:spcBef>
+              <a:buNone/>
+              <a:tabLst>
+                <a:tab pos="0" algn="l"/>
+              </a:tabLst>
+            </a:pPr>
+            <a:r>
+              <a:rPr lang="en-US" sz="2400" b="1" u="none" strike="noStrike">
+                <a:solidFill>
+                  <a:schemeClr val="dk1"/>
+                </a:solidFill>
+                <a:effectLst/>
+                <a:uFillTx/>
+                <a:latin typeface="Calibri"/>
+              </a:rPr>
+              <a:t>Click to edit Master text styles</a:t>
+            </a:r>
+            <a:endParaRPr lang="en-US" sz="2400" b="0" u="none" strike="noStrike">
+              <a:solidFill>
+                <a:schemeClr val="dk1"/>
+              </a:solidFill>
+              <a:effectLst/>
+              <a:uFillTx/>
+              <a:latin typeface="Calibri"/>
+            </a:endParaRPr>
+          </a:p>
+        </p:txBody>
+      </p:sp>
+      <p:sp>
+        <p:nvSpPr>
+          <p:cNvPr id="36" name="PlaceHolder 5"/>
+          <p:cNvSpPr>
+            <a:spLocks noGrp="1"/>
+          </p:cNvSpPr>
+          <p:nvPr>
+            <p:ph type="body"/>
+          </p:nvPr>
+        </p:nvSpPr>
+        <p:spPr>
+          <a:xfrm>
+            <a:off x="4645080" y="2174760"/>
+            <a:ext cx="4037400" cy="3947040"/>
+          </a:xfrm>
+          <a:prstGeom prst="rect">
+            <a:avLst/>
+          </a:prstGeom>
+          <a:noFill/>
+          <a:ln w="0">
+            <a:noFill/>
+          </a:ln>
+        </p:spPr>
+        <p:txBody>
+          <a:bodyPr lIns="91440" tIns="45720" rIns="91440" bIns="45720" anchor="t">
+            <a:noAutofit/>
+          </a:bodyPr>
+          <a:lstStyle>
+            <a:lvl1pPr algn="l" defTabSz="457200">
+              <a:lnSpc>
+                <a:spcPct val="100000"/>
+              </a:lnSpc>
+              <a:spcBef>
+                <a:spcPts val="479"/>
+              </a:spcBef>
+              <a:buClr>
+                <a:srgbClr val="000000"/>
+              </a:buClr>
+              <a:buFont typeface="Arial"/>
+              <a:buChar char="•"/>
+              <a:tabLst>
+                <a:tab pos="0" algn="l"/>
+              </a:tabLst>
+              <a:defRPr lang="en-US" sz="2400" b="0" u="none" strike="noStrike">
+                <a:solidFill>
+                  <a:schemeClr val="dk1"/>
+                </a:solidFill>
+                <a:effectLst/>
+                <a:uFillTx/>
+                <a:latin typeface="Calibri"/>
+              </a:defRPr>
+            </a:lvl1pPr>
+            <a:lvl2pPr lvl="1" algn="l" defTabSz="457200">
               <a:lnSpc>
                 <a:spcPct val="100000"/>
               </a:lnSpc>
@@ -5260,8 +5644,83 @@
                 <a:srgbClr val="000000"/>
               </a:buClr>
               <a:buFont typeface="Arial"/>
+              <a:buChar char="–"/>
+              <a:tabLst>
+                <a:tab pos="0" algn="l"/>
+              </a:tabLst>
+              <a:defRPr lang="en-US" sz="2000" b="0" u="none" strike="noStrike">
+                <a:solidFill>
+                  <a:schemeClr val="dk1"/>
+                </a:solidFill>
+                <a:effectLst/>
+                <a:uFillTx/>
+                <a:latin typeface="Calibri"/>
+              </a:defRPr>
+            </a:lvl2pPr>
+            <a:lvl3pPr lvl="2" algn="l" defTabSz="457200">
+              <a:lnSpc>
+                <a:spcPct val="100000"/>
+              </a:lnSpc>
+              <a:spcBef>
+                <a:spcPts val="360"/>
+              </a:spcBef>
+              <a:buClr>
+                <a:srgbClr val="000000"/>
+              </a:buClr>
+              <a:buFont typeface="Arial"/>
+              <a:buChar char="•"/>
+              <a:tabLst>
+                <a:tab pos="0" algn="l"/>
+              </a:tabLst>
+              <a:defRPr lang="en-US" sz="1800" b="0" u="none" strike="noStrike">
+                <a:solidFill>
+                  <a:schemeClr val="dk1"/>
+                </a:solidFill>
+                <a:effectLst/>
+                <a:uFillTx/>
+                <a:latin typeface="Calibri"/>
+              </a:defRPr>
+            </a:lvl3pPr>
+            <a:lvl4pPr lvl="3" algn="l" defTabSz="457200">
+              <a:lnSpc>
+                <a:spcPct val="100000"/>
+              </a:lnSpc>
+              <a:spcBef>
+                <a:spcPts val="320"/>
+              </a:spcBef>
+              <a:buClr>
+                <a:srgbClr val="000000"/>
+              </a:buClr>
+              <a:buFont typeface="Arial"/>
+              <a:buChar char="–"/>
+              <a:tabLst>
+                <a:tab pos="0" algn="l"/>
+              </a:tabLst>
+              <a:defRPr lang="en-US" sz="1600" b="0" u="none" strike="noStrike">
+                <a:solidFill>
+                  <a:schemeClr val="dk1"/>
+                </a:solidFill>
+                <a:effectLst/>
+                <a:uFillTx/>
+                <a:latin typeface="Calibri"/>
+              </a:defRPr>
+            </a:lvl4pPr>
+            <a:lvl5pPr lvl="4" algn="l" defTabSz="457200">
+              <a:lnSpc>
+                <a:spcPct val="100000"/>
+              </a:lnSpc>
+              <a:spcBef>
+                <a:spcPts val="320"/>
+              </a:spcBef>
+              <a:buClr>
+                <a:srgbClr val="000000"/>
+              </a:buClr>
+              <a:buFont typeface="Arial"/>
               <a:buChar char="»"/>
-              <a:defRPr lang="en-US" sz="2000" b="0" u="none" strike="noStrike">
+              <a:tabLst>
+                <a:tab pos="0" algn="l"/>
+              </a:tabLst>
+              <a:defRPr lang="en-US" sz="1600" b="0" u="none" strike="noStrike">
                 <a:solidFill>
                   <a:schemeClr val="dk1"/>
                 </a:solidFill>
@@ -5273,74 +5732,6 @@
           </a:lstStyle>
           <a:p>
             <a:pPr marL="343080" indent="-343080" algn="l" defTabSz="457200">
-              <a:lnSpc>
-                <a:spcPct val="100000"/>
-              </a:lnSpc>
-              <a:spcBef>
-                <a:spcPts val="641"/>
-              </a:spcBef>
-              <a:buClr>
-                <a:srgbClr val="000000"/>
-              </a:buClr>
-              <a:buFont typeface="Arial"/>
-              <a:buChar char="•"/>
-            </a:pPr>
-            <a:r>
-              <a:rPr lang="en-US" sz="3200" b="0" u="none" strike="noStrike">
-                <a:solidFill>
-                  <a:schemeClr val="dk1"/>
-                </a:solidFill>
-                <a:effectLst/>
-                <a:uFillTx/>
-                <a:latin typeface="Calibri"/>
-              </a:rPr>
-              <a:t>Click to edit Master text styles</a:t>
-            </a:r>
-            <a:endParaRPr lang="en-US" sz="3200" b="0" u="none" strike="noStrike">
-              <a:solidFill>
-                <a:schemeClr val="dk1"/>
-              </a:solidFill>
-              <a:effectLst/>
-              <a:uFillTx/>
-              <a:latin typeface="Calibri"/>
-            </a:endParaRPr>
-          </a:p>
-          <a:p>
-            <a:pPr marL="743040" lvl="1" indent="-285840" algn="l" defTabSz="457200">
-              <a:lnSpc>
-                <a:spcPct val="100000"/>
-              </a:lnSpc>
-              <a:spcBef>
-                <a:spcPts val="561"/>
-              </a:spcBef>
-              <a:buClr>
-                <a:srgbClr val="000000"/>
-              </a:buClr>
-              <a:buFont typeface="Arial"/>
-              <a:buChar char="–"/>
-            </a:pPr>
-            <a:r>
-              <a:rPr lang="en-US" sz="2800" b="0" u="none" strike="noStrike">
-                <a:solidFill>
-                  <a:schemeClr val="dk1"/>
-                </a:solidFill>
-                <a:effectLst/>
-                <a:uFillTx/>
-                <a:latin typeface="Calibri"/>
-              </a:rPr>
-              <a:t>Second level</a:t>
-            </a:r>
-            <a:endParaRPr lang="en-US" sz="2800" b="0" u="none" strike="noStrike">
-              <a:solidFill>
-                <a:schemeClr val="dk1"/>
-              </a:solidFill>
-              <a:effectLst/>
-              <a:uFillTx/>
-              <a:latin typeface="Calibri"/>
-            </a:endParaRPr>
-          </a:p>
-          <a:p>
-            <a:pPr marL="1143000" lvl="2" indent="-228600" algn="l" defTabSz="457200">
               <a:lnSpc>
                 <a:spcPct val="100000"/>
               </a:lnSpc>
@@ -5352,6 +5743,9 @@
               </a:buClr>
               <a:buFont typeface="Arial"/>
               <a:buChar char="•"/>
+              <a:tabLst>
+                <a:tab pos="0" algn="l"/>
+              </a:tabLst>
             </a:pPr>
             <a:r>
               <a:rPr lang="en-US" sz="2400" b="0" u="none" strike="noStrike">
@@ -5362,7 +5756,7 @@
                 <a:uFillTx/>
                 <a:latin typeface="Calibri"/>
               </a:rPr>
-              <a:t>Third level</a:t>
+              <a:t>Click to edit Master text styles</a:t>
             </a:r>
             <a:endParaRPr lang="en-US" sz="2400" b="0" u="none" strike="noStrike">
               <a:solidFill>
@@ -5374,7 +5768,7 @@
             </a:endParaRPr>
           </a:p>
           <a:p>
-            <a:pPr marL="1600200" lvl="3" indent="-228600" algn="l" defTabSz="457200">
+            <a:pPr marL="743040" lvl="1" indent="-285840" algn="l" defTabSz="457200">
               <a:lnSpc>
                 <a:spcPct val="100000"/>
               </a:lnSpc>
@@ -5386,6 +5780,9 @@
               </a:buClr>
               <a:buFont typeface="Arial"/>
               <a:buChar char="–"/>
+              <a:tabLst>
+                <a:tab pos="0" algn="l"/>
+              </a:tabLst>
             </a:pPr>
             <a:r>
               <a:rPr lang="en-US" sz="2000" b="0" u="none" strike="noStrike">
@@ -5396,9 +5793,83 @@
                 <a:uFillTx/>
                 <a:latin typeface="Calibri"/>
               </a:rPr>
+              <a:t>Second level</a:t>
+            </a:r>
+            <a:endParaRPr lang="en-US" sz="2000" b="0" u="none" strike="noStrike">
+              <a:solidFill>
+                <a:schemeClr val="dk1"/>
+              </a:solidFill>
+              <a:effectLst/>
+              <a:uFillTx/>
+              <a:latin typeface="Calibri"/>
+            </a:endParaRPr>
+          </a:p>
+          <a:p>
+            <a:pPr marL="1143000" lvl="2" indent="-228600" algn="l" defTabSz="457200">
+              <a:lnSpc>
+                <a:spcPct val="100000"/>
+              </a:lnSpc>
+              <a:spcBef>
+                <a:spcPts val="360"/>
+              </a:spcBef>
+              <a:buClr>
+                <a:srgbClr val="000000"/>
+              </a:buClr>
+              <a:buFont typeface="Arial"/>
+              <a:buChar char="•"/>
+              <a:tabLst>
+                <a:tab pos="0" algn="l"/>
+              </a:tabLst>
+            </a:pPr>
+            <a:r>
+              <a:rPr lang="en-US" sz="1800" b="0" u="none" strike="noStrike">
+                <a:solidFill>
+                  <a:schemeClr val="dk1"/>
+                </a:solidFill>
+                <a:effectLst/>
+                <a:uFillTx/>
+                <a:latin typeface="Calibri"/>
+              </a:rPr>
+              <a:t>Third level</a:t>
+            </a:r>
+            <a:endParaRPr lang="en-US" sz="1800" b="0" u="none" strike="noStrike">
+              <a:solidFill>
+                <a:schemeClr val="dk1"/>
+              </a:solidFill>
+              <a:effectLst/>
+              <a:uFillTx/>
+              <a:latin typeface="Calibri"/>
+            </a:endParaRPr>
+          </a:p>
+          <a:p>
+            <a:pPr marL="1600200" lvl="3" indent="-228600" algn="l" defTabSz="457200">
+              <a:lnSpc>
+                <a:spcPct val="100000"/>
+              </a:lnSpc>
+              <a:spcBef>
+                <a:spcPts val="320"/>
+              </a:spcBef>
+              <a:buClr>
+                <a:srgbClr val="000000"/>
+              </a:buClr>
+              <a:buFont typeface="Arial"/>
+              <a:buChar char="–"/>
+              <a:tabLst>
+                <a:tab pos="0" algn="l"/>
+              </a:tabLst>
+            </a:pPr>
+            <a:r>
+              <a:rPr lang="en-US" sz="1600" b="0" u="none" strike="noStrike">
+                <a:solidFill>
+                  <a:schemeClr val="dk1"/>
+                </a:solidFill>
+                <a:effectLst/>
+                <a:uFillTx/>
+                <a:latin typeface="Calibri"/>
+              </a:rPr>
               <a:t>Fourth level</a:t>
             </a:r>
-            <a:endParaRPr lang="en-US" sz="2000" b="0" u="none" strike="noStrike">
+            <a:endParaRPr lang="en-US" sz="1600" b="0" u="none" strike="noStrike">
               <a:solidFill>
                 <a:schemeClr val="dk1"/>
               </a:solidFill>
@@ -5413,16 +5884,19 @@
                 <a:spcPct val="100000"/>
               </a:lnSpc>
               <a:spcBef>
-                <a:spcPts val="400"/>
+                <a:spcPts val="320"/>
               </a:spcBef>
               <a:buClr>
                 <a:srgbClr val="000000"/>
               </a:buClr>
               <a:buFont typeface="Arial"/>
               <a:buChar char="»"/>
-            </a:pPr>
-            <a:r>
-              <a:rPr lang="en-US" sz="2000" b="0" u="none" strike="noStrike">
+              <a:tabLst>
+                <a:tab pos="0" algn="l"/>
+              </a:tabLst>
+            </a:pPr>
+            <a:r>
+              <a:rPr lang="en-US" sz="1600" b="0" u="none" strike="noStrike">
                 <a:solidFill>
                   <a:schemeClr val="dk1"/>
                 </a:solidFill>
@@ -5432,7 +5906,7 @@
               </a:rPr>
               <a:t>Fifth level</a:t>
             </a:r>
-            <a:endParaRPr lang="en-US" sz="2000" b="0" u="none" strike="noStrike">
+            <a:endParaRPr lang="en-US" sz="1600" b="0" u="none" strike="noStrike">
               <a:solidFill>
                 <a:schemeClr val="dk1"/>
               </a:solidFill>
@@ -5445,7 +5919,7 @@
       </p:sp>
       <p:sp>
         <p:nvSpPr>
-          <p:cNvPr id="32" name="PlaceHolder 3"/>
+          <p:cNvPr id="37" name="PlaceHolder 6"/>
           <p:cNvSpPr>
             <a:spLocks noGrp="1"/>
           </p:cNvSpPr>
@@ -5456,7 +5930,7 @@
         <p:spPr>
           <a:xfrm>
             <a:off x="457200" y="6356520"/>
-            <a:ext cx="2131560" cy="362880"/>
+            <a:ext cx="2129400" cy="360720"/>
           </a:xfrm>
           <a:prstGeom prst="rect">
             <a:avLst/>
@@ -5512,7 +5986,7 @@
                 <a:uFillTx/>
                 <a:latin typeface="Calibri"/>
               </a:rPr>
-              <a:t> </a:t>
+              <a:t>&lt;date/time&gt;</a:t>
             </a:r>
             <a:endParaRPr lang="en-US" sz="1200" b="0" u="none" strike="noStrike">
               <a:solidFill>
@@ -5527,7 +6001,7 @@
       </p:sp>
       <p:sp>
         <p:nvSpPr>
-          <p:cNvPr id="33" name="PlaceHolder 4"/>
+          <p:cNvPr id="38" name="PlaceHolder 7"/>
           <p:cNvSpPr>
             <a:spLocks noGrp="1"/>
           </p:cNvSpPr>
@@ -5538,7 +6012,7 @@
         <p:spPr>
           <a:xfrm>
             <a:off x="3124080" y="6356520"/>
-            <a:ext cx="2893320" cy="362880"/>
+            <a:ext cx="2891160" cy="360720"/>
           </a:xfrm>
           <a:prstGeom prst="rect">
             <a:avLst/>
@@ -5590,7 +6064,7 @@
                 <a:uFillTx/>
                 <a:latin typeface="Times New Roman"/>
               </a:rPr>
-              <a:t> </a:t>
+              <a:t>&lt;footer&gt;</a:t>
             </a:r>
             <a:endParaRPr lang="en-US" sz="1400" b="0" u="none" strike="noStrike">
               <a:solidFill>
@@ -5605,7 +6079,7 @@
       </p:sp>
       <p:sp>
         <p:nvSpPr>
-          <p:cNvPr id="34" name="PlaceHolder 5"/>
+          <p:cNvPr id="39" name="PlaceHolder 8"/>
           <p:cNvSpPr>
             <a:spLocks noGrp="1"/>
           </p:cNvSpPr>
@@ -5616,7 +6090,7 @@
         <p:spPr>
           <a:xfrm>
             <a:off x="6553080" y="6356520"/>
-            <a:ext cx="2131560" cy="362880"/>
+            <a:ext cx="2129400" cy="360720"/>
           </a:xfrm>
           <a:prstGeom prst="rect">
             <a:avLst/>
@@ -5661,7 +6135,7 @@
                 <a:tab pos="0" algn="l"/>
               </a:tabLst>
             </a:pPr>
-            <a:fld id="{8172692B-390F-47E7-AF4F-B9C78B0021F9}" type="slidenum">
+            <a:fld id="{8A9152C6-971D-48CD-83B0-F269BCB90BE8}" type="slidenum">
               <a:rPr lang="en-US" sz="1200" b="0" u="none" strike="noStrike">
                 <a:solidFill>
                   <a:schemeClr val="dk1">
@@ -5672,7 +6146,7 @@
                 <a:uFillTx/>
                 <a:latin typeface="Calibri"/>
               </a:rPr>
-              <a:t>1</a:t>
+              <a:t>&lt;number&gt;</a:t>
             </a:fld>
             <a:endParaRPr lang="en-US" sz="1200" b="0" u="none" strike="noStrike">
               <a:solidFill>
@@ -5694,666 +6168,8 @@
 </file>
 
 <file path=ppt/slideLayouts/slideLayout8.xml><?xml version="1.0" encoding="utf-8"?>
-<p:sldLayout xmlns:a="http://schemas.openxmlformats.org/drawingml/2006/main" xmlns:p="http://schemas.openxmlformats.org/presentationml/2006/main" xmlns:r="http://schemas.openxmlformats.org/officeDocument/2006/relationships" xmlns:p14="http://schemas.microsoft.com/office/powerpoint/2010/main" xmlns:p15="http://schemas.microsoft.com/office/powerpoint/2012/main" xmlns:mc="http://schemas.openxmlformats.org/markup-compatibility/2006" type="obj" preserve="1">
-  <p:cSld name="Title and Content">
-    <p:bg>
-      <p:bgPr>
-        <a:solidFill>
-          <a:srgbClr val="FFFFFF"/>
-        </a:solidFill>
-      </p:bgPr>
-    </p:bg>
-    <p:spTree>
-      <p:nvGrpSpPr>
-        <p:cNvPr id="1" name=""/>
-        <p:cNvGrpSpPr/>
-        <p:nvPr/>
-      </p:nvGrpSpPr>
-      <p:grpSpPr>
-        <a:xfrm>
-          <a:off x="0" y="0"/>
-          <a:ext cx="0" cy="0"/>
-          <a:chOff x="0" y="0"/>
-          <a:chExt cx="0" cy="0"/>
-        </a:xfrm>
-      </p:grpSpPr>
-      <p:sp>
-        <p:nvSpPr>
-          <p:cNvPr id="35" name="PlaceHolder 1"/>
-          <p:cNvSpPr>
-            <a:spLocks noGrp="1"/>
-          </p:cNvSpPr>
-          <p:nvPr>
-            <p:ph type="title"/>
-          </p:nvPr>
-        </p:nvSpPr>
-        <p:spPr>
-          <a:xfrm>
-            <a:off x="457200" y="274680"/>
-            <a:ext cx="8227440" cy="1140840"/>
-          </a:xfrm>
-          <a:prstGeom prst="rect">
-            <a:avLst/>
-          </a:prstGeom>
-          <a:noFill/>
-          <a:ln w="0">
-            <a:noFill/>
-          </a:ln>
-        </p:spPr>
-        <p:txBody>
-          <a:bodyPr lIns="91440" tIns="45720" rIns="91440" bIns="45720" anchor="ctr">
-            <a:noAutofit/>
-          </a:bodyPr>
-          <a:lstStyle>
-            <a:lvl1pPr indent="0" algn="ctr" defTabSz="457200">
-              <a:lnSpc>
-                <a:spcPct val="100000"/>
-              </a:lnSpc>
-              <a:buNone/>
-              <a:tabLst>
-                <a:tab pos="0" algn="l"/>
-              </a:tabLst>
-              <a:defRPr lang="en-US" sz="4400" b="0" u="none" strike="noStrike">
-                <a:solidFill>
-                  <a:schemeClr val="dk1"/>
-                </a:solidFill>
-                <a:effectLst/>
-                <a:uFillTx/>
-                <a:latin typeface="Calibri"/>
-              </a:defRPr>
-            </a:lvl1pPr>
-          </a:lstStyle>
-          <a:p>
-            <a:pPr indent="0" algn="ctr" defTabSz="457200">
-              <a:lnSpc>
-                <a:spcPct val="100000"/>
-              </a:lnSpc>
-              <a:buNone/>
-              <a:tabLst>
-                <a:tab pos="0" algn="l"/>
-              </a:tabLst>
-            </a:pPr>
-            <a:r>
-              <a:rPr lang="en-US" sz="4400" b="0" u="none" strike="noStrike">
-                <a:solidFill>
-                  <a:schemeClr val="dk1"/>
-                </a:solidFill>
-                <a:effectLst/>
-                <a:uFillTx/>
-                <a:latin typeface="Calibri"/>
-              </a:rPr>
-              <a:t>Click to edit Master title style</a:t>
-            </a:r>
-            <a:endParaRPr lang="en-US" sz="4400" b="0" u="none" strike="noStrike">
-              <a:solidFill>
-                <a:schemeClr val="dk1"/>
-              </a:solidFill>
-              <a:effectLst/>
-              <a:uFillTx/>
-              <a:latin typeface="Calibri"/>
-            </a:endParaRPr>
-          </a:p>
-        </p:txBody>
-      </p:sp>
-      <p:sp>
-        <p:nvSpPr>
-          <p:cNvPr id="36" name="PlaceHolder 2"/>
-          <p:cNvSpPr>
-            <a:spLocks noGrp="1"/>
-          </p:cNvSpPr>
-          <p:nvPr>
-            <p:ph type="body"/>
-          </p:nvPr>
-        </p:nvSpPr>
-        <p:spPr>
-          <a:xfrm>
-            <a:off x="457200" y="1600200"/>
-            <a:ext cx="8227440" cy="4523760"/>
-          </a:xfrm>
-          <a:prstGeom prst="rect">
-            <a:avLst/>
-          </a:prstGeom>
-          <a:noFill/>
-          <a:ln w="0">
-            <a:noFill/>
-          </a:ln>
-        </p:spPr>
-        <p:txBody>
-          <a:bodyPr lIns="91440" tIns="45720" rIns="91440" bIns="45720" anchor="t">
-            <a:noAutofit/>
-          </a:bodyPr>
-          <a:lstStyle>
-            <a:lvl1pPr algn="l" defTabSz="457200">
-              <a:lnSpc>
-                <a:spcPct val="100000"/>
-              </a:lnSpc>
-              <a:spcBef>
-                <a:spcPts val="641"/>
-              </a:spcBef>
-              <a:buClr>
-                <a:srgbClr val="000000"/>
-              </a:buClr>
-              <a:buFont typeface="Arial"/>
-              <a:buChar char="•"/>
-              <a:defRPr lang="en-US" sz="3200" b="0" u="none" strike="noStrike">
-                <a:solidFill>
-                  <a:schemeClr val="dk1"/>
-                </a:solidFill>
-                <a:effectLst/>
-                <a:uFillTx/>
-                <a:latin typeface="Calibri"/>
-              </a:defRPr>
-            </a:lvl1pPr>
-            <a:lvl2pPr lvl="1" algn="l" defTabSz="457200">
-              <a:lnSpc>
-                <a:spcPct val="100000"/>
-              </a:lnSpc>
-              <a:spcBef>
-                <a:spcPts val="561"/>
-              </a:spcBef>
-              <a:buClr>
-                <a:srgbClr val="000000"/>
-              </a:buClr>
-              <a:buFont typeface="Arial"/>
-              <a:buChar char="–"/>
-              <a:defRPr lang="en-US" sz="2800" b="0" u="none" strike="noStrike">
-                <a:solidFill>
-                  <a:schemeClr val="dk1"/>
-                </a:solidFill>
-                <a:effectLst/>
-                <a:uFillTx/>
-                <a:latin typeface="Calibri"/>
-              </a:defRPr>
-            </a:lvl2pPr>
-            <a:lvl3pPr lvl="2" algn="l" defTabSz="457200">
-              <a:lnSpc>
-                <a:spcPct val="100000"/>
-              </a:lnSpc>
-              <a:spcBef>
-                <a:spcPts val="479"/>
-              </a:spcBef>
-              <a:buClr>
-                <a:srgbClr val="000000"/>
-              </a:buClr>
-              <a:buFont typeface="Arial"/>
-              <a:buChar char="•"/>
-              <a:defRPr lang="en-US" sz="2400" b="0" u="none" strike="noStrike">
-                <a:solidFill>
-                  <a:schemeClr val="dk1"/>
-                </a:solidFill>
-                <a:effectLst/>
-                <a:uFillTx/>
-                <a:latin typeface="Calibri"/>
-              </a:defRPr>
-            </a:lvl3pPr>
-            <a:lvl4pPr lvl="3" algn="l" defTabSz="457200">
-              <a:lnSpc>
-                <a:spcPct val="100000"/>
-              </a:lnSpc>
-              <a:spcBef>
-                <a:spcPts val="400"/>
-              </a:spcBef>
-              <a:buClr>
-                <a:srgbClr val="000000"/>
-              </a:buClr>
-              <a:buFont typeface="Arial"/>
-              <a:buChar char="–"/>
-              <a:defRPr lang="en-US" sz="2000" b="0" u="none" strike="noStrike">
-                <a:solidFill>
-                  <a:schemeClr val="dk1"/>
-                </a:solidFill>
-                <a:effectLst/>
-                <a:uFillTx/>
-                <a:latin typeface="Calibri"/>
-              </a:defRPr>
-            </a:lvl4pPr>
-            <a:lvl5pPr lvl="4" algn="l" defTabSz="457200">
-              <a:lnSpc>
-                <a:spcPct val="100000"/>
-              </a:lnSpc>
-              <a:spcBef>
-                <a:spcPts val="400"/>
-              </a:spcBef>
-              <a:buClr>
-                <a:srgbClr val="000000"/>
-              </a:buClr>
-              <a:buFont typeface="Arial"/>
-              <a:buChar char="»"/>
-              <a:defRPr lang="en-US" sz="2000" b="0" u="none" strike="noStrike">
-                <a:solidFill>
-                  <a:schemeClr val="dk1"/>
-                </a:solidFill>
-                <a:effectLst/>
-                <a:uFillTx/>
-                <a:latin typeface="Calibri"/>
-              </a:defRPr>
-            </a:lvl5pPr>
-          </a:lstStyle>
-          <a:p>
-            <a:pPr marL="343080" indent="-343080" algn="l" defTabSz="457200">
-              <a:lnSpc>
-                <a:spcPct val="100000"/>
-              </a:lnSpc>
-              <a:spcBef>
-                <a:spcPts val="641"/>
-              </a:spcBef>
-              <a:buClr>
-                <a:srgbClr val="000000"/>
-              </a:buClr>
-              <a:buFont typeface="Arial"/>
-              <a:buChar char="•"/>
-            </a:pPr>
-            <a:r>
-              <a:rPr lang="en-US" sz="3200" b="0" u="none" strike="noStrike">
-                <a:solidFill>
-                  <a:schemeClr val="dk1"/>
-                </a:solidFill>
-                <a:effectLst/>
-                <a:uFillTx/>
-                <a:latin typeface="Calibri"/>
-              </a:rPr>
-              <a:t>Click to edit Master text styles</a:t>
-            </a:r>
-            <a:endParaRPr lang="en-US" sz="3200" b="0" u="none" strike="noStrike">
-              <a:solidFill>
-                <a:schemeClr val="dk1"/>
-              </a:solidFill>
-              <a:effectLst/>
-              <a:uFillTx/>
-              <a:latin typeface="Calibri"/>
-            </a:endParaRPr>
-          </a:p>
-          <a:p>
-            <a:pPr marL="743040" lvl="1" indent="-285840" algn="l" defTabSz="457200">
-              <a:lnSpc>
-                <a:spcPct val="100000"/>
-              </a:lnSpc>
-              <a:spcBef>
-                <a:spcPts val="561"/>
-              </a:spcBef>
-              <a:buClr>
-                <a:srgbClr val="000000"/>
-              </a:buClr>
-              <a:buFont typeface="Arial"/>
-              <a:buChar char="–"/>
-            </a:pPr>
-            <a:r>
-              <a:rPr lang="en-US" sz="2800" b="0" u="none" strike="noStrike">
-                <a:solidFill>
-                  <a:schemeClr val="dk1"/>
-                </a:solidFill>
-                <a:effectLst/>
-                <a:uFillTx/>
-                <a:latin typeface="Calibri"/>
-              </a:rPr>
-              <a:t>Second level</a:t>
-            </a:r>
-            <a:endParaRPr lang="en-US" sz="2800" b="0" u="none" strike="noStrike">
-              <a:solidFill>
-                <a:schemeClr val="dk1"/>
-              </a:solidFill>
-              <a:effectLst/>
-              <a:uFillTx/>
-              <a:latin typeface="Calibri"/>
-            </a:endParaRPr>
-          </a:p>
-          <a:p>
-            <a:pPr marL="1143000" lvl="2" indent="-228600" algn="l" defTabSz="457200">
-              <a:lnSpc>
-                <a:spcPct val="100000"/>
-              </a:lnSpc>
-              <a:spcBef>
-                <a:spcPts val="479"/>
-              </a:spcBef>
-              <a:buClr>
-                <a:srgbClr val="000000"/>
-              </a:buClr>
-              <a:buFont typeface="Arial"/>
-              <a:buChar char="•"/>
-            </a:pPr>
-            <a:r>
-              <a:rPr lang="en-US" sz="2400" b="0" u="none" strike="noStrike">
-                <a:solidFill>
-                  <a:schemeClr val="dk1"/>
-                </a:solidFill>
-                <a:effectLst/>
-                <a:uFillTx/>
-                <a:latin typeface="Calibri"/>
-              </a:rPr>
-              <a:t>Third level</a:t>
-            </a:r>
-            <a:endParaRPr lang="en-US" sz="2400" b="0" u="none" strike="noStrike">
-              <a:solidFill>
-                <a:schemeClr val="dk1"/>
-              </a:solidFill>
-              <a:effectLst/>
-              <a:uFillTx/>
-              <a:latin typeface="Calibri"/>
-            </a:endParaRPr>
-          </a:p>
-          <a:p>
-            <a:pPr marL="1600200" lvl="3" indent="-228600" algn="l" defTabSz="457200">
-              <a:lnSpc>
-                <a:spcPct val="100000"/>
-              </a:lnSpc>
-              <a:spcBef>
-                <a:spcPts val="400"/>
-              </a:spcBef>
-              <a:buClr>
-                <a:srgbClr val="000000"/>
-              </a:buClr>
-              <a:buFont typeface="Arial"/>
-              <a:buChar char="–"/>
-            </a:pPr>
-            <a:r>
-              <a:rPr lang="en-US" sz="2000" b="0" u="none" strike="noStrike">
-                <a:solidFill>
-                  <a:schemeClr val="dk1"/>
-                </a:solidFill>
-                <a:effectLst/>
-                <a:uFillTx/>
-                <a:latin typeface="Calibri"/>
-              </a:rPr>
-              <a:t>Fourth level</a:t>
-            </a:r>
-            <a:endParaRPr lang="en-US" sz="2000" b="0" u="none" strike="noStrike">
-              <a:solidFill>
-                <a:schemeClr val="dk1"/>
-              </a:solidFill>
-              <a:effectLst/>
-              <a:uFillTx/>
-              <a:latin typeface="Calibri"/>
-            </a:endParaRPr>
-          </a:p>
-          <a:p>
-            <a:pPr marL="2057400" lvl="4" indent="-228600" algn="l" defTabSz="457200">
-              <a:lnSpc>
-                <a:spcPct val="100000"/>
-              </a:lnSpc>
-              <a:spcBef>
-                <a:spcPts val="400"/>
-              </a:spcBef>
-              <a:buClr>
-                <a:srgbClr val="000000"/>
-              </a:buClr>
-              <a:buFont typeface="Arial"/>
-              <a:buChar char="»"/>
-            </a:pPr>
-            <a:r>
-              <a:rPr lang="en-US" sz="2000" b="0" u="none" strike="noStrike">
-                <a:solidFill>
-                  <a:schemeClr val="dk1"/>
-                </a:solidFill>
-                <a:effectLst/>
-                <a:uFillTx/>
-                <a:latin typeface="Calibri"/>
-              </a:rPr>
-              <a:t>Fifth level</a:t>
-            </a:r>
-            <a:endParaRPr lang="en-US" sz="2000" b="0" u="none" strike="noStrike">
-              <a:solidFill>
-                <a:schemeClr val="dk1"/>
-              </a:solidFill>
-              <a:effectLst/>
-              <a:uFillTx/>
-              <a:latin typeface="Calibri"/>
-            </a:endParaRPr>
-          </a:p>
-        </p:txBody>
-      </p:sp>
-      <p:sp>
-        <p:nvSpPr>
-          <p:cNvPr id="37" name="PlaceHolder 3"/>
-          <p:cNvSpPr>
-            <a:spLocks noGrp="1"/>
-          </p:cNvSpPr>
-          <p:nvPr>
-            <p:ph type="dt" idx="22"/>
-          </p:nvPr>
-        </p:nvSpPr>
-        <p:spPr>
-          <a:xfrm>
-            <a:off x="457200" y="6356520"/>
-            <a:ext cx="2131560" cy="362880"/>
-          </a:xfrm>
-          <a:prstGeom prst="rect">
-            <a:avLst/>
-          </a:prstGeom>
-          <a:noFill/>
-          <a:ln w="0">
-            <a:noFill/>
-          </a:ln>
-        </p:spPr>
-        <p:txBody>
-          <a:bodyPr lIns="91440" tIns="45720" rIns="91440" bIns="45720" anchor="ctr">
-            <a:noAutofit/>
-          </a:bodyPr>
-          <a:lstStyle>
-            <a:lvl1pPr indent="0" algn="l" defTabSz="457200">
-              <a:lnSpc>
-                <a:spcPct val="100000"/>
-              </a:lnSpc>
-              <a:buNone/>
-              <a:tabLst>
-                <a:tab pos="0" algn="l"/>
-              </a:tabLst>
-              <a:defRPr lang="en-US" sz="1200" b="0" u="none" strike="noStrike">
-                <a:solidFill>
-                  <a:schemeClr val="dk1">
-                    <a:tint val="75000"/>
-                  </a:schemeClr>
-                </a:solidFill>
-                <a:effectLst/>
-                <a:uFillTx/>
-                <a:latin typeface="Calibri"/>
-              </a:defRPr>
-            </a:lvl1pPr>
-          </a:lstStyle>
-          <a:p>
-            <a:pPr indent="0" algn="l" defTabSz="457200">
-              <a:lnSpc>
-                <a:spcPct val="100000"/>
-              </a:lnSpc>
-              <a:buNone/>
-              <a:tabLst>
-                <a:tab pos="0" algn="l"/>
-              </a:tabLst>
-            </a:pPr>
-            <a:r>
-              <a:rPr lang="en-US" sz="1200" b="0" u="none" strike="noStrike">
-                <a:solidFill>
-                  <a:schemeClr val="dk1">
-                    <a:tint val="75000"/>
-                  </a:schemeClr>
-                </a:solidFill>
-                <a:effectLst/>
-                <a:uFillTx/>
-                <a:latin typeface="Calibri"/>
-              </a:rPr>
-              <a:t> </a:t>
-            </a:r>
-            <a:endParaRPr lang="en-US" sz="1200" b="0" u="none" strike="noStrike">
-              <a:solidFill>
-                <a:srgbClr val="000000"/>
-              </a:solidFill>
-              <a:effectLst/>
-              <a:uFillTx/>
-              <a:latin typeface="Times New Roman"/>
-            </a:endParaRPr>
-          </a:p>
-        </p:txBody>
-      </p:sp>
-      <p:sp>
-        <p:nvSpPr>
-          <p:cNvPr id="38" name="PlaceHolder 4"/>
-          <p:cNvSpPr>
-            <a:spLocks noGrp="1"/>
-          </p:cNvSpPr>
-          <p:nvPr>
-            <p:ph type="ftr" idx="23"/>
-          </p:nvPr>
-        </p:nvSpPr>
-        <p:spPr>
-          <a:xfrm>
-            <a:off x="3124080" y="6356520"/>
-            <a:ext cx="2893320" cy="362880"/>
-          </a:xfrm>
-          <a:prstGeom prst="rect">
-            <a:avLst/>
-          </a:prstGeom>
-          <a:noFill/>
-          <a:ln w="0">
-            <a:noFill/>
-          </a:ln>
-        </p:spPr>
-        <p:txBody>
-          <a:bodyPr lIns="91440" tIns="45720" rIns="91440" bIns="45720" anchor="ctr">
-            <a:noAutofit/>
-          </a:bodyPr>
-          <a:lstStyle>
-            <a:lvl1pPr indent="0" algn="ctr">
-              <a:lnSpc>
-                <a:spcPct val="100000"/>
-              </a:lnSpc>
-              <a:buNone/>
-              <a:tabLst>
-                <a:tab pos="0" algn="l"/>
-              </a:tabLst>
-              <a:defRPr lang="en-US" sz="1400" b="0" u="none" strike="noStrike">
-                <a:solidFill>
-                  <a:srgbClr val="000000"/>
-                </a:solidFill>
-                <a:effectLst/>
-                <a:uFillTx/>
-                <a:latin typeface="Times New Roman"/>
-              </a:defRPr>
-            </a:lvl1pPr>
-          </a:lstStyle>
-          <a:p>
-            <a:pPr indent="0" algn="ctr">
-              <a:lnSpc>
-                <a:spcPct val="100000"/>
-              </a:lnSpc>
-              <a:buNone/>
-              <a:tabLst>
-                <a:tab pos="0" algn="l"/>
-              </a:tabLst>
-            </a:pPr>
-            <a:r>
-              <a:rPr lang="en-US" sz="1400" b="0" u="none" strike="noStrike">
-                <a:solidFill>
-                  <a:srgbClr val="000000"/>
-                </a:solidFill>
-                <a:effectLst/>
-                <a:uFillTx/>
-                <a:latin typeface="Times New Roman"/>
-              </a:rPr>
-              <a:t> </a:t>
-            </a:r>
-            <a:endParaRPr lang="en-US" sz="1400" b="0" u="none" strike="noStrike">
-              <a:solidFill>
-                <a:srgbClr val="000000"/>
-              </a:solidFill>
-              <a:effectLst/>
-              <a:uFillTx/>
-              <a:latin typeface="Times New Roman"/>
-            </a:endParaRPr>
-          </a:p>
-        </p:txBody>
-      </p:sp>
-      <p:sp>
-        <p:nvSpPr>
-          <p:cNvPr id="39" name="PlaceHolder 5"/>
-          <p:cNvSpPr>
-            <a:spLocks noGrp="1"/>
-          </p:cNvSpPr>
-          <p:nvPr>
-            <p:ph type="sldNum" idx="24"/>
-          </p:nvPr>
-        </p:nvSpPr>
-        <p:spPr>
-          <a:xfrm>
-            <a:off x="6553080" y="6356520"/>
-            <a:ext cx="2131560" cy="362880"/>
-          </a:xfrm>
-          <a:prstGeom prst="rect">
-            <a:avLst/>
-          </a:prstGeom>
-          <a:noFill/>
-          <a:ln w="0">
-            <a:noFill/>
-          </a:ln>
-        </p:spPr>
-        <p:txBody>
-          <a:bodyPr lIns="91440" tIns="45720" rIns="91440" bIns="45720" anchor="ctr">
-            <a:noAutofit/>
-          </a:bodyPr>
-          <a:lstStyle>
-            <a:lvl1pPr indent="0" algn="r" defTabSz="457200">
-              <a:lnSpc>
-                <a:spcPct val="100000"/>
-              </a:lnSpc>
-              <a:buNone/>
-              <a:tabLst>
-                <a:tab pos="0" algn="l"/>
-              </a:tabLst>
-              <a:defRPr lang="en-US" sz="1200" b="0" u="none" strike="noStrike">
-                <a:solidFill>
-                  <a:schemeClr val="dk1">
-                    <a:tint val="75000"/>
-                  </a:schemeClr>
-                </a:solidFill>
-                <a:effectLst/>
-                <a:uFillTx/>
-                <a:latin typeface="Calibri"/>
-              </a:defRPr>
-            </a:lvl1pPr>
-          </a:lstStyle>
-          <a:p>
-            <a:pPr indent="0" algn="r" defTabSz="457200">
-              <a:lnSpc>
-                <a:spcPct val="100000"/>
-              </a:lnSpc>
-              <a:buNone/>
-              <a:tabLst>
-                <a:tab pos="0" algn="l"/>
-              </a:tabLst>
-            </a:pPr>
-            <a:fld id="{7E129453-D5F7-49A5-94A9-C13FB74A7BCC}" type="slidenum">
-              <a:rPr lang="en-US" sz="1200" b="0" u="none" strike="noStrike">
-                <a:solidFill>
-                  <a:schemeClr val="dk1">
-                    <a:tint val="75000"/>
-                  </a:schemeClr>
-                </a:solidFill>
-                <a:effectLst/>
-                <a:uFillTx/>
-                <a:latin typeface="Calibri"/>
-              </a:rPr>
-              <a:t>1</a:t>
-            </a:fld>
-            <a:endParaRPr lang="en-US" sz="1200" b="0" u="none" strike="noStrike">
-              <a:solidFill>
-                <a:srgbClr val="000000"/>
-              </a:solidFill>
-              <a:effectLst/>
-              <a:uFillTx/>
-              <a:latin typeface="Times New Roman"/>
-            </a:endParaRPr>
-          </a:p>
-        </p:txBody>
-      </p:sp>
-    </p:spTree>
-  </p:cSld>
-  <p:clrMapOvr>
-    <a:masterClrMapping/>
-  </p:clrMapOvr>
-</p:sldLayout>
-</file>
-
-<file path=ppt/slideLayouts/slideLayout9.xml><?xml version="1.0" encoding="utf-8"?>
-<p:sldLayout xmlns:a="http://schemas.openxmlformats.org/drawingml/2006/main" xmlns:p="http://schemas.openxmlformats.org/presentationml/2006/main" xmlns:r="http://schemas.openxmlformats.org/officeDocument/2006/relationships" xmlns:p14="http://schemas.microsoft.com/office/powerpoint/2010/main" xmlns:p15="http://schemas.microsoft.com/office/powerpoint/2012/main" xmlns:mc="http://schemas.openxmlformats.org/markup-compatibility/2006" type="blank" preserve="1">
-  <p:cSld name="Section Header">
+<p:sldLayout xmlns:a="http://schemas.openxmlformats.org/drawingml/2006/main" xmlns:p="http://schemas.openxmlformats.org/presentationml/2006/main" xmlns:r="http://schemas.openxmlformats.org/officeDocument/2006/relationships" xmlns:p14="http://schemas.microsoft.com/office/powerpoint/2010/main" xmlns:p15="http://schemas.microsoft.com/office/powerpoint/2012/main" xmlns:mc="http://schemas.openxmlformats.org/markup-compatibility/2006" type="titleOnly" preserve="1">
+  <p:cSld name="Title Only">
     <p:bg>
       <p:bgPr>
         <a:solidFill>
@@ -6387,8 +6203,8 @@
         </p:nvSpPr>
         <p:spPr>
           <a:xfrm>
-            <a:off x="722160" y="4406760"/>
-            <a:ext cx="7770240" cy="1360080"/>
+            <a:off x="457200" y="274680"/>
+            <a:ext cx="8225280" cy="1138680"/>
           </a:xfrm>
           <a:prstGeom prst="rect">
             <a:avLst/>
@@ -6399,19 +6215,19 @@
           </a:ln>
         </p:spPr>
         <p:txBody>
-          <a:bodyPr lIns="91440" tIns="45720" rIns="91440" bIns="45720" anchor="t">
+          <a:bodyPr lIns="91440" tIns="45720" rIns="91440" bIns="45720" anchor="ctr">
             <a:noAutofit/>
           </a:bodyPr>
           <a:lstStyle>
-            <a:lvl1pPr indent="0" algn="l" defTabSz="457200">
-              <a:lnSpc>
-                <a:spcPct val="100000"/>
-              </a:lnSpc>
-              <a:buNone/>
-              <a:tabLst>
-                <a:tab pos="0" algn="l"/>
-              </a:tabLst>
-              <a:defRPr lang="en-US" sz="4000" b="1" u="none" strike="noStrike" cap="all">
+            <a:lvl1pPr indent="0" algn="ctr" defTabSz="457200">
+              <a:lnSpc>
+                <a:spcPct val="100000"/>
+              </a:lnSpc>
+              <a:buNone/>
+              <a:tabLst>
+                <a:tab pos="0" algn="l"/>
+              </a:tabLst>
+              <a:defRPr lang="en-US" sz="4400" b="0" u="none" strike="noStrike">
                 <a:solidFill>
                   <a:schemeClr val="dk1"/>
                 </a:solidFill>
@@ -6422,17 +6238,17 @@
             </a:lvl1pPr>
           </a:lstStyle>
           <a:p>
-            <a:pPr indent="0" algn="l" defTabSz="457200">
-              <a:lnSpc>
-                <a:spcPct val="100000"/>
-              </a:lnSpc>
-              <a:buNone/>
-              <a:tabLst>
-                <a:tab pos="0" algn="l"/>
-              </a:tabLst>
-            </a:pPr>
-            <a:r>
-              <a:rPr lang="en-US" sz="4000" b="1" u="none" strike="noStrike" cap="all">
+            <a:pPr indent="0" algn="ctr" defTabSz="457200">
+              <a:lnSpc>
+                <a:spcPct val="100000"/>
+              </a:lnSpc>
+              <a:buNone/>
+              <a:tabLst>
+                <a:tab pos="0" algn="l"/>
+              </a:tabLst>
+            </a:pPr>
+            <a:r>
+              <a:rPr lang="en-US" sz="4400" b="0" u="none" strike="noStrike">
                 <a:solidFill>
                   <a:schemeClr val="dk1"/>
                 </a:solidFill>
@@ -6442,7 +6258,7 @@
               </a:rPr>
               <a:t>Click to edit Master title style</a:t>
             </a:r>
-            <a:endParaRPr lang="en-US" sz="4000" b="1" u="none" strike="noStrike" cap="all">
+            <a:endParaRPr lang="en-US" sz="4400" b="0" u="none" strike="noStrike">
               <a:solidFill>
                 <a:schemeClr val="dk1"/>
               </a:solidFill>
@@ -6460,103 +6276,13 @@
             <a:spLocks noGrp="1"/>
           </p:cNvSpPr>
           <p:nvPr>
-            <p:ph type="body"/>
-          </p:nvPr>
-        </p:nvSpPr>
-        <p:spPr>
-          <a:xfrm>
-            <a:off x="722160" y="2906640"/>
-            <a:ext cx="7770240" cy="1497960"/>
-          </a:xfrm>
-          <a:prstGeom prst="rect">
-            <a:avLst/>
-          </a:prstGeom>
-          <a:noFill/>
-          <a:ln w="0">
-            <a:noFill/>
-          </a:ln>
-        </p:spPr>
-        <p:txBody>
-          <a:bodyPr lIns="91440" tIns="45720" rIns="91440" bIns="45720" anchor="b">
-            <a:noAutofit/>
-          </a:bodyPr>
-          <a:lstStyle>
-            <a:lvl1pPr indent="0" algn="l" defTabSz="457200">
-              <a:lnSpc>
-                <a:spcPct val="100000"/>
-              </a:lnSpc>
-              <a:spcBef>
-                <a:spcPts val="400"/>
-              </a:spcBef>
-              <a:buNone/>
-              <a:tabLst>
-                <a:tab pos="0" algn="l"/>
-              </a:tabLst>
-              <a:defRPr lang="en-US" sz="2000" b="0" u="none" strike="noStrike">
-                <a:solidFill>
-                  <a:schemeClr val="dk1">
-                    <a:tint val="75000"/>
-                  </a:schemeClr>
-                </a:solidFill>
-                <a:effectLst/>
-                <a:uFillTx/>
-                <a:latin typeface="Calibri"/>
-              </a:defRPr>
-            </a:lvl1pPr>
-          </a:lstStyle>
-          <a:p>
-            <a:pPr indent="0" algn="l" defTabSz="457200">
-              <a:lnSpc>
-                <a:spcPct val="100000"/>
-              </a:lnSpc>
-              <a:spcBef>
-                <a:spcPts val="400"/>
-              </a:spcBef>
-              <a:buNone/>
-              <a:tabLst>
-                <a:tab pos="0" algn="l"/>
-              </a:tabLst>
-            </a:pPr>
-            <a:r>
-              <a:rPr lang="en-US" sz="2000" b="0" u="none" strike="noStrike">
-                <a:solidFill>
-                  <a:schemeClr val="dk1">
-                    <a:tint val="75000"/>
-                  </a:schemeClr>
-                </a:solidFill>
-                <a:effectLst/>
-                <a:uFillTx/>
-                <a:latin typeface="Calibri"/>
-              </a:rPr>
-              <a:t>Click to edit Master text styles</a:t>
-            </a:r>
-            <a:endParaRPr lang="en-US" sz="2000" b="0" u="none" strike="noStrike">
-              <a:solidFill>
-                <a:schemeClr val="dk1">
-                  <a:tint val="75000"/>
-                </a:schemeClr>
-              </a:solidFill>
-              <a:effectLst/>
-              <a:uFillTx/>
-              <a:latin typeface="Calibri"/>
-            </a:endParaRPr>
-          </a:p>
-        </p:txBody>
-      </p:sp>
-      <p:sp>
-        <p:nvSpPr>
-          <p:cNvPr id="42" name="PlaceHolder 3"/>
-          <p:cNvSpPr>
-            <a:spLocks noGrp="1"/>
-          </p:cNvSpPr>
-          <p:nvPr>
-            <p:ph type="dt" idx="25"/>
+            <p:ph type="dt" idx="22"/>
           </p:nvPr>
         </p:nvSpPr>
         <p:spPr>
           <a:xfrm>
             <a:off x="457200" y="6356520"/>
-            <a:ext cx="2131560" cy="362880"/>
+            <a:ext cx="2129400" cy="360720"/>
           </a:xfrm>
           <a:prstGeom prst="rect">
             <a:avLst/>
@@ -6612,7 +6338,7 @@
                 <a:uFillTx/>
                 <a:latin typeface="Calibri"/>
               </a:rPr>
-              <a:t> </a:t>
+              <a:t>&lt;date/time&gt;</a:t>
             </a:r>
             <a:endParaRPr lang="en-US" sz="1200" b="0" u="none" strike="noStrike">
               <a:solidFill>
@@ -6627,18 +6353,18 @@
       </p:sp>
       <p:sp>
         <p:nvSpPr>
-          <p:cNvPr id="43" name="PlaceHolder 4"/>
+          <p:cNvPr id="42" name="PlaceHolder 3"/>
           <p:cNvSpPr>
             <a:spLocks noGrp="1"/>
           </p:cNvSpPr>
           <p:nvPr>
-            <p:ph type="ftr" idx="26"/>
+            <p:ph type="ftr" idx="23"/>
           </p:nvPr>
         </p:nvSpPr>
         <p:spPr>
           <a:xfrm>
             <a:off x="3124080" y="6356520"/>
-            <a:ext cx="2893320" cy="362880"/>
+            <a:ext cx="2891160" cy="360720"/>
           </a:xfrm>
           <a:prstGeom prst="rect">
             <a:avLst/>
@@ -6690,7 +6416,7 @@
                 <a:uFillTx/>
                 <a:latin typeface="Times New Roman"/>
               </a:rPr>
-              <a:t> </a:t>
+              <a:t>&lt;footer&gt;</a:t>
             </a:r>
             <a:endParaRPr lang="en-US" sz="1400" b="0" u="none" strike="noStrike">
               <a:solidFill>
@@ -6705,18 +6431,18 @@
       </p:sp>
       <p:sp>
         <p:nvSpPr>
-          <p:cNvPr id="44" name="PlaceHolder 5"/>
+          <p:cNvPr id="43" name="PlaceHolder 4"/>
           <p:cNvSpPr>
             <a:spLocks noGrp="1"/>
           </p:cNvSpPr>
           <p:nvPr>
-            <p:ph type="sldNum" idx="27"/>
+            <p:ph type="sldNum" idx="24"/>
           </p:nvPr>
         </p:nvSpPr>
         <p:spPr>
           <a:xfrm>
             <a:off x="6553080" y="6356520"/>
-            <a:ext cx="2131560" cy="362880"/>
+            <a:ext cx="2129400" cy="360720"/>
           </a:xfrm>
           <a:prstGeom prst="rect">
             <a:avLst/>
@@ -6761,7 +6487,7 @@
                 <a:tab pos="0" algn="l"/>
               </a:tabLst>
             </a:pPr>
-            <a:fld id="{FCF1FA44-1875-4643-A495-310DDB617BA5}" type="slidenum">
+            <a:fld id="{F0D11560-22EC-4327-9CBF-CF9B32003571}" type="slidenum">
               <a:rPr lang="en-US" sz="1200" b="0" u="none" strike="noStrike">
                 <a:solidFill>
                   <a:schemeClr val="dk1">
@@ -6772,7 +6498,281 @@
                 <a:uFillTx/>
                 <a:latin typeface="Calibri"/>
               </a:rPr>
-              <a:t>1</a:t>
+              <a:t>&lt;number&gt;</a:t>
+            </a:fld>
+            <a:endParaRPr lang="en-US" sz="1200" b="0" u="none" strike="noStrike">
+              <a:solidFill>
+                <a:srgbClr val="000000"/>
+              </a:solidFill>
+              <a:effectLst/>
+              <a:uFillTx/>
+              <a:latin typeface="Times New Roman"/>
+            </a:endParaRPr>
+          </a:p>
+        </p:txBody>
+      </p:sp>
+    </p:spTree>
+  </p:cSld>
+  <p:clrMapOvr>
+    <a:masterClrMapping/>
+  </p:clrMapOvr>
+</p:sldLayout>
+</file>
+
+<file path=ppt/slideLayouts/slideLayout9.xml><?xml version="1.0" encoding="utf-8"?>
+<p:sldLayout xmlns:a="http://schemas.openxmlformats.org/drawingml/2006/main" xmlns:p="http://schemas.openxmlformats.org/presentationml/2006/main" xmlns:r="http://schemas.openxmlformats.org/officeDocument/2006/relationships" xmlns:p14="http://schemas.microsoft.com/office/powerpoint/2010/main" xmlns:p15="http://schemas.microsoft.com/office/powerpoint/2012/main" xmlns:mc="http://schemas.openxmlformats.org/markup-compatibility/2006" type="blank" preserve="1">
+  <p:cSld name="Blank">
+    <p:bg>
+      <p:bgPr>
+        <a:solidFill>
+          <a:srgbClr val="FFFFFF"/>
+        </a:solidFill>
+      </p:bgPr>
+    </p:bg>
+    <p:spTree>
+      <p:nvGrpSpPr>
+        <p:cNvPr id="1" name=""/>
+        <p:cNvGrpSpPr/>
+        <p:nvPr/>
+      </p:nvGrpSpPr>
+      <p:grpSpPr>
+        <a:xfrm>
+          <a:off x="0" y="0"/>
+          <a:ext cx="0" cy="0"/>
+          <a:chOff x="0" y="0"/>
+          <a:chExt cx="0" cy="0"/>
+        </a:xfrm>
+      </p:grpSpPr>
+      <p:sp>
+        <p:nvSpPr>
+          <p:cNvPr id="44" name="PlaceHolder 1"/>
+          <p:cNvSpPr>
+            <a:spLocks noGrp="1"/>
+          </p:cNvSpPr>
+          <p:nvPr>
+            <p:ph type="dt" idx="25"/>
+          </p:nvPr>
+        </p:nvSpPr>
+        <p:spPr>
+          <a:xfrm>
+            <a:off x="457200" y="6356520"/>
+            <a:ext cx="2129400" cy="360720"/>
+          </a:xfrm>
+          <a:prstGeom prst="rect">
+            <a:avLst/>
+          </a:prstGeom>
+          <a:noFill/>
+          <a:ln w="0">
+            <a:noFill/>
+          </a:ln>
+        </p:spPr>
+        <p:txBody>
+          <a:bodyPr lIns="91440" tIns="45720" rIns="91440" bIns="45720" anchor="ctr">
+            <a:noAutofit/>
+          </a:bodyPr>
+          <a:lstStyle>
+            <a:lvl1pPr indent="0" algn="l" defTabSz="457200">
+              <a:lnSpc>
+                <a:spcPct val="100000"/>
+              </a:lnSpc>
+              <a:buNone/>
+              <a:tabLst>
+                <a:tab pos="0" algn="l"/>
+              </a:tabLst>
+              <a:defRPr lang="en-US" sz="1200" b="0" u="none" strike="noStrike">
+                <a:solidFill>
+                  <a:schemeClr val="dk1">
+                    <a:tint val="75000"/>
+                  </a:schemeClr>
+                </a:solidFill>
+                <a:effectLst/>
+                <a:uFillTx/>
+                <a:latin typeface="Calibri"/>
+              </a:defRPr>
+            </a:lvl1pPr>
+          </a:lstStyle>
+          <a:p>
+            <a:pPr indent="0" algn="l" defTabSz="457200">
+              <a:lnSpc>
+                <a:spcPct val="100000"/>
+              </a:lnSpc>
+              <a:buNone/>
+              <a:tabLst>
+                <a:tab pos="0" algn="l"/>
+              </a:tabLst>
+            </a:pPr>
+            <a:r>
+              <a:rPr lang="en-US" sz="1200" b="0" u="none" strike="noStrike">
+                <a:solidFill>
+                  <a:schemeClr val="dk1">
+                    <a:tint val="75000"/>
+                  </a:schemeClr>
+                </a:solidFill>
+                <a:effectLst/>
+                <a:uFillTx/>
+                <a:latin typeface="Calibri"/>
+              </a:rPr>
+              <a:t>&lt;date/time&gt;</a:t>
+            </a:r>
+            <a:endParaRPr lang="en-US" sz="1200" b="0" u="none" strike="noStrike">
+              <a:solidFill>
+                <a:srgbClr val="000000"/>
+              </a:solidFill>
+              <a:effectLst/>
+              <a:uFillTx/>
+              <a:latin typeface="Times New Roman"/>
+            </a:endParaRPr>
+          </a:p>
+        </p:txBody>
+      </p:sp>
+      <p:sp>
+        <p:nvSpPr>
+          <p:cNvPr id="45" name="PlaceHolder 2"/>
+          <p:cNvSpPr>
+            <a:spLocks noGrp="1"/>
+          </p:cNvSpPr>
+          <p:nvPr>
+            <p:ph type="ftr" idx="26"/>
+          </p:nvPr>
+        </p:nvSpPr>
+        <p:spPr>
+          <a:xfrm>
+            <a:off x="3124080" y="6356520"/>
+            <a:ext cx="2891160" cy="360720"/>
+          </a:xfrm>
+          <a:prstGeom prst="rect">
+            <a:avLst/>
+          </a:prstGeom>
+          <a:noFill/>
+          <a:ln w="0">
+            <a:noFill/>
+          </a:ln>
+        </p:spPr>
+        <p:txBody>
+          <a:bodyPr lIns="91440" tIns="45720" rIns="91440" bIns="45720" anchor="ctr">
+            <a:noAutofit/>
+          </a:bodyPr>
+          <a:lstStyle>
+            <a:lvl1pPr indent="0" algn="ctr">
+              <a:lnSpc>
+                <a:spcPct val="100000"/>
+              </a:lnSpc>
+              <a:buNone/>
+              <a:tabLst>
+                <a:tab pos="0" algn="l"/>
+              </a:tabLst>
+              <a:defRPr lang="en-US" sz="1400" b="0" u="none" strike="noStrike">
+                <a:solidFill>
+                  <a:srgbClr val="000000"/>
+                </a:solidFill>
+                <a:effectLst/>
+                <a:uFillTx/>
+                <a:latin typeface="Times New Roman"/>
+              </a:defRPr>
+            </a:lvl1pPr>
+          </a:lstStyle>
+          <a:p>
+            <a:pPr indent="0" algn="ctr">
+              <a:lnSpc>
+                <a:spcPct val="100000"/>
+              </a:lnSpc>
+              <a:buNone/>
+              <a:tabLst>
+                <a:tab pos="0" algn="l"/>
+              </a:tabLst>
+            </a:pPr>
+            <a:r>
+              <a:rPr lang="en-US" sz="1400" b="0" u="none" strike="noStrike">
+                <a:solidFill>
+                  <a:srgbClr val="000000"/>
+                </a:solidFill>
+                <a:effectLst/>
+                <a:uFillTx/>
+                <a:latin typeface="Times New Roman"/>
+              </a:rPr>
+              <a:t>&lt;footer&gt;</a:t>
+            </a:r>
+            <a:endParaRPr lang="en-US" sz="1400" b="0" u="none" strike="noStrike">
+              <a:solidFill>
+                <a:srgbClr val="000000"/>
+              </a:solidFill>
+              <a:effectLst/>
+              <a:uFillTx/>
+              <a:latin typeface="Times New Roman"/>
+            </a:endParaRPr>
+          </a:p>
+        </p:txBody>
+      </p:sp>
+      <p:sp>
+        <p:nvSpPr>
+          <p:cNvPr id="46" name="PlaceHolder 3"/>
+          <p:cNvSpPr>
+            <a:spLocks noGrp="1"/>
+          </p:cNvSpPr>
+          <p:nvPr>
+            <p:ph type="sldNum" idx="27"/>
+          </p:nvPr>
+        </p:nvSpPr>
+        <p:spPr>
+          <a:xfrm>
+            <a:off x="6553080" y="6356520"/>
+            <a:ext cx="2129400" cy="360720"/>
+          </a:xfrm>
+          <a:prstGeom prst="rect">
+            <a:avLst/>
+          </a:prstGeom>
+          <a:noFill/>
+          <a:ln w="0">
+            <a:noFill/>
+          </a:ln>
+        </p:spPr>
+        <p:txBody>
+          <a:bodyPr lIns="91440" tIns="45720" rIns="91440" bIns="45720" anchor="ctr">
+            <a:noAutofit/>
+          </a:bodyPr>
+          <a:lstStyle>
+            <a:lvl1pPr indent="0" algn="r" defTabSz="457200">
+              <a:lnSpc>
+                <a:spcPct val="100000"/>
+              </a:lnSpc>
+              <a:buNone/>
+              <a:tabLst>
+                <a:tab pos="0" algn="l"/>
+              </a:tabLst>
+              <a:defRPr lang="en-US" sz="1200" b="0" u="none" strike="noStrike">
+                <a:solidFill>
+                  <a:schemeClr val="dk1">
+                    <a:tint val="75000"/>
+                  </a:schemeClr>
+                </a:solidFill>
+                <a:effectLst/>
+                <a:uFillTx/>
+                <a:latin typeface="Calibri"/>
+              </a:defRPr>
+            </a:lvl1pPr>
+          </a:lstStyle>
+          <a:p>
+            <a:pPr indent="0" algn="r" defTabSz="457200">
+              <a:lnSpc>
+                <a:spcPct val="100000"/>
+              </a:lnSpc>
+              <a:buNone/>
+              <a:tabLst>
+                <a:tab pos="0" algn="l"/>
+              </a:tabLst>
+            </a:pPr>
+            <a:fld id="{A587BA7B-5149-41F5-AECA-D10C0916B4F3}" type="slidenum">
+              <a:rPr lang="en-US" sz="1200" b="0" u="none" strike="noStrike">
+                <a:solidFill>
+                  <a:schemeClr val="dk1">
+                    <a:tint val="75000"/>
+                  </a:schemeClr>
+                </a:solidFill>
+                <a:effectLst/>
+                <a:uFillTx/>
+                <a:latin typeface="Calibri"/>
+              </a:rPr>
+              <a:t>&lt;number&gt;</a:t>
             </a:fld>
             <a:endParaRPr lang="en-US" sz="1200" b="0" u="none" strike="noStrike">
               <a:solidFill>
@@ -6855,7 +6855,7 @@
         <p:spPr>
           <a:xfrm>
             <a:off x="274320" y="73080"/>
-            <a:ext cx="11610720" cy="317880"/>
+            <a:ext cx="11608560" cy="315720"/>
           </a:xfrm>
           <a:prstGeom prst="rect">
             <a:avLst/>
@@ -6912,7 +6912,7 @@
         <p:spPr>
           <a:xfrm>
             <a:off x="4160520" y="502920"/>
-            <a:ext cx="3884040" cy="1872360"/>
+            <a:ext cx="3881880" cy="1870200"/>
           </a:xfrm>
           <a:prstGeom prst="rect">
             <a:avLst/>
@@ -6970,7 +6970,7 @@
         <p:spPr>
           <a:xfrm>
             <a:off x="4160520" y="831960"/>
-            <a:ext cx="3888360" cy="2160"/>
+            <a:ext cx="3890520" cy="4320"/>
           </a:xfrm>
           <a:prstGeom prst="straightConnector1">
             <a:avLst/>
@@ -6992,7 +6992,7 @@
         <p:spPr>
           <a:xfrm>
             <a:off x="4160520" y="1426320"/>
-            <a:ext cx="3888360" cy="2160"/>
+            <a:ext cx="3890520" cy="4320"/>
           </a:xfrm>
           <a:prstGeom prst="straightConnector1">
             <a:avLst/>
@@ -7014,7 +7014,7 @@
         <p:spPr>
           <a:xfrm>
             <a:off x="4197240" y="516600"/>
-            <a:ext cx="3810960" cy="308880"/>
+            <a:ext cx="3808800" cy="306720"/>
           </a:xfrm>
           <a:prstGeom prst="rect">
             <a:avLst/>
@@ -7071,7 +7071,7 @@
         <p:spPr>
           <a:xfrm>
             <a:off x="4215240" y="855000"/>
-            <a:ext cx="3774240" cy="555480"/>
+            <a:ext cx="3772080" cy="553320"/>
           </a:xfrm>
           <a:prstGeom prst="rect">
             <a:avLst/>
@@ -7180,7 +7180,7 @@
         <p:spPr>
           <a:xfrm>
             <a:off x="4215240" y="1449360"/>
-            <a:ext cx="3774240" cy="912240"/>
+            <a:ext cx="3772080" cy="910080"/>
           </a:xfrm>
           <a:prstGeom prst="rect">
             <a:avLst/>
@@ -7419,7 +7419,7 @@
         <p:spPr>
           <a:xfrm>
             <a:off x="594360" y="2926080"/>
-            <a:ext cx="3746880" cy="2238120"/>
+            <a:ext cx="3744720" cy="2235960"/>
           </a:xfrm>
           <a:prstGeom prst="rect">
             <a:avLst/>
@@ -7477,7 +7477,7 @@
         <p:spPr>
           <a:xfrm>
             <a:off x="594360" y="3255120"/>
-            <a:ext cx="3751200" cy="2160"/>
+            <a:ext cx="3753360" cy="4320"/>
           </a:xfrm>
           <a:prstGeom prst="straightConnector1">
             <a:avLst/>
@@ -7499,7 +7499,7 @@
         <p:spPr>
           <a:xfrm>
             <a:off x="594360" y="3849480"/>
-            <a:ext cx="3751200" cy="2160"/>
+            <a:ext cx="3753360" cy="4320"/>
           </a:xfrm>
           <a:prstGeom prst="straightConnector1">
             <a:avLst/>
@@ -7521,7 +7521,7 @@
         <p:spPr>
           <a:xfrm>
             <a:off x="631080" y="2939760"/>
-            <a:ext cx="3673800" cy="308880"/>
+            <a:ext cx="3671640" cy="306720"/>
           </a:xfrm>
           <a:prstGeom prst="rect">
             <a:avLst/>
@@ -7578,7 +7578,7 @@
         <p:spPr>
           <a:xfrm>
             <a:off x="649080" y="3278160"/>
-            <a:ext cx="3637080" cy="555480"/>
+            <a:ext cx="3634920" cy="553320"/>
           </a:xfrm>
           <a:prstGeom prst="rect">
             <a:avLst/>
@@ -7687,7 +7687,7 @@
         <p:spPr>
           <a:xfrm>
             <a:off x="649080" y="3872520"/>
-            <a:ext cx="3637080" cy="1278000"/>
+            <a:ext cx="3634920" cy="1275840"/>
           </a:xfrm>
           <a:prstGeom prst="rect">
             <a:avLst/>
@@ -7899,8 +7899,8 @@
         </p:nvSpPr>
         <p:spPr>
           <a:xfrm>
-            <a:off x="6720840" y="2788920"/>
-            <a:ext cx="4798440" cy="2512440"/>
+            <a:off x="6720840" y="2892960"/>
+            <a:ext cx="4796280" cy="2406240"/>
           </a:xfrm>
           <a:prstGeom prst="rect">
             <a:avLst/>
@@ -7958,7 +7958,7 @@
         <p:spPr>
           <a:xfrm>
             <a:off x="6720840" y="3117960"/>
-            <a:ext cx="4802760" cy="2160"/>
+            <a:ext cx="4804920" cy="4320"/>
           </a:xfrm>
           <a:prstGeom prst="straightConnector1">
             <a:avLst/>
@@ -7980,7 +7980,7 @@
         <p:spPr>
           <a:xfrm>
             <a:off x="6720840" y="3886200"/>
-            <a:ext cx="4802760" cy="2160"/>
+            <a:ext cx="4804920" cy="4320"/>
           </a:xfrm>
           <a:prstGeom prst="straightConnector1">
             <a:avLst/>
@@ -8001,8 +8001,8 @@
         </p:nvSpPr>
         <p:spPr>
           <a:xfrm>
-            <a:off x="6757560" y="2802600"/>
-            <a:ext cx="4725360" cy="308880"/>
+            <a:off x="6731640" y="2892960"/>
+            <a:ext cx="4723200" cy="306720"/>
           </a:xfrm>
           <a:prstGeom prst="rect">
             <a:avLst/>
@@ -8059,7 +8059,7 @@
         <p:spPr>
           <a:xfrm>
             <a:off x="6775560" y="3141000"/>
-            <a:ext cx="4688640" cy="729360"/>
+            <a:ext cx="4686480" cy="727200"/>
           </a:xfrm>
           <a:prstGeom prst="rect">
             <a:avLst/>
@@ -8194,7 +8194,7 @@
         <p:spPr>
           <a:xfrm>
             <a:off x="6775560" y="3909240"/>
-            <a:ext cx="4688640" cy="1378440"/>
+            <a:ext cx="4686480" cy="1376280"/>
           </a:xfrm>
           <a:prstGeom prst="rect">
             <a:avLst/>
@@ -8485,7 +8485,7 @@
         <p:spPr>
           <a:xfrm>
             <a:off x="4114800" y="5551200"/>
-            <a:ext cx="2969640" cy="1076760"/>
+            <a:ext cx="2967480" cy="1074600"/>
           </a:xfrm>
           <a:prstGeom prst="rect">
             <a:avLst/>
@@ -8543,7 +8543,7 @@
         <p:spPr>
           <a:xfrm>
             <a:off x="4114800" y="5796720"/>
-            <a:ext cx="2973960" cy="2160"/>
+            <a:ext cx="2976120" cy="4320"/>
           </a:xfrm>
           <a:prstGeom prst="straightConnector1">
             <a:avLst/>
@@ -8565,7 +8565,7 @@
         <p:spPr>
           <a:xfrm>
             <a:off x="4188600" y="5486400"/>
-            <a:ext cx="2896560" cy="308880"/>
+            <a:ext cx="2894400" cy="306720"/>
           </a:xfrm>
           <a:prstGeom prst="rect">
             <a:avLst/>
@@ -8679,7 +8679,7 @@
         <p:spPr>
           <a:xfrm>
             <a:off x="4114800" y="6015600"/>
-            <a:ext cx="2859840" cy="208080"/>
+            <a:ext cx="2857680" cy="205920"/>
           </a:xfrm>
           <a:prstGeom prst="rect">
             <a:avLst/>
@@ -8813,8 +8813,8 @@
         </p:nvCxnSpPr>
         <p:spPr>
           <a:xfrm>
-            <a:off x="6103440" y="2377440"/>
-            <a:ext cx="2160" cy="212400"/>
+            <a:off x="6101280" y="2379600"/>
+            <a:ext cx="4320" cy="365760"/>
           </a:xfrm>
           <a:prstGeom prst="straightConnector1">
             <a:avLst/>
@@ -8835,8 +8835,8 @@
         </p:nvCxnSpPr>
         <p:spPr>
           <a:xfrm>
-            <a:off x="2468880" y="2587680"/>
-            <a:ext cx="6658920" cy="2160"/>
+            <a:off x="2467080" y="2736000"/>
+            <a:ext cx="6708600" cy="9360"/>
           </a:xfrm>
           <a:prstGeom prst="straightConnector1">
             <a:avLst/>
@@ -8852,13 +8852,15 @@
       <p:cxnSp>
         <p:nvCxnSpPr>
           <p:cNvPr id="85" name="Connector 28"/>
-          <p:cNvCxnSpPr/>
+          <p:cNvCxnSpPr>
+            <a:stCxn id="84" idx="2"/>
+          </p:cNvCxnSpPr>
           <p:nvPr/>
         </p:nvCxnSpPr>
         <p:spPr>
           <a:xfrm>
-            <a:off x="2468880" y="2587680"/>
-            <a:ext cx="2160" cy="340560"/>
+            <a:off x="2467080" y="2736000"/>
+            <a:ext cx="6120" cy="194400"/>
           </a:xfrm>
           <a:prstGeom prst="straightConnector1">
             <a:avLst/>
@@ -8874,13 +8876,15 @@
       <p:cxnSp>
         <p:nvCxnSpPr>
           <p:cNvPr id="86" name="Connector 29"/>
-          <p:cNvCxnSpPr/>
+          <p:cNvCxnSpPr>
+            <a:stCxn id="84" idx="1"/>
+          </p:cNvCxnSpPr>
           <p:nvPr/>
         </p:nvCxnSpPr>
         <p:spPr>
-          <a:xfrm>
-            <a:off x="9125640" y="2587680"/>
-            <a:ext cx="2160" cy="203400"/>
+          <a:xfrm flipH="1">
+            <a:off x="9144000" y="2745000"/>
+            <a:ext cx="31680" cy="150120"/>
           </a:xfrm>
           <a:prstGeom prst="straightConnector1">
             <a:avLst/>
@@ -8901,8 +8905,66 @@
         </p:nvSpPr>
         <p:spPr>
           <a:xfrm>
-            <a:off x="6003000" y="2313360"/>
-            <a:ext cx="199080" cy="199080"/>
+            <a:off x="6003000" y="2374920"/>
+            <a:ext cx="196920" cy="137880"/>
+          </a:xfrm>
+          <a:prstGeom prst="diamond">
+            <a:avLst/>
+          </a:prstGeom>
+          <a:noFill/>
+          <a:ln w="15240">
+            <a:solidFill>
+              <a:srgbClr val="000000"/>
+            </a:solidFill>
+            <a:round/>
+          </a:ln>
+          <a:effectLst>
+            <a:outerShdw blurRad="39960" dir="5400000" dist="23040" rotWithShape="0">
+              <a:srgbClr val="000000">
+                <a:alpha val="35000"/>
+              </a:srgbClr>
+            </a:outerShdw>
+          </a:effectLst>
+        </p:spPr>
+        <p:style>
+          <a:lnRef idx="1">
+            <a:schemeClr val="accent1"/>
+          </a:lnRef>
+          <a:fillRef idx="3">
+            <a:schemeClr val="accent1"/>
+          </a:fillRef>
+          <a:effectRef idx="2">
+            <a:schemeClr val="accent1"/>
+          </a:effectRef>
+          <a:fontRef idx="minor"/>
+        </p:style>
+        <p:txBody>
+          <a:bodyPr lIns="90000" tIns="24840" rIns="90000" bIns="24840" anchor="ctr">
+            <a:noAutofit/>
+          </a:bodyPr>
+          <a:p>
+            <a:pPr/>
+            <a:endParaRPr lang="en-US" sz="1800" b="0" u="none" strike="noStrike">
+              <a:solidFill>
+                <a:schemeClr val="lt1"/>
+              </a:solidFill>
+              <a:effectLst/>
+              <a:uFillTx/>
+              <a:latin typeface="Calibri"/>
+            </a:endParaRPr>
+          </a:p>
+        </p:txBody>
+      </p:sp>
+      <p:sp>
+        <p:nvSpPr>
+          <p:cNvPr id="88" name="Diamond 34"/>
+          <p:cNvSpPr/>
+          <p:nvPr/>
+        </p:nvSpPr>
+        <p:spPr>
+          <a:xfrm>
+            <a:off x="9025200" y="5287680"/>
+            <a:ext cx="196920" cy="288720"/>
           </a:xfrm>
           <a:prstGeom prst="diamond">
             <a:avLst/>
@@ -8953,14 +9015,40 @@
       </p:sp>
       <p:cxnSp>
         <p:nvCxnSpPr>
-          <p:cNvPr id="88" name="Connector 33"/>
-          <p:cNvCxnSpPr/>
+          <p:cNvPr id="89" name="Connector 2"/>
+          <p:cNvCxnSpPr>
+            <a:endCxn id="78" idx="3"/>
+          </p:cNvCxnSpPr>
           <p:nvPr/>
         </p:nvCxnSpPr>
         <p:spPr>
-          <a:xfrm>
-            <a:off x="9125640" y="5303520"/>
-            <a:ext cx="2160" cy="276480"/>
+          <a:xfrm flipH="1">
+            <a:off x="7082280" y="6044400"/>
+            <a:ext cx="2040840" cy="44640"/>
+          </a:xfrm>
+          <a:prstGeom prst="straightConnector1">
+            <a:avLst/>
+          </a:prstGeom>
+          <a:ln w="15875">
+            <a:solidFill>
+              <a:srgbClr val="000000"/>
+            </a:solidFill>
+            <a:round/>
+          </a:ln>
+        </p:spPr>
+      </p:cxnSp>
+      <p:cxnSp>
+        <p:nvCxnSpPr>
+          <p:cNvPr id="90" name="Connector 6"/>
+          <p:cNvCxnSpPr>
+            <a:stCxn id="78" idx="1"/>
+          </p:cNvCxnSpPr>
+          <p:nvPr/>
+        </p:nvCxnSpPr>
+        <p:spPr>
+          <a:xfrm flipV="1">
+            <a:off x="4114800" y="6015600"/>
+            <a:ext cx="2880" cy="73440"/>
           </a:xfrm>
           <a:prstGeom prst="straightConnector1">
             <a:avLst/>
@@ -8975,145 +9063,14 @@
       </p:cxnSp>
       <p:sp>
         <p:nvSpPr>
-          <p:cNvPr id="89" name="Diamond 34"/>
-          <p:cNvSpPr/>
-          <p:nvPr/>
-        </p:nvSpPr>
-        <p:spPr>
-          <a:xfrm>
-            <a:off x="9025200" y="5239440"/>
-            <a:ext cx="199080" cy="199080"/>
-          </a:xfrm>
-          <a:prstGeom prst="diamond">
-            <a:avLst/>
-          </a:prstGeom>
-          <a:noFill/>
-          <a:ln w="15240">
-            <a:solidFill>
-              <a:srgbClr val="000000"/>
-            </a:solidFill>
-            <a:round/>
-          </a:ln>
-          <a:effectLst>
-            <a:outerShdw blurRad="39960" dir="5400000" dist="23040" rotWithShape="0">
-              <a:srgbClr val="000000">
-                <a:alpha val="35000"/>
-              </a:srgbClr>
-            </a:outerShdw>
-          </a:effectLst>
-        </p:spPr>
-        <p:style>
-          <a:lnRef idx="1">
-            <a:schemeClr val="accent1"/>
-          </a:lnRef>
-          <a:fillRef idx="3">
-            <a:schemeClr val="accent1"/>
-          </a:fillRef>
-          <a:effectRef idx="2">
-            <a:schemeClr val="accent1"/>
-          </a:effectRef>
-          <a:fontRef idx="minor"/>
-        </p:style>
-        <p:txBody>
-          <a:bodyPr lIns="90000" tIns="45000" rIns="90000" bIns="45000" anchor="ctr">
-            <a:noAutofit/>
-          </a:bodyPr>
-          <a:p>
-            <a:pPr/>
-            <a:endParaRPr lang="en-US" sz="1800" b="0" u="none" strike="noStrike">
-              <a:solidFill>
-                <a:schemeClr val="lt1"/>
-              </a:solidFill>
-              <a:effectLst/>
-              <a:uFillTx/>
-              <a:latin typeface="Calibri"/>
-            </a:endParaRPr>
-          </a:p>
-        </p:txBody>
-      </p:sp>
-      <p:cxnSp>
-        <p:nvCxnSpPr>
-          <p:cNvPr id="90" name="Connector 1"/>
-          <p:cNvCxnSpPr>
-            <a:endCxn id="88" idx="1"/>
-          </p:cNvCxnSpPr>
-          <p:nvPr/>
-        </p:nvCxnSpPr>
-        <p:spPr>
-          <a:xfrm>
-            <a:off x="9126720" y="5578200"/>
-            <a:ext cx="1080" cy="1800"/>
-          </a:xfrm>
-          <a:prstGeom prst="straightConnector1">
-            <a:avLst/>
-          </a:prstGeom>
-          <a:ln w="15875">
-            <a:solidFill>
-              <a:srgbClr val="000000"/>
-            </a:solidFill>
-            <a:round/>
-          </a:ln>
-        </p:spPr>
-      </p:cxnSp>
-      <p:cxnSp>
-        <p:nvCxnSpPr>
-          <p:cNvPr id="91" name="Connector 2"/>
-          <p:cNvCxnSpPr>
-            <a:stCxn id="90" idx="3"/>
-            <a:endCxn id="78" idx="3"/>
-          </p:cNvCxnSpPr>
-          <p:nvPr/>
-        </p:nvCxnSpPr>
-        <p:spPr>
-          <a:xfrm flipH="1">
-            <a:off x="7084440" y="5578920"/>
-            <a:ext cx="2043000" cy="511200"/>
-          </a:xfrm>
-          <a:prstGeom prst="straightConnector1">
-            <a:avLst/>
-          </a:prstGeom>
-          <a:ln w="15875">
-            <a:solidFill>
-              <a:srgbClr val="000000"/>
-            </a:solidFill>
-            <a:round/>
-          </a:ln>
-        </p:spPr>
-      </p:cxnSp>
-      <p:cxnSp>
-        <p:nvCxnSpPr>
-          <p:cNvPr id="92" name="Connector 6"/>
-          <p:cNvCxnSpPr>
-            <a:stCxn id="78" idx="1"/>
-          </p:cNvCxnSpPr>
-          <p:nvPr/>
-        </p:nvCxnSpPr>
-        <p:spPr>
-          <a:xfrm flipV="1">
-            <a:off x="4114800" y="6015600"/>
-            <a:ext cx="720" cy="74520"/>
-          </a:xfrm>
-          <a:prstGeom prst="straightConnector1">
-            <a:avLst/>
-          </a:prstGeom>
-          <a:ln w="15875">
-            <a:solidFill>
-              <a:srgbClr val="000000"/>
-            </a:solidFill>
-            <a:round/>
-          </a:ln>
-        </p:spPr>
-      </p:cxnSp>
-      <p:sp>
-        <p:nvSpPr>
-          <p:cNvPr id="93" name="Rectangle 1"/>
+          <p:cNvPr id="91" name="Rectangle 1"/>
           <p:cNvSpPr/>
           <p:nvPr/>
         </p:nvSpPr>
         <p:spPr>
           <a:xfrm>
             <a:off x="4114800" y="5787000"/>
-            <a:ext cx="2969640" cy="228600"/>
+            <a:ext cx="2967480" cy="226440"/>
           </a:xfrm>
           <a:prstGeom prst="rect">
             <a:avLst/>
@@ -9162,6 +9119,30 @@
           </a:p>
         </p:txBody>
       </p:sp>
+      <p:cxnSp>
+        <p:nvCxnSpPr>
+          <p:cNvPr id="92" name="Connector 1"/>
+          <p:cNvCxnSpPr>
+            <a:endCxn id="89" idx="2"/>
+          </p:cNvCxnSpPr>
+          <p:nvPr/>
+        </p:nvCxnSpPr>
+        <p:spPr>
+          <a:xfrm flipH="1">
+            <a:off x="9122760" y="5287680"/>
+            <a:ext cx="18360" cy="757080"/>
+          </a:xfrm>
+          <a:prstGeom prst="straightConnector1">
+            <a:avLst/>
+          </a:prstGeom>
+          <a:ln w="15875">
+            <a:solidFill>
+              <a:srgbClr val="000000"/>
+            </a:solidFill>
+            <a:round/>
+          </a:ln>
+        </p:spPr>
+      </p:cxnSp>
     </p:spTree>
   </p:cSld>
   <mc:AlternateContent>
